--- a/docs/public/course-assets/course-pptx/em-004.pptx
+++ b/docs/public/course-assets/course-pptx/em-004.pptx
@@ -2,23 +2,23 @@
 <file path=ppt/presentation.xml><?xml version="1.0" encoding="utf-8"?>
 <p:presentation xmlns:p="http://schemas.openxmlformats.org/presentationml/2006/main">
   <p:sldMasterIdLst>
-    <p:sldMasterId xmlns:r="http://schemas.openxmlformats.org/officeDocument/2006/relationships" id="2147483648" r:id="R61d710f6586e4871"/>
+    <p:sldMasterId xmlns:r="http://schemas.openxmlformats.org/officeDocument/2006/relationships" id="2147483648" r:id="R981faee184204e0a"/>
   </p:sldMasterIdLst>
   <p:notesMasterIdLst>
-    <p:notesMasterId xmlns:r="http://schemas.openxmlformats.org/officeDocument/2006/relationships" r:id="R042b5678aacb496f"/>
+    <p:notesMasterId xmlns:r="http://schemas.openxmlformats.org/officeDocument/2006/relationships" r:id="R057a546ed77547a1"/>
   </p:notesMasterIdLst>
   <p:sldIdLst>
-    <p:sldId xmlns:r="http://schemas.openxmlformats.org/officeDocument/2006/relationships" id="256" r:id="R1dba7c334cdc4b71"/>
-    <p:sldId xmlns:r="http://schemas.openxmlformats.org/officeDocument/2006/relationships" id="257" r:id="R33cdbdf3e3c744d0"/>
-    <p:sldId xmlns:r="http://schemas.openxmlformats.org/officeDocument/2006/relationships" id="258" r:id="R3df7b33440104ef6"/>
-    <p:sldId xmlns:r="http://schemas.openxmlformats.org/officeDocument/2006/relationships" id="259" r:id="R6623c67301464ea4"/>
-    <p:sldId xmlns:r="http://schemas.openxmlformats.org/officeDocument/2006/relationships" id="260" r:id="Rcfc31f918a4f4d5a"/>
-    <p:sldId xmlns:r="http://schemas.openxmlformats.org/officeDocument/2006/relationships" id="261" r:id="Rb5261488039e41c9"/>
-    <p:sldId xmlns:r="http://schemas.openxmlformats.org/officeDocument/2006/relationships" id="262" r:id="Ra79612773ee64cbb"/>
-    <p:sldId xmlns:r="http://schemas.openxmlformats.org/officeDocument/2006/relationships" id="263" r:id="R0b3fcba5797d4d5b"/>
-    <p:sldId xmlns:r="http://schemas.openxmlformats.org/officeDocument/2006/relationships" id="264" r:id="R4089813a80d64c57"/>
-    <p:sldId xmlns:r="http://schemas.openxmlformats.org/officeDocument/2006/relationships" id="265" r:id="Re5b2262239624a53"/>
-    <p:sldId xmlns:r="http://schemas.openxmlformats.org/officeDocument/2006/relationships" id="266" r:id="Rd7390c1f461c43ce"/>
+    <p:sldId xmlns:r="http://schemas.openxmlformats.org/officeDocument/2006/relationships" id="256" r:id="R2c1f983e5aa44013"/>
+    <p:sldId xmlns:r="http://schemas.openxmlformats.org/officeDocument/2006/relationships" id="257" r:id="Rd975f8b1ea6f48e7"/>
+    <p:sldId xmlns:r="http://schemas.openxmlformats.org/officeDocument/2006/relationships" id="258" r:id="Raa95008d8e374e97"/>
+    <p:sldId xmlns:r="http://schemas.openxmlformats.org/officeDocument/2006/relationships" id="259" r:id="Rc650c2f7e70a463b"/>
+    <p:sldId xmlns:r="http://schemas.openxmlformats.org/officeDocument/2006/relationships" id="260" r:id="Rfdb6bbe39696479e"/>
+    <p:sldId xmlns:r="http://schemas.openxmlformats.org/officeDocument/2006/relationships" id="261" r:id="R08aea5abafeb4545"/>
+    <p:sldId xmlns:r="http://schemas.openxmlformats.org/officeDocument/2006/relationships" id="262" r:id="R3c0fa7ccfd58475a"/>
+    <p:sldId xmlns:r="http://schemas.openxmlformats.org/officeDocument/2006/relationships" id="263" r:id="R2e606c88c62342d2"/>
+    <p:sldId xmlns:r="http://schemas.openxmlformats.org/officeDocument/2006/relationships" id="264" r:id="R7b68239181804cd1"/>
+    <p:sldId xmlns:r="http://schemas.openxmlformats.org/officeDocument/2006/relationships" id="265" r:id="Rcc394612783744f9"/>
+    <p:sldId xmlns:r="http://schemas.openxmlformats.org/officeDocument/2006/relationships" id="266" r:id="Ra707b7ba85b346e2"/>
   </p:sldIdLst>
   <p:sldSz cx="12192000" cy="6858000"/>
   <p:notesSz cx="6858000" cy="9144000"/>
@@ -1271,7 +1271,7 @@
   </p:cSld>
   <p:clrMap bg1="lt1" tx1="dk1" bg2="lt2" tx2="dk2" accent1="accent1" accent2="accent2" accent3="accent3" accent4="accent4" accent5="accent5" accent6="accent6" hlink="hlink" folHlink="folHlink"/>
   <p:sldLayoutIdLst>
-    <p:sldLayoutId xmlns:r="http://schemas.openxmlformats.org/officeDocument/2006/relationships" id="2147483649" r:id="Rc4808832bdd94220"/>
+    <p:sldLayoutId xmlns:r="http://schemas.openxmlformats.org/officeDocument/2006/relationships" id="2147483649" r:id="R044bc77fc69b49c7"/>
   </p:sldLayoutIdLst>
   <p:txStyles>
     <p:titleStyle>
@@ -1822,7 +1822,7 @@
           <p:cNvPr id="1" name="cover-rule">
             <a:extLst xmlns:a="http://schemas.openxmlformats.org/drawingml/2006/main">
               <a:ext uri="{FF2B5EF4-FFF2-40B4-BE49-F238E27FC236}">
-                <a16:creationId xmlns:a16="http://schemas.microsoft.com/office/drawing/2014/main" id="{CC621B01-9A4E-44F7-91D3-B2D2ABDD2465}"/>
+                <a16:creationId xmlns:a16="http://schemas.microsoft.com/office/drawing/2014/main" id="{8BA8094C-4124-48CA-B75C-E487F4950FAB}"/>
               </a:ext>
             </a:extLst>
           </p:cNvPr>
@@ -1855,7 +1855,7 @@
           <p:cNvPr id="2" name="cover-ring-1">
             <a:extLst xmlns:a="http://schemas.openxmlformats.org/drawingml/2006/main">
               <a:ext uri="{FF2B5EF4-FFF2-40B4-BE49-F238E27FC236}">
-                <a16:creationId xmlns:a16="http://schemas.microsoft.com/office/drawing/2014/main" id="{904E8B0A-B9E7-462C-ADB6-C7BC49E58B78}"/>
+                <a16:creationId xmlns:a16="http://schemas.microsoft.com/office/drawing/2014/main" id="{421CE4F9-6336-4407-B6C3-8042CC95B07E}"/>
               </a:ext>
             </a:extLst>
           </p:cNvPr>
@@ -1886,7 +1886,7 @@
           <p:cNvPr id="3" name="cover-ring-2">
             <a:extLst xmlns:a="http://schemas.openxmlformats.org/drawingml/2006/main">
               <a:ext uri="{FF2B5EF4-FFF2-40B4-BE49-F238E27FC236}">
-                <a16:creationId xmlns:a16="http://schemas.microsoft.com/office/drawing/2014/main" id="{B4654E25-034E-4EC2-84B0-BBCB9D47E882}"/>
+                <a16:creationId xmlns:a16="http://schemas.microsoft.com/office/drawing/2014/main" id="{F235E614-AF22-4570-9935-A4F88DD92C40}"/>
               </a:ext>
             </a:extLst>
           </p:cNvPr>
@@ -1917,7 +1917,7 @@
           <p:cNvPr id="4" name="cover-core">
             <a:extLst xmlns:a="http://schemas.openxmlformats.org/drawingml/2006/main">
               <a:ext uri="{FF2B5EF4-FFF2-40B4-BE49-F238E27FC236}">
-                <a16:creationId xmlns:a16="http://schemas.microsoft.com/office/drawing/2014/main" id="{B08D943F-A314-4DA0-B0E5-EEE4638289ED}"/>
+                <a16:creationId xmlns:a16="http://schemas.microsoft.com/office/drawing/2014/main" id="{5A8098BE-EB64-47E8-A7C9-8E7A00304AD3}"/>
               </a:ext>
             </a:extLst>
           </p:cNvPr>
@@ -1950,7 +1950,7 @@
           <p:cNvPr id="5" name="cover-line-1">
             <a:extLst xmlns:a="http://schemas.openxmlformats.org/drawingml/2006/main">
               <a:ext uri="{FF2B5EF4-FFF2-40B4-BE49-F238E27FC236}">
-                <a16:creationId xmlns:a16="http://schemas.microsoft.com/office/drawing/2014/main" id="{394F6AA8-E0D0-436B-A138-C959CC4F1352}"/>
+                <a16:creationId xmlns:a16="http://schemas.microsoft.com/office/drawing/2014/main" id="{AC5D2A6A-12E4-44E0-A739-6115C3271570}"/>
               </a:ext>
             </a:extLst>
           </p:cNvPr>
@@ -1981,7 +1981,7 @@
           <p:cNvPr id="6" name="cover-line-2">
             <a:extLst xmlns:a="http://schemas.openxmlformats.org/drawingml/2006/main">
               <a:ext uri="{FF2B5EF4-FFF2-40B4-BE49-F238E27FC236}">
-                <a16:creationId xmlns:a16="http://schemas.microsoft.com/office/drawing/2014/main" id="{344243C8-7C3C-44D4-8C51-853034DFABBA}"/>
+                <a16:creationId xmlns:a16="http://schemas.microsoft.com/office/drawing/2014/main" id="{808E245C-EDE5-4928-BEDE-B4760BF1DB15}"/>
               </a:ext>
             </a:extLst>
           </p:cNvPr>
@@ -2012,7 +2012,7 @@
           <p:cNvPr id="7" name="cover-eyebrow">
             <a:extLst xmlns:a="http://schemas.openxmlformats.org/drawingml/2006/main">
               <a:ext uri="{FF2B5EF4-FFF2-40B4-BE49-F238E27FC236}">
-                <a16:creationId xmlns:a16="http://schemas.microsoft.com/office/drawing/2014/main" id="{4C77DA8D-D459-4E01-93D2-D1B5B4964578}"/>
+                <a16:creationId xmlns:a16="http://schemas.microsoft.com/office/drawing/2014/main" id="{A872A28C-27F4-44A2-9573-870CE55CE1A0}"/>
               </a:ext>
             </a:extLst>
           </p:cNvPr>
@@ -2070,7 +2070,7 @@
           <p:cNvPr id="8" name="cover-title">
             <a:extLst xmlns:a="http://schemas.openxmlformats.org/drawingml/2006/main">
               <a:ext uri="{FF2B5EF4-FFF2-40B4-BE49-F238E27FC236}">
-                <a16:creationId xmlns:a16="http://schemas.microsoft.com/office/drawing/2014/main" id="{45E4FAB8-3558-4ABC-BFF6-46386A939194}"/>
+                <a16:creationId xmlns:a16="http://schemas.microsoft.com/office/drawing/2014/main" id="{FA634CA2-3990-4915-ACF8-F9F1F2185E34}"/>
               </a:ext>
             </a:extLst>
           </p:cNvPr>
@@ -2128,7 +2128,7 @@
           <p:cNvPr id="9" name="cover-subtitle">
             <a:extLst xmlns:a="http://schemas.openxmlformats.org/drawingml/2006/main">
               <a:ext uri="{FF2B5EF4-FFF2-40B4-BE49-F238E27FC236}">
-                <a16:creationId xmlns:a16="http://schemas.microsoft.com/office/drawing/2014/main" id="{D1231AB7-C012-496B-A957-2E3EF7EC1597}"/>
+                <a16:creationId xmlns:a16="http://schemas.microsoft.com/office/drawing/2014/main" id="{7564D229-0128-40FA-AB64-735E58998DD3}"/>
               </a:ext>
             </a:extLst>
           </p:cNvPr>
@@ -2190,7 +2190,7 @@
           <p:cNvPr id="10" name="cover-lead">
             <a:extLst xmlns:a="http://schemas.openxmlformats.org/drawingml/2006/main">
               <a:ext uri="{FF2B5EF4-FFF2-40B4-BE49-F238E27FC236}">
-                <a16:creationId xmlns:a16="http://schemas.microsoft.com/office/drawing/2014/main" id="{5DACE5E6-B9B9-405A-A2AD-6342F15DDDE1}"/>
+                <a16:creationId xmlns:a16="http://schemas.microsoft.com/office/drawing/2014/main" id="{2ECAE4E2-7ACD-4817-90F5-6CF26929B971}"/>
               </a:ext>
             </a:extLst>
           </p:cNvPr>
@@ -2248,7 +2248,7 @@
           <p:cNvPr id="11" name="cover-course">
             <a:extLst xmlns:a="http://schemas.openxmlformats.org/drawingml/2006/main">
               <a:ext uri="{FF2B5EF4-FFF2-40B4-BE49-F238E27FC236}">
-                <a16:creationId xmlns:a16="http://schemas.microsoft.com/office/drawing/2014/main" id="{1BD00846-FE5F-4AA0-8DB5-55D9515D20DE}"/>
+                <a16:creationId xmlns:a16="http://schemas.microsoft.com/office/drawing/2014/main" id="{8D0A3076-91C8-4A28-AEE5-A1368A70E6F9}"/>
               </a:ext>
             </a:extLst>
           </p:cNvPr>
@@ -2306,7 +2306,7 @@
           <p:cNvPr id="12" name="cover-id">
             <a:extLst xmlns:a="http://schemas.openxmlformats.org/drawingml/2006/main">
               <a:ext uri="{FF2B5EF4-FFF2-40B4-BE49-F238E27FC236}">
-                <a16:creationId xmlns:a16="http://schemas.microsoft.com/office/drawing/2014/main" id="{1D5BB583-13E3-4D30-93DB-BA8C454FB817}"/>
+                <a16:creationId xmlns:a16="http://schemas.microsoft.com/office/drawing/2014/main" id="{9E768B93-B73A-4A04-B6DC-D6EF7258EA2F}"/>
               </a:ext>
             </a:extLst>
           </p:cNvPr>
@@ -2362,7 +2362,7 @@
     </p:spTree>
     <p:extLst>
       <p:ext uri="{BB962C8B-B14F-4D97-AF65-F5344CB8AC3E}">
-        <p14:creationId xmlns:p14="http://schemas.microsoft.com/office/powerpoint/2010/main" val="1274184329"/>
+        <p14:creationId xmlns:p14="http://schemas.microsoft.com/office/powerpoint/2010/main" val="199298483"/>
       </p:ext>
     </p:extLst>
   </p:cSld>
@@ -2393,7 +2393,7 @@
           <p:cNvPr id="1" name="s10-rule">
             <a:extLst xmlns:a="http://schemas.openxmlformats.org/drawingml/2006/main">
               <a:ext uri="{FF2B5EF4-FFF2-40B4-BE49-F238E27FC236}">
-                <a16:creationId xmlns:a16="http://schemas.microsoft.com/office/drawing/2014/main" id="{998AB1D3-4268-44D6-8AB6-2B34B4022F0F}"/>
+                <a16:creationId xmlns:a16="http://schemas.microsoft.com/office/drawing/2014/main" id="{75FFB556-371E-434A-9212-D80C2C74BF3A}"/>
               </a:ext>
             </a:extLst>
           </p:cNvPr>
@@ -2426,7 +2426,7 @@
           <p:cNvPr id="2" name="s10-eyebrow">
             <a:extLst xmlns:a="http://schemas.openxmlformats.org/drawingml/2006/main">
               <a:ext uri="{FF2B5EF4-FFF2-40B4-BE49-F238E27FC236}">
-                <a16:creationId xmlns:a16="http://schemas.microsoft.com/office/drawing/2014/main" id="{02B572E2-FC0A-4B36-BA96-18604C662316}"/>
+                <a16:creationId xmlns:a16="http://schemas.microsoft.com/office/drawing/2014/main" id="{1C1AFB59-0E73-48BC-BBBF-EE93E67EA586}"/>
               </a:ext>
             </a:extLst>
           </p:cNvPr>
@@ -2484,7 +2484,7 @@
           <p:cNvPr id="3" name="s10-title">
             <a:extLst xmlns:a="http://schemas.openxmlformats.org/drawingml/2006/main">
               <a:ext uri="{FF2B5EF4-FFF2-40B4-BE49-F238E27FC236}">
-                <a16:creationId xmlns:a16="http://schemas.microsoft.com/office/drawing/2014/main" id="{9D910C5F-DD88-491F-B922-063490F25989}"/>
+                <a16:creationId xmlns:a16="http://schemas.microsoft.com/office/drawing/2014/main" id="{A2D3D88A-0584-483B-AD43-614DDD90692B}"/>
               </a:ext>
             </a:extLst>
           </p:cNvPr>
@@ -2532,7 +2532,7 @@
                 <a:ea typeface="PingFang SC"/>
                 <a:cs typeface="PingFang SC"/>
               </a:rPr>
-              <a:t>带走三条可复用的判断原则</a:t>
+              <a:t>运动控制与迁移：判断时先抓住三点</a:t>
             </a:r>
           </a:p>
         </p:txBody>
@@ -2542,7 +2542,7 @@
           <p:cNvPr id="4" name="s10-footer">
             <a:extLst xmlns:a="http://schemas.openxmlformats.org/drawingml/2006/main">
               <a:ext uri="{FF2B5EF4-FFF2-40B4-BE49-F238E27FC236}">
-                <a16:creationId xmlns:a16="http://schemas.microsoft.com/office/drawing/2014/main" id="{4D90BB58-5872-49B0-8F9B-D146A3894F2A}"/>
+                <a16:creationId xmlns:a16="http://schemas.microsoft.com/office/drawing/2014/main" id="{683C549B-3C26-4729-A99C-A5E867B06B6E}"/>
               </a:ext>
             </a:extLst>
           </p:cNvPr>
@@ -2573,7 +2573,7 @@
           <p:cNvPr id="5" name="s10-identity">
             <a:extLst xmlns:a="http://schemas.openxmlformats.org/drawingml/2006/main">
               <a:ext uri="{FF2B5EF4-FFF2-40B4-BE49-F238E27FC236}">
-                <a16:creationId xmlns:a16="http://schemas.microsoft.com/office/drawing/2014/main" id="{2859AD21-55D2-4F9B-9F61-05A4A4E2FAEE}"/>
+                <a16:creationId xmlns:a16="http://schemas.microsoft.com/office/drawing/2014/main" id="{6D721EB2-6680-408E-AF4E-0C3DD6DF6E43}"/>
               </a:ext>
             </a:extLst>
           </p:cNvPr>
@@ -2631,7 +2631,7 @@
           <p:cNvPr id="6" name="recap-circle-0">
             <a:extLst xmlns:a="http://schemas.openxmlformats.org/drawingml/2006/main">
               <a:ext uri="{FF2B5EF4-FFF2-40B4-BE49-F238E27FC236}">
-                <a16:creationId xmlns:a16="http://schemas.microsoft.com/office/drawing/2014/main" id="{9A484FE0-E3D6-4190-A1DA-EA6E229C89D2}"/>
+                <a16:creationId xmlns:a16="http://schemas.microsoft.com/office/drawing/2014/main" id="{C1CAAAA2-1243-44A4-98AF-F73529ED087C}"/>
               </a:ext>
             </a:extLst>
           </p:cNvPr>
@@ -2664,7 +2664,7 @@
           <p:cNvPr id="7" name="recap-number-0">
             <a:extLst xmlns:a="http://schemas.openxmlformats.org/drawingml/2006/main">
               <a:ext uri="{FF2B5EF4-FFF2-40B4-BE49-F238E27FC236}">
-                <a16:creationId xmlns:a16="http://schemas.microsoft.com/office/drawing/2014/main" id="{6011357E-BCF0-4BD9-8F09-4C7CBB1913C7}"/>
+                <a16:creationId xmlns:a16="http://schemas.microsoft.com/office/drawing/2014/main" id="{C08606FD-1C38-4A65-A3E0-3BA284222D3A}"/>
               </a:ext>
             </a:extLst>
           </p:cNvPr>
@@ -2722,7 +2722,7 @@
           <p:cNvPr id="8" name="recap-item-0">
             <a:extLst xmlns:a="http://schemas.openxmlformats.org/drawingml/2006/main">
               <a:ext uri="{FF2B5EF4-FFF2-40B4-BE49-F238E27FC236}">
-                <a16:creationId xmlns:a16="http://schemas.microsoft.com/office/drawing/2014/main" id="{FD7DBFB6-74FD-4968-9A28-AFB5A56C070D}"/>
+                <a16:creationId xmlns:a16="http://schemas.microsoft.com/office/drawing/2014/main" id="{87EC06C7-9C4A-4FC4-BFB6-AD973A36067D}"/>
               </a:ext>
             </a:extLst>
           </p:cNvPr>
@@ -2786,7 +2786,7 @@
           <p:cNvPr id="9" name="recap-connector-0">
             <a:extLst xmlns:a="http://schemas.openxmlformats.org/drawingml/2006/main">
               <a:ext uri="{FF2B5EF4-FFF2-40B4-BE49-F238E27FC236}">
-                <a16:creationId xmlns:a16="http://schemas.microsoft.com/office/drawing/2014/main" id="{863C1CE7-45C3-47E5-A40A-2AAFEC41C141}"/>
+                <a16:creationId xmlns:a16="http://schemas.microsoft.com/office/drawing/2014/main" id="{1370E1E1-C569-4A39-AB07-414CC29B8E71}"/>
               </a:ext>
             </a:extLst>
           </p:cNvPr>
@@ -2806,7 +2806,7 @@
           <a:noFill xmlns:a="http://schemas.openxmlformats.org/drawingml/2006/main"/>
           <a:ln xmlns:a="http://schemas.openxmlformats.org/drawingml/2006/main" w="28575">
             <a:solidFill>
-              <a:srgbClr val="2D9B72"/>
+              <a:srgbClr val="0B6B4F"/>
             </a:solidFill>
             <a:prstDash val="solid"/>
           </a:ln>
@@ -2817,7 +2817,7 @@
           <p:cNvPr id="10" name="recap-circle-1">
             <a:extLst xmlns:a="http://schemas.openxmlformats.org/drawingml/2006/main">
               <a:ext uri="{FF2B5EF4-FFF2-40B4-BE49-F238E27FC236}">
-                <a16:creationId xmlns:a16="http://schemas.microsoft.com/office/drawing/2014/main" id="{BBA9FFB6-B1F5-4648-BE32-050D17D4CBEB}"/>
+                <a16:creationId xmlns:a16="http://schemas.microsoft.com/office/drawing/2014/main" id="{0F588BBE-0F56-4B63-99F6-A32D94D54CC4}"/>
               </a:ext>
             </a:extLst>
           </p:cNvPr>
@@ -2850,7 +2850,7 @@
           <p:cNvPr id="11" name="recap-number-1">
             <a:extLst xmlns:a="http://schemas.openxmlformats.org/drawingml/2006/main">
               <a:ext uri="{FF2B5EF4-FFF2-40B4-BE49-F238E27FC236}">
-                <a16:creationId xmlns:a16="http://schemas.microsoft.com/office/drawing/2014/main" id="{2BEEA3EE-ED61-4FC5-AB72-40221B126D8A}"/>
+                <a16:creationId xmlns:a16="http://schemas.microsoft.com/office/drawing/2014/main" id="{690046C8-8B73-4202-8719-6132B499CDED}"/>
               </a:ext>
             </a:extLst>
           </p:cNvPr>
@@ -2908,7 +2908,7 @@
           <p:cNvPr id="12" name="recap-item-1">
             <a:extLst xmlns:a="http://schemas.openxmlformats.org/drawingml/2006/main">
               <a:ext uri="{FF2B5EF4-FFF2-40B4-BE49-F238E27FC236}">
-                <a16:creationId xmlns:a16="http://schemas.microsoft.com/office/drawing/2014/main" id="{C9815D8F-13D2-4419-A4C5-4CC78391BCB5}"/>
+                <a16:creationId xmlns:a16="http://schemas.microsoft.com/office/drawing/2014/main" id="{C91B9C31-01BB-48E5-9FFD-117D0433CCF5}"/>
               </a:ext>
             </a:extLst>
           </p:cNvPr>
@@ -2962,7 +2962,7 @@
                 <a:ea typeface="PingFang SC"/>
                 <a:cs typeface="PingFang SC"/>
               </a:rPr>
-              <a:t>强化学习中的智能体读取状态或观测，输出动作，环境返回下一状态与奖励</a:t>
+              <a:t>强化学习把观测、动作与奖励连成控制闭环</a:t>
             </a:r>
           </a:p>
         </p:txBody>
@@ -2972,7 +2972,7 @@
           <p:cNvPr id="13" name="recap-connector-1">
             <a:extLst xmlns:a="http://schemas.openxmlformats.org/drawingml/2006/main">
               <a:ext uri="{FF2B5EF4-FFF2-40B4-BE49-F238E27FC236}">
-                <a16:creationId xmlns:a16="http://schemas.microsoft.com/office/drawing/2014/main" id="{077C1263-67B4-4AF1-B31E-E2E6734F6AA4}"/>
+                <a16:creationId xmlns:a16="http://schemas.microsoft.com/office/drawing/2014/main" id="{B49209BA-083B-4D8F-924A-547EBB6F17F8}"/>
               </a:ext>
             </a:extLst>
           </p:cNvPr>
@@ -2992,7 +2992,7 @@
           <a:noFill xmlns:a="http://schemas.openxmlformats.org/drawingml/2006/main"/>
           <a:ln xmlns:a="http://schemas.openxmlformats.org/drawingml/2006/main" w="28575">
             <a:solidFill>
-              <a:srgbClr val="2D9B72"/>
+              <a:srgbClr val="0B6B4F"/>
             </a:solidFill>
             <a:prstDash val="solid"/>
           </a:ln>
@@ -3003,7 +3003,7 @@
           <p:cNvPr id="14" name="recap-circle-2">
             <a:extLst xmlns:a="http://schemas.openxmlformats.org/drawingml/2006/main">
               <a:ext uri="{FF2B5EF4-FFF2-40B4-BE49-F238E27FC236}">
-                <a16:creationId xmlns:a16="http://schemas.microsoft.com/office/drawing/2014/main" id="{03FD7C2C-DECA-40DF-B886-BB929CD915A5}"/>
+                <a16:creationId xmlns:a16="http://schemas.microsoft.com/office/drawing/2014/main" id="{2B4C3F3F-BD66-43E2-A9B5-74E9E7375C08}"/>
               </a:ext>
             </a:extLst>
           </p:cNvPr>
@@ -3021,7 +3021,7 @@
             <a:avLst/>
           </a:prstGeom>
           <a:solidFill xmlns:a="http://schemas.openxmlformats.org/drawingml/2006/main">
-            <a:srgbClr val="2D9B72"/>
+            <a:srgbClr val="0B6B4F"/>
           </a:solidFill>
           <a:ln xmlns:a="http://schemas.openxmlformats.org/drawingml/2006/main" w="28575">
             <a:solidFill>
@@ -3036,7 +3036,7 @@
           <p:cNvPr id="15" name="recap-number-2">
             <a:extLst xmlns:a="http://schemas.openxmlformats.org/drawingml/2006/main">
               <a:ext uri="{FF2B5EF4-FFF2-40B4-BE49-F238E27FC236}">
-                <a16:creationId xmlns:a16="http://schemas.microsoft.com/office/drawing/2014/main" id="{EE573849-E51E-464C-B3C8-52C882436451}"/>
+                <a16:creationId xmlns:a16="http://schemas.microsoft.com/office/drawing/2014/main" id="{615A8056-337E-4416-89CC-60E0DFBDBDC3}"/>
               </a:ext>
             </a:extLst>
           </p:cNvPr>
@@ -3094,7 +3094,7 @@
           <p:cNvPr id="16" name="recap-item-2">
             <a:extLst xmlns:a="http://schemas.openxmlformats.org/drawingml/2006/main">
               <a:ext uri="{FF2B5EF4-FFF2-40B4-BE49-F238E27FC236}">
-                <a16:creationId xmlns:a16="http://schemas.microsoft.com/office/drawing/2014/main" id="{B5C0D5ED-BEC0-4318-8F4F-DB530CFDF117}"/>
+                <a16:creationId xmlns:a16="http://schemas.microsoft.com/office/drawing/2014/main" id="{4D81F751-E089-4DDF-A034-46482442BB20}"/>
               </a:ext>
             </a:extLst>
           </p:cNvPr>
@@ -3118,7 +3118,7 @@
           </a:solidFill>
           <a:ln xmlns:a="http://schemas.openxmlformats.org/drawingml/2006/main" w="19050">
             <a:solidFill>
-              <a:srgbClr val="2D9B72"/>
+              <a:srgbClr val="0B6B4F"/>
             </a:solidFill>
             <a:prstDash val="solid"/>
           </a:ln>
@@ -3148,7 +3148,7 @@
                 <a:ea typeface="PingFang SC"/>
                 <a:cs typeface="PingFang SC"/>
               </a:rPr>
-              <a:t>典型流程先在 Isaac Gym 等并行仿真环境训练</a:t>
+              <a:t>典型流程先在 Isaac Lab 等并行仿真环境训练</a:t>
             </a:r>
           </a:p>
         </p:txBody>
@@ -3156,7 +3156,7 @@
     </p:spTree>
     <p:extLst>
       <p:ext uri="{BB962C8B-B14F-4D97-AF65-F5344CB8AC3E}">
-        <p14:creationId xmlns:p14="http://schemas.microsoft.com/office/powerpoint/2010/main" val="1341442850"/>
+        <p14:creationId xmlns:p14="http://schemas.microsoft.com/office/powerpoint/2010/main" val="1263116508"/>
       </p:ext>
     </p:extLst>
   </p:cSld>
@@ -3187,7 +3187,7 @@
           <p:cNvPr id="1" name="s11-rule">
             <a:extLst xmlns:a="http://schemas.openxmlformats.org/drawingml/2006/main">
               <a:ext uri="{FF2B5EF4-FFF2-40B4-BE49-F238E27FC236}">
-                <a16:creationId xmlns:a16="http://schemas.microsoft.com/office/drawing/2014/main" id="{58732D27-DE1C-4A25-B0CC-761A2F0DAFED}"/>
+                <a16:creationId xmlns:a16="http://schemas.microsoft.com/office/drawing/2014/main" id="{067D90E6-FAD1-48DB-B940-5DC73F5AF267}"/>
               </a:ext>
             </a:extLst>
           </p:cNvPr>
@@ -3220,7 +3220,7 @@
           <p:cNvPr id="2" name="s11-eyebrow">
             <a:extLst xmlns:a="http://schemas.openxmlformats.org/drawingml/2006/main">
               <a:ext uri="{FF2B5EF4-FFF2-40B4-BE49-F238E27FC236}">
-                <a16:creationId xmlns:a16="http://schemas.microsoft.com/office/drawing/2014/main" id="{B0AB59F3-BC00-4D35-A4A9-B3F471822B8D}"/>
+                <a16:creationId xmlns:a16="http://schemas.microsoft.com/office/drawing/2014/main" id="{0E656E1B-34EF-46CA-BF59-B6B9AAEA4ECF}"/>
               </a:ext>
             </a:extLst>
           </p:cNvPr>
@@ -3278,7 +3278,7 @@
           <p:cNvPr id="3" name="s11-title">
             <a:extLst xmlns:a="http://schemas.openxmlformats.org/drawingml/2006/main">
               <a:ext uri="{FF2B5EF4-FFF2-40B4-BE49-F238E27FC236}">
-                <a16:creationId xmlns:a16="http://schemas.microsoft.com/office/drawing/2014/main" id="{1E95C83C-7B7E-4504-94F8-BEF9C4197ECF}"/>
+                <a16:creationId xmlns:a16="http://schemas.microsoft.com/office/drawing/2014/main" id="{438A14B2-E985-45B5-A445-D8AE4EC11C86}"/>
               </a:ext>
             </a:extLst>
           </p:cNvPr>
@@ -3326,7 +3326,7 @@
                 <a:ea typeface="PingFang SC"/>
                 <a:cs typeface="PingFang SC"/>
               </a:rPr>
-              <a:t>从公开重制课件回到可核对的学习资料</a:t>
+              <a:t>运动控制与迁移：依据、边界与延伸</a:t>
             </a:r>
           </a:p>
         </p:txBody>
@@ -3336,7 +3336,7 @@
           <p:cNvPr id="4" name="s11-footer">
             <a:extLst xmlns:a="http://schemas.openxmlformats.org/drawingml/2006/main">
               <a:ext uri="{FF2B5EF4-FFF2-40B4-BE49-F238E27FC236}">
-                <a16:creationId xmlns:a16="http://schemas.microsoft.com/office/drawing/2014/main" id="{CC9B8991-AF05-4B35-9794-C0A979F5EE3D}"/>
+                <a16:creationId xmlns:a16="http://schemas.microsoft.com/office/drawing/2014/main" id="{1F01713F-7ACF-491F-8F30-928B7DD481C9}"/>
               </a:ext>
             </a:extLst>
           </p:cNvPr>
@@ -3367,7 +3367,7 @@
           <p:cNvPr id="5" name="s11-identity">
             <a:extLst xmlns:a="http://schemas.openxmlformats.org/drawingml/2006/main">
               <a:ext uri="{FF2B5EF4-FFF2-40B4-BE49-F238E27FC236}">
-                <a16:creationId xmlns:a16="http://schemas.microsoft.com/office/drawing/2014/main" id="{F07E11F3-7795-4535-B9D2-A33E73ED9A48}"/>
+                <a16:creationId xmlns:a16="http://schemas.microsoft.com/office/drawing/2014/main" id="{9AEC796D-5C49-4CED-8737-E8C05DA44975}"/>
               </a:ext>
             </a:extLst>
           </p:cNvPr>
@@ -3425,7 +3425,7 @@
           <p:cNvPr id="6" name="source-0">
             <a:extLst xmlns:a="http://schemas.openxmlformats.org/drawingml/2006/main">
               <a:ext uri="{FF2B5EF4-FFF2-40B4-BE49-F238E27FC236}">
-                <a16:creationId xmlns:a16="http://schemas.microsoft.com/office/drawing/2014/main" id="{50481CE9-7446-487F-A46A-85AA74CE7F8B}"/>
+                <a16:creationId xmlns:a16="http://schemas.microsoft.com/office/drawing/2014/main" id="{A652F829-F9BA-40A3-BF08-BFB41069C2B9}"/>
               </a:ext>
             </a:extLst>
           </p:cNvPr>
@@ -3449,7 +3449,7 @@
           </a:solidFill>
           <a:ln xmlns:a="http://schemas.openxmlformats.org/drawingml/2006/main" w="9525">
             <a:solidFill>
-              <a:srgbClr val="2D9B72"/>
+              <a:srgbClr val="0B6B4F"/>
             </a:solidFill>
             <a:prstDash val="solid"/>
           </a:ln>
@@ -3489,7 +3489,7 @@
           <p:cNvPr id="7" name="source-1">
             <a:extLst xmlns:a="http://schemas.openxmlformats.org/drawingml/2006/main">
               <a:ext uri="{FF2B5EF4-FFF2-40B4-BE49-F238E27FC236}">
-                <a16:creationId xmlns:a16="http://schemas.microsoft.com/office/drawing/2014/main" id="{E944F13F-0094-4A00-8396-3526CB1AD7A7}"/>
+                <a16:creationId xmlns:a16="http://schemas.microsoft.com/office/drawing/2014/main" id="{E1DE0BC5-982D-440C-8785-3BD9C6FEF236}"/>
               </a:ext>
             </a:extLst>
           </p:cNvPr>
@@ -3520,7 +3520,7 @@
         </p:spPr>
         <p:txBody>
           <a:bodyPr xmlns:a="http://schemas.openxmlformats.org/drawingml/2006/main" lIns="152400" tIns="133350" rIns="152400" bIns="133350" anchor="ctr">
-            <a:normAutofit fontScale="87377"/>
+            <a:normAutofit fontScale="73222"/>
           </a:bodyPr>
           <a:lstStyle xmlns:a="http://schemas.openxmlformats.org/drawingml/2006/main"/>
           <a:p xmlns:a="http://schemas.openxmlformats.org/drawingml/2006/main">
@@ -3543,17 +3543,209 @@
                 <a:ea typeface="PingFang SC"/>
                 <a:cs typeface="PingFang SC"/>
               </a:rPr>
-              <a:t>02  真机实验必须遵循设备手册与实验室安全制度；课程中的流程用于理解验收顺序，不替代现场指导和风险评估</a:t>
-            </a:r>
-          </a:p>
-        </p:txBody>
-      </p:sp>
-      <p:sp>
-        <p:nvSpPr>
-          <p:cNvPr id="8" name="s11-takeaway-rule">
-            <a:extLst xmlns:a="http://schemas.openxmlformats.org/drawingml/2006/main">
-              <a:ext uri="{FF2B5EF4-FFF2-40B4-BE49-F238E27FC236}">
-                <a16:creationId xmlns:a16="http://schemas.microsoft.com/office/drawing/2014/main" id="{F9524AC0-5071-47FA-9E23-BC2C824E42D3}"/>
+              <a:t>02  Proximal Policy Optimization Algorithms：PPO 原论文；裁剪目标限制策略更新幅度，不等于动作限幅、碰撞约束或安全保证。（核对日期：2026-07-12）</a:t>
+            </a:r>
+          </a:p>
+        </p:txBody>
+      </p:sp>
+      <p:sp>
+        <p:nvSpPr>
+          <p:cNvPr id="8" name="source-2">
+            <a:extLst xmlns:a="http://schemas.openxmlformats.org/drawingml/2006/main">
+              <a:ext uri="{FF2B5EF4-FFF2-40B4-BE49-F238E27FC236}">
+                <a16:creationId xmlns:a16="http://schemas.microsoft.com/office/drawing/2014/main" id="{3074BDD1-9F1A-4E73-85AF-D51C56C33573}"/>
+              </a:ext>
+            </a:extLst>
+          </p:cNvPr>
+          <p:cNvSpPr>
+            <a:spLocks xmlns:a="http://schemas.openxmlformats.org/drawingml/2006/main" noGrp="1"/>
+          </p:cNvSpPr>
+          <p:nvPr/>
+        </p:nvSpPr>
+        <p:spPr>
+          <a:xfrm xmlns:a="http://schemas.openxmlformats.org/drawingml/2006/main">
+            <a:off x="914400" y="3314700"/>
+            <a:ext cx="10363200" cy="533400"/>
+          </a:xfrm>
+          <a:prstGeom xmlns:a="http://schemas.openxmlformats.org/drawingml/2006/main" prst="roundRect">
+            <a:avLst>
+              <a:gd name="adj" fmla="val 21429"/>
+            </a:avLst>
+          </a:prstGeom>
+          <a:solidFill xmlns:a="http://schemas.openxmlformats.org/drawingml/2006/main">
+            <a:srgbClr val="FFFFFF"/>
+          </a:solidFill>
+          <a:ln xmlns:a="http://schemas.openxmlformats.org/drawingml/2006/main" w="9525">
+            <a:solidFill>
+              <a:srgbClr val="D8E0E8"/>
+            </a:solidFill>
+            <a:prstDash val="solid"/>
+          </a:ln>
+        </p:spPr>
+        <p:txBody>
+          <a:bodyPr xmlns:a="http://schemas.openxmlformats.org/drawingml/2006/main" lIns="152400" tIns="133350" rIns="152400" bIns="133350" anchor="ctr">
+            <a:normAutofit fontScale="83487"/>
+          </a:bodyPr>
+          <a:lstStyle xmlns:a="http://schemas.openxmlformats.org/drawingml/2006/main"/>
+          <a:p xmlns:a="http://schemas.openxmlformats.org/drawingml/2006/main">
+            <a:pPr algn="l">
+              <a:defRPr sz="1500" b="0">
+                <a:solidFill>
+                  <a:srgbClr val="10233F"/>
+                </a:solidFill>
+                <a:latin typeface="PingFang SC"/>
+                <a:ea typeface="PingFang SC"/>
+                <a:cs typeface="PingFang SC"/>
+              </a:defRPr>
+            </a:pPr>
+            <a:r>
+              <a:rPr sz="1500" b="0">
+                <a:solidFill>
+                  <a:srgbClr val="10233F"/>
+                </a:solidFill>
+                <a:latin typeface="PingFang SC"/>
+                <a:ea typeface="PingFang SC"/>
+                <a:cs typeface="PingFang SC"/>
+              </a:rPr>
+              <a:t>03  MuJoCo 官方概览：核对关节与接触动力学、控制和机器学习用途；时间步长与数值稳定性仍需按任务验证。（核对日期：2026-07-12）</a:t>
+            </a:r>
+          </a:p>
+        </p:txBody>
+      </p:sp>
+      <p:sp>
+        <p:nvSpPr>
+          <p:cNvPr id="9" name="source-3">
+            <a:extLst xmlns:a="http://schemas.openxmlformats.org/drawingml/2006/main">
+              <a:ext uri="{FF2B5EF4-FFF2-40B4-BE49-F238E27FC236}">
+                <a16:creationId xmlns:a16="http://schemas.microsoft.com/office/drawing/2014/main" id="{5DA547C0-6652-4836-8795-7A3F5A2447AB}"/>
+              </a:ext>
+            </a:extLst>
+          </p:cNvPr>
+          <p:cNvSpPr>
+            <a:spLocks xmlns:a="http://schemas.openxmlformats.org/drawingml/2006/main" noGrp="1"/>
+          </p:cNvSpPr>
+          <p:nvPr/>
+        </p:nvSpPr>
+        <p:spPr>
+          <a:xfrm xmlns:a="http://schemas.openxmlformats.org/drawingml/2006/main">
+            <a:off x="914400" y="4000500"/>
+            <a:ext cx="10363200" cy="533400"/>
+          </a:xfrm>
+          <a:prstGeom xmlns:a="http://schemas.openxmlformats.org/drawingml/2006/main" prst="roundRect">
+            <a:avLst>
+              <a:gd name="adj" fmla="val 21429"/>
+            </a:avLst>
+          </a:prstGeom>
+          <a:solidFill xmlns:a="http://schemas.openxmlformats.org/drawingml/2006/main">
+            <a:srgbClr val="FFFFFF"/>
+          </a:solidFill>
+          <a:ln xmlns:a="http://schemas.openxmlformats.org/drawingml/2006/main" w="9525">
+            <a:solidFill>
+              <a:srgbClr val="D8E0E8"/>
+            </a:solidFill>
+            <a:prstDash val="solid"/>
+          </a:ln>
+        </p:spPr>
+        <p:txBody>
+          <a:bodyPr xmlns:a="http://schemas.openxmlformats.org/drawingml/2006/main" lIns="152400" tIns="133350" rIns="152400" bIns="133350" anchor="ctr">
+            <a:normAutofit fontScale="82277"/>
+          </a:bodyPr>
+          <a:lstStyle xmlns:a="http://schemas.openxmlformats.org/drawingml/2006/main"/>
+          <a:p xmlns:a="http://schemas.openxmlformats.org/drawingml/2006/main">
+            <a:pPr algn="l">
+              <a:defRPr sz="1500" b="0">
+                <a:solidFill>
+                  <a:srgbClr val="10233F"/>
+                </a:solidFill>
+                <a:latin typeface="PingFang SC"/>
+                <a:ea typeface="PingFang SC"/>
+                <a:cs typeface="PingFang SC"/>
+              </a:defRPr>
+            </a:pPr>
+            <a:r>
+              <a:rPr sz="1500" b="0">
+                <a:solidFill>
+                  <a:srgbClr val="10233F"/>
+                </a:solidFill>
+                <a:latin typeface="PingFang SC"/>
+                <a:ea typeface="PingFang SC"/>
+                <a:cs typeface="PingFang SC"/>
+              </a:rPr>
+              <a:t>04  Isaac Lab 官方 Sim-to-Real 指南：核对仿真训练、域随机化、真实观测、执行器响应对齐与 ROS 部署流程。（核对日期：2026-07-12）</a:t>
+            </a:r>
+          </a:p>
+        </p:txBody>
+      </p:sp>
+      <p:sp>
+        <p:nvSpPr>
+          <p:cNvPr id="10" name="source-4">
+            <a:extLst xmlns:a="http://schemas.openxmlformats.org/drawingml/2006/main">
+              <a:ext uri="{FF2B5EF4-FFF2-40B4-BE49-F238E27FC236}">
+                <a16:creationId xmlns:a16="http://schemas.microsoft.com/office/drawing/2014/main" id="{6DC944FD-1039-4A69-8014-15B146DF0CF1}"/>
+              </a:ext>
+            </a:extLst>
+          </p:cNvPr>
+          <p:cNvSpPr>
+            <a:spLocks xmlns:a="http://schemas.openxmlformats.org/drawingml/2006/main" noGrp="1"/>
+          </p:cNvSpPr>
+          <p:nvPr/>
+        </p:nvSpPr>
+        <p:spPr>
+          <a:xfrm xmlns:a="http://schemas.openxmlformats.org/drawingml/2006/main">
+            <a:off x="914400" y="4686300"/>
+            <a:ext cx="10363200" cy="533400"/>
+          </a:xfrm>
+          <a:prstGeom xmlns:a="http://schemas.openxmlformats.org/drawingml/2006/main" prst="roundRect">
+            <a:avLst>
+              <a:gd name="adj" fmla="val 21429"/>
+            </a:avLst>
+          </a:prstGeom>
+          <a:solidFill xmlns:a="http://schemas.openxmlformats.org/drawingml/2006/main">
+            <a:srgbClr val="FFFFFF"/>
+          </a:solidFill>
+          <a:ln xmlns:a="http://schemas.openxmlformats.org/drawingml/2006/main" w="9525">
+            <a:solidFill>
+              <a:srgbClr val="D8E0E8"/>
+            </a:solidFill>
+            <a:prstDash val="solid"/>
+          </a:ln>
+        </p:spPr>
+        <p:txBody>
+          <a:bodyPr xmlns:a="http://schemas.openxmlformats.org/drawingml/2006/main" lIns="152400" tIns="133350" rIns="152400" bIns="133350" anchor="ctr">
+            <a:normAutofit fontScale="70637"/>
+          </a:bodyPr>
+          <a:lstStyle xmlns:a="http://schemas.openxmlformats.org/drawingml/2006/main"/>
+          <a:p xmlns:a="http://schemas.openxmlformats.org/drawingml/2006/main">
+            <a:pPr algn="l">
+              <a:defRPr sz="1500" b="0">
+                <a:solidFill>
+                  <a:srgbClr val="10233F"/>
+                </a:solidFill>
+                <a:latin typeface="PingFang SC"/>
+                <a:ea typeface="PingFang SC"/>
+                <a:cs typeface="PingFang SC"/>
+              </a:defRPr>
+            </a:pPr>
+            <a:r>
+              <a:rPr sz="1500" b="0">
+                <a:solidFill>
+                  <a:srgbClr val="10233F"/>
+                </a:solidFill>
+                <a:latin typeface="PingFang SC"/>
+                <a:ea typeface="PingFang SC"/>
+                <a:cs typeface="PingFang SC"/>
+              </a:rPr>
+              <a:t>05  Domain Randomization 原论文：理解扩大训练分布以缓解 reality gap 的方法；原论文结果不能直接外推为复杂人形步态的通用保证。（核对日期：2026-07-12）</a:t>
+            </a:r>
+          </a:p>
+        </p:txBody>
+      </p:sp>
+      <p:sp>
+        <p:nvSpPr>
+          <p:cNvPr id="11" name="s11-takeaway-rule">
+            <a:extLst xmlns:a="http://schemas.openxmlformats.org/drawingml/2006/main">
+              <a:ext uri="{FF2B5EF4-FFF2-40B4-BE49-F238E27FC236}">
+                <a16:creationId xmlns:a16="http://schemas.microsoft.com/office/drawing/2014/main" id="{7DC8AE91-41BB-4031-9F36-5553BDADA1D0}"/>
               </a:ext>
             </a:extLst>
           </p:cNvPr>
@@ -3583,10 +3775,10 @@
       </p:sp>
       <p:sp>
         <p:nvSpPr>
-          <p:cNvPr id="9" name="s11-takeaway">
-            <a:extLst xmlns:a="http://schemas.openxmlformats.org/drawingml/2006/main">
-              <a:ext uri="{FF2B5EF4-FFF2-40B4-BE49-F238E27FC236}">
-                <a16:creationId xmlns:a16="http://schemas.microsoft.com/office/drawing/2014/main" id="{1177B407-0379-46FE-B68B-8A8EBE89E1C5}"/>
+          <p:cNvPr id="12" name="s11-takeaway">
+            <a:extLst xmlns:a="http://schemas.openxmlformats.org/drawingml/2006/main">
+              <a:ext uri="{FF2B5EF4-FFF2-40B4-BE49-F238E27FC236}">
+                <a16:creationId xmlns:a16="http://schemas.microsoft.com/office/drawing/2014/main" id="{FCF02E2E-0FDC-430D-9DD3-6AFCC6FBA70D}"/>
               </a:ext>
             </a:extLst>
           </p:cNvPr>
@@ -3642,7 +3834,7 @@
     </p:spTree>
     <p:extLst>
       <p:ext uri="{BB962C8B-B14F-4D97-AF65-F5344CB8AC3E}">
-        <p14:creationId xmlns:p14="http://schemas.microsoft.com/office/powerpoint/2010/main" val="537904088"/>
+        <p14:creationId xmlns:p14="http://schemas.microsoft.com/office/powerpoint/2010/main" val="1929352391"/>
       </p:ext>
     </p:extLst>
   </p:cSld>
@@ -3673,7 +3865,7 @@
           <p:cNvPr id="1" name="s2-rule">
             <a:extLst xmlns:a="http://schemas.openxmlformats.org/drawingml/2006/main">
               <a:ext uri="{FF2B5EF4-FFF2-40B4-BE49-F238E27FC236}">
-                <a16:creationId xmlns:a16="http://schemas.microsoft.com/office/drawing/2014/main" id="{CDB5CF4F-967F-4125-8D54-C36AC558DA33}"/>
+                <a16:creationId xmlns:a16="http://schemas.microsoft.com/office/drawing/2014/main" id="{D75E64FB-31DB-4DCE-BA00-3124C724BD4B}"/>
               </a:ext>
             </a:extLst>
           </p:cNvPr>
@@ -3706,7 +3898,7 @@
           <p:cNvPr id="2" name="s2-eyebrow">
             <a:extLst xmlns:a="http://schemas.openxmlformats.org/drawingml/2006/main">
               <a:ext uri="{FF2B5EF4-FFF2-40B4-BE49-F238E27FC236}">
-                <a16:creationId xmlns:a16="http://schemas.microsoft.com/office/drawing/2014/main" id="{4BF2B9E8-A091-44BE-AF38-8F285B9A145E}"/>
+                <a16:creationId xmlns:a16="http://schemas.microsoft.com/office/drawing/2014/main" id="{8F332F3D-1011-4F1E-A413-C2FC09530831}"/>
               </a:ext>
             </a:extLst>
           </p:cNvPr>
@@ -3764,7 +3956,7 @@
           <p:cNvPr id="3" name="s2-title">
             <a:extLst xmlns:a="http://schemas.openxmlformats.org/drawingml/2006/main">
               <a:ext uri="{FF2B5EF4-FFF2-40B4-BE49-F238E27FC236}">
-                <a16:creationId xmlns:a16="http://schemas.microsoft.com/office/drawing/2014/main" id="{4CBE295C-4368-44B6-B388-6C1532036FD4}"/>
+                <a16:creationId xmlns:a16="http://schemas.microsoft.com/office/drawing/2014/main" id="{9108E648-EB75-4941-933D-6EE5FC7FE605}"/>
               </a:ext>
             </a:extLst>
           </p:cNvPr>
@@ -3812,7 +4004,7 @@
                 <a:ea typeface="PingFang SC"/>
                 <a:cs typeface="PingFang SC"/>
               </a:rPr>
-              <a:t>学完这一节，你能完成这些判断与行动</a:t>
+              <a:t>运动控制与迁移：2项学习结果</a:t>
             </a:r>
           </a:p>
         </p:txBody>
@@ -3822,7 +4014,7 @@
           <p:cNvPr id="4" name="s2-footer">
             <a:extLst xmlns:a="http://schemas.openxmlformats.org/drawingml/2006/main">
               <a:ext uri="{FF2B5EF4-FFF2-40B4-BE49-F238E27FC236}">
-                <a16:creationId xmlns:a16="http://schemas.microsoft.com/office/drawing/2014/main" id="{E2DC84B0-5A91-4DCC-97F8-EFAF26350FF4}"/>
+                <a16:creationId xmlns:a16="http://schemas.microsoft.com/office/drawing/2014/main" id="{739809D3-2257-4036-846C-2F201F4543E6}"/>
               </a:ext>
             </a:extLst>
           </p:cNvPr>
@@ -3853,7 +4045,7 @@
           <p:cNvPr id="5" name="s2-identity">
             <a:extLst xmlns:a="http://schemas.openxmlformats.org/drawingml/2006/main">
               <a:ext uri="{FF2B5EF4-FFF2-40B4-BE49-F238E27FC236}">
-                <a16:creationId xmlns:a16="http://schemas.microsoft.com/office/drawing/2014/main" id="{506C7E10-1684-4B32-AB43-A14FC36C8B30}"/>
+                <a16:creationId xmlns:a16="http://schemas.microsoft.com/office/drawing/2014/main" id="{8C312B4E-4C88-41FC-9AD6-346F691323A4}"/>
               </a:ext>
             </a:extLst>
           </p:cNvPr>
@@ -3911,7 +4103,7 @@
           <p:cNvPr id="6" name="objective-1">
             <a:extLst xmlns:a="http://schemas.openxmlformats.org/drawingml/2006/main">
               <a:ext uri="{FF2B5EF4-FFF2-40B4-BE49-F238E27FC236}">
-                <a16:creationId xmlns:a16="http://schemas.microsoft.com/office/drawing/2014/main" id="{103A70D6-455C-45B3-8D24-9D022C5B08B4}"/>
+                <a16:creationId xmlns:a16="http://schemas.microsoft.com/office/drawing/2014/main" id="{F30BCDEA-41FA-406D-8AE1-044D79E94E09}"/>
               </a:ext>
             </a:extLst>
           </p:cNvPr>
@@ -3998,7 +4190,7 @@
           <p:cNvPr id="7" name="objective-2">
             <a:extLst xmlns:a="http://schemas.openxmlformats.org/drawingml/2006/main">
               <a:ext uri="{FF2B5EF4-FFF2-40B4-BE49-F238E27FC236}">
-                <a16:creationId xmlns:a16="http://schemas.microsoft.com/office/drawing/2014/main" id="{5226D01C-AE85-452C-B6C2-5B86055866A3}"/>
+                <a16:creationId xmlns:a16="http://schemas.microsoft.com/office/drawing/2014/main" id="{EBD8CA39-FF82-442A-8510-53EE9F0AFAC5}"/>
               </a:ext>
             </a:extLst>
           </p:cNvPr>
@@ -4022,7 +4214,7 @@
           </a:solidFill>
           <a:ln xmlns:a="http://schemas.openxmlformats.org/drawingml/2006/main" w="19050">
             <a:solidFill>
-              <a:srgbClr val="2D9B72"/>
+              <a:srgbClr val="0B6B4F"/>
             </a:solidFill>
             <a:prstDash val="solid"/>
           </a:ln>
@@ -4083,7 +4275,7 @@
     </p:spTree>
     <p:extLst>
       <p:ext uri="{BB962C8B-B14F-4D97-AF65-F5344CB8AC3E}">
-        <p14:creationId xmlns:p14="http://schemas.microsoft.com/office/powerpoint/2010/main" val="1266255745"/>
+        <p14:creationId xmlns:p14="http://schemas.microsoft.com/office/powerpoint/2010/main" val="434139197"/>
       </p:ext>
     </p:extLst>
   </p:cSld>
@@ -4114,7 +4306,7 @@
           <p:cNvPr id="1" name="s3-rule">
             <a:extLst xmlns:a="http://schemas.openxmlformats.org/drawingml/2006/main">
               <a:ext uri="{FF2B5EF4-FFF2-40B4-BE49-F238E27FC236}">
-                <a16:creationId xmlns:a16="http://schemas.microsoft.com/office/drawing/2014/main" id="{8B54E5F7-C0A7-4DA2-BB3A-31DB5D54FF03}"/>
+                <a16:creationId xmlns:a16="http://schemas.microsoft.com/office/drawing/2014/main" id="{A8E3DE80-8DB8-405A-847F-49E6157D4092}"/>
               </a:ext>
             </a:extLst>
           </p:cNvPr>
@@ -4147,7 +4339,7 @@
           <p:cNvPr id="2" name="s3-eyebrow">
             <a:extLst xmlns:a="http://schemas.openxmlformats.org/drawingml/2006/main">
               <a:ext uri="{FF2B5EF4-FFF2-40B4-BE49-F238E27FC236}">
-                <a16:creationId xmlns:a16="http://schemas.microsoft.com/office/drawing/2014/main" id="{AE6B5314-4E28-49EF-ABC0-3380FF0345C9}"/>
+                <a16:creationId xmlns:a16="http://schemas.microsoft.com/office/drawing/2014/main" id="{BA2FA8E9-C6DD-4279-9D80-831DB8E1534B}"/>
               </a:ext>
             </a:extLst>
           </p:cNvPr>
@@ -4205,7 +4397,7 @@
           <p:cNvPr id="3" name="s3-title">
             <a:extLst xmlns:a="http://schemas.openxmlformats.org/drawingml/2006/main">
               <a:ext uri="{FF2B5EF4-FFF2-40B4-BE49-F238E27FC236}">
-                <a16:creationId xmlns:a16="http://schemas.microsoft.com/office/drawing/2014/main" id="{D6B832F3-16C8-450F-8812-6FEC39CA5F27}"/>
+                <a16:creationId xmlns:a16="http://schemas.microsoft.com/office/drawing/2014/main" id="{9057772C-F2D7-4851-A0F7-C24EF48B87F2}"/>
               </a:ext>
             </a:extLst>
           </p:cNvPr>
@@ -4263,7 +4455,7 @@
           <p:cNvPr id="4" name="s3-footer">
             <a:extLst xmlns:a="http://schemas.openxmlformats.org/drawingml/2006/main">
               <a:ext uri="{FF2B5EF4-FFF2-40B4-BE49-F238E27FC236}">
-                <a16:creationId xmlns:a16="http://schemas.microsoft.com/office/drawing/2014/main" id="{4F97D9DD-47D8-40EB-BCC6-EE6A3C76974A}"/>
+                <a16:creationId xmlns:a16="http://schemas.microsoft.com/office/drawing/2014/main" id="{D29836CD-D404-444A-A764-888829BCE8DA}"/>
               </a:ext>
             </a:extLst>
           </p:cNvPr>
@@ -4294,7 +4486,7 @@
           <p:cNvPr id="5" name="s3-identity">
             <a:extLst xmlns:a="http://schemas.openxmlformats.org/drawingml/2006/main">
               <a:ext uri="{FF2B5EF4-FFF2-40B4-BE49-F238E27FC236}">
-                <a16:creationId xmlns:a16="http://schemas.microsoft.com/office/drawing/2014/main" id="{3634BEDE-CC7F-49DC-94EC-52DF5F56462D}"/>
+                <a16:creationId xmlns:a16="http://schemas.microsoft.com/office/drawing/2014/main" id="{9064D1F7-E4AA-46B0-AA2D-DC413C66C4CA}"/>
               </a:ext>
             </a:extLst>
           </p:cNvPr>
@@ -4352,7 +4544,7 @@
           <p:cNvPr id="6" name="core-no-0">
             <a:extLst xmlns:a="http://schemas.openxmlformats.org/drawingml/2006/main">
               <a:ext uri="{FF2B5EF4-FFF2-40B4-BE49-F238E27FC236}">
-                <a16:creationId xmlns:a16="http://schemas.microsoft.com/office/drawing/2014/main" id="{028B0E9F-3E2E-4CF6-8A19-027288EFA5EA}"/>
+                <a16:creationId xmlns:a16="http://schemas.microsoft.com/office/drawing/2014/main" id="{2DE5738A-1CDA-43BF-80CB-27921ABA1F56}"/>
               </a:ext>
             </a:extLst>
           </p:cNvPr>
@@ -4384,7 +4576,7 @@
             <a:pPr algn="l">
               <a:defRPr sz="2250" b="1">
                 <a:solidFill>
-                  <a:srgbClr val="2D9B72"/>
+                  <a:srgbClr val="0B6B4F"/>
                 </a:solidFill>
                 <a:latin typeface="PingFang SC"/>
                 <a:ea typeface="PingFang SC"/>
@@ -4394,7 +4586,7 @@
             <a:r>
               <a:rPr sz="2250" b="1">
                 <a:solidFill>
-                  <a:srgbClr val="2D9B72"/>
+                  <a:srgbClr val="0B6B4F"/>
                 </a:solidFill>
                 <a:latin typeface="PingFang SC"/>
                 <a:ea typeface="PingFang SC"/>
@@ -4410,7 +4602,7 @@
           <p:cNvPr id="7" name="core-label-0">
             <a:extLst xmlns:a="http://schemas.openxmlformats.org/drawingml/2006/main">
               <a:ext uri="{FF2B5EF4-FFF2-40B4-BE49-F238E27FC236}">
-                <a16:creationId xmlns:a16="http://schemas.microsoft.com/office/drawing/2014/main" id="{19DB37FD-8772-441F-93CF-C7467E53E0B5}"/>
+                <a16:creationId xmlns:a16="http://schemas.microsoft.com/office/drawing/2014/main" id="{894C7CD5-0AE8-4BB0-9AAD-E333FFFB999D}"/>
               </a:ext>
             </a:extLst>
           </p:cNvPr>
@@ -4468,7 +4660,7 @@
           <p:cNvPr id="8" name="core-body-0">
             <a:extLst xmlns:a="http://schemas.openxmlformats.org/drawingml/2006/main">
               <a:ext uri="{FF2B5EF4-FFF2-40B4-BE49-F238E27FC236}">
-                <a16:creationId xmlns:a16="http://schemas.microsoft.com/office/drawing/2014/main" id="{82AA13CE-2809-41AC-B33F-4762DEDC5736}"/>
+                <a16:creationId xmlns:a16="http://schemas.microsoft.com/office/drawing/2014/main" id="{066FF5A4-6890-45B7-B9E4-049E80AC0EFC}"/>
               </a:ext>
             </a:extLst>
           </p:cNvPr>
@@ -4492,7 +4684,7 @@
           </a:solidFill>
           <a:ln xmlns:a="http://schemas.openxmlformats.org/drawingml/2006/main" w="19050">
             <a:solidFill>
-              <a:srgbClr val="2D9B72"/>
+              <a:srgbClr val="0B6B4F"/>
             </a:solidFill>
             <a:prstDash val="solid"/>
           </a:ln>
@@ -4532,7 +4724,7 @@
           <p:cNvPr id="9" name="core-no-1">
             <a:extLst xmlns:a="http://schemas.openxmlformats.org/drawingml/2006/main">
               <a:ext uri="{FF2B5EF4-FFF2-40B4-BE49-F238E27FC236}">
-                <a16:creationId xmlns:a16="http://schemas.microsoft.com/office/drawing/2014/main" id="{89DD533C-A5C6-4112-9312-89F09E4C3DDA}"/>
+                <a16:creationId xmlns:a16="http://schemas.microsoft.com/office/drawing/2014/main" id="{CC5BFF76-AAD1-4296-87D1-5B45B42E200C}"/>
               </a:ext>
             </a:extLst>
           </p:cNvPr>
@@ -4564,7 +4756,7 @@
             <a:pPr algn="l">
               <a:defRPr sz="2250" b="1">
                 <a:solidFill>
-                  <a:srgbClr val="2D9B72"/>
+                  <a:srgbClr val="0B6B4F"/>
                 </a:solidFill>
                 <a:latin typeface="PingFang SC"/>
                 <a:ea typeface="PingFang SC"/>
@@ -4574,7 +4766,7 @@
             <a:r>
               <a:rPr sz="2250" b="1">
                 <a:solidFill>
-                  <a:srgbClr val="2D9B72"/>
+                  <a:srgbClr val="0B6B4F"/>
                 </a:solidFill>
                 <a:latin typeface="PingFang SC"/>
                 <a:ea typeface="PingFang SC"/>
@@ -4590,7 +4782,7 @@
           <p:cNvPr id="10" name="core-body-1">
             <a:extLst xmlns:a="http://schemas.openxmlformats.org/drawingml/2006/main">
               <a:ext uri="{FF2B5EF4-FFF2-40B4-BE49-F238E27FC236}">
-                <a16:creationId xmlns:a16="http://schemas.microsoft.com/office/drawing/2014/main" id="{D4883AA8-1056-406B-A170-1590705B0464}"/>
+                <a16:creationId xmlns:a16="http://schemas.microsoft.com/office/drawing/2014/main" id="{0EB645A1-1C7E-470A-A53C-2E91213F965E}"/>
               </a:ext>
             </a:extLst>
           </p:cNvPr>
@@ -4654,7 +4846,7 @@
           <p:cNvPr id="11" name="s3-takeaway-rule">
             <a:extLst xmlns:a="http://schemas.openxmlformats.org/drawingml/2006/main">
               <a:ext uri="{FF2B5EF4-FFF2-40B4-BE49-F238E27FC236}">
-                <a16:creationId xmlns:a16="http://schemas.microsoft.com/office/drawing/2014/main" id="{9AEACF45-54A5-4546-8578-C8CCC5A690C4}"/>
+                <a16:creationId xmlns:a16="http://schemas.microsoft.com/office/drawing/2014/main" id="{766ACA15-6088-41F1-8EE9-DAFAE4CC920C}"/>
               </a:ext>
             </a:extLst>
           </p:cNvPr>
@@ -4687,7 +4879,7 @@
           <p:cNvPr id="12" name="s3-takeaway">
             <a:extLst xmlns:a="http://schemas.openxmlformats.org/drawingml/2006/main">
               <a:ext uri="{FF2B5EF4-FFF2-40B4-BE49-F238E27FC236}">
-                <a16:creationId xmlns:a16="http://schemas.microsoft.com/office/drawing/2014/main" id="{79BE34F1-75E1-43FB-B9B4-AB1B309752ED}"/>
+                <a16:creationId xmlns:a16="http://schemas.microsoft.com/office/drawing/2014/main" id="{8DEE3534-4F79-4426-A20B-F0277127CA3B}"/>
               </a:ext>
             </a:extLst>
           </p:cNvPr>
@@ -4743,7 +4935,7 @@
     </p:spTree>
     <p:extLst>
       <p:ext uri="{BB962C8B-B14F-4D97-AF65-F5344CB8AC3E}">
-        <p14:creationId xmlns:p14="http://schemas.microsoft.com/office/powerpoint/2010/main" val="1792969818"/>
+        <p14:creationId xmlns:p14="http://schemas.microsoft.com/office/powerpoint/2010/main" val="1421004169"/>
       </p:ext>
     </p:extLst>
   </p:cSld>
@@ -4774,7 +4966,7 @@
           <p:cNvPr id="1" name="s4-rule">
             <a:extLst xmlns:a="http://schemas.openxmlformats.org/drawingml/2006/main">
               <a:ext uri="{FF2B5EF4-FFF2-40B4-BE49-F238E27FC236}">
-                <a16:creationId xmlns:a16="http://schemas.microsoft.com/office/drawing/2014/main" id="{19ADF222-BDC9-4309-A939-219B6CC09848}"/>
+                <a16:creationId xmlns:a16="http://schemas.microsoft.com/office/drawing/2014/main" id="{0BED30CC-61E8-4D49-939F-D37DB8785279}"/>
               </a:ext>
             </a:extLst>
           </p:cNvPr>
@@ -4807,7 +4999,7 @@
           <p:cNvPr id="2" name="s4-eyebrow">
             <a:extLst xmlns:a="http://schemas.openxmlformats.org/drawingml/2006/main">
               <a:ext uri="{FF2B5EF4-FFF2-40B4-BE49-F238E27FC236}">
-                <a16:creationId xmlns:a16="http://schemas.microsoft.com/office/drawing/2014/main" id="{57FB3EFE-936B-4DE5-A860-F3AD51C5894A}"/>
+                <a16:creationId xmlns:a16="http://schemas.microsoft.com/office/drawing/2014/main" id="{7D523CC5-2588-4F4F-AD7B-C5B2147C47A4}"/>
               </a:ext>
             </a:extLst>
           </p:cNvPr>
@@ -4865,7 +5057,7 @@
           <p:cNvPr id="3" name="s4-title">
             <a:extLst xmlns:a="http://schemas.openxmlformats.org/drawingml/2006/main">
               <a:ext uri="{FF2B5EF4-FFF2-40B4-BE49-F238E27FC236}">
-                <a16:creationId xmlns:a16="http://schemas.microsoft.com/office/drawing/2014/main" id="{FEB67CB2-03A0-4FB0-9FD1-81D123ACB753}"/>
+                <a16:creationId xmlns:a16="http://schemas.microsoft.com/office/drawing/2014/main" id="{7434E46B-76BB-4E0A-BEF8-3AB5F5E4EBCF}"/>
               </a:ext>
             </a:extLst>
           </p:cNvPr>
@@ -4923,7 +5115,7 @@
           <p:cNvPr id="4" name="s4-footer">
             <a:extLst xmlns:a="http://schemas.openxmlformats.org/drawingml/2006/main">
               <a:ext uri="{FF2B5EF4-FFF2-40B4-BE49-F238E27FC236}">
-                <a16:creationId xmlns:a16="http://schemas.microsoft.com/office/drawing/2014/main" id="{BB4DA451-4392-4B5C-A501-9DBAE955656E}"/>
+                <a16:creationId xmlns:a16="http://schemas.microsoft.com/office/drawing/2014/main" id="{25187161-0238-44F1-B315-53E83FB3E12F}"/>
               </a:ext>
             </a:extLst>
           </p:cNvPr>
@@ -4954,7 +5146,7 @@
           <p:cNvPr id="5" name="s4-identity">
             <a:extLst xmlns:a="http://schemas.openxmlformats.org/drawingml/2006/main">
               <a:ext uri="{FF2B5EF4-FFF2-40B4-BE49-F238E27FC236}">
-                <a16:creationId xmlns:a16="http://schemas.microsoft.com/office/drawing/2014/main" id="{62BF26E9-7E8A-4F97-AB8E-82E60F1F1903}"/>
+                <a16:creationId xmlns:a16="http://schemas.microsoft.com/office/drawing/2014/main" id="{F6B07BED-93C6-42D5-A62C-AAE649676624}"/>
               </a:ext>
             </a:extLst>
           </p:cNvPr>
@@ -5012,7 +5204,7 @@
           <p:cNvPr id="6" name="core-no-0">
             <a:extLst xmlns:a="http://schemas.openxmlformats.org/drawingml/2006/main">
               <a:ext uri="{FF2B5EF4-FFF2-40B4-BE49-F238E27FC236}">
-                <a16:creationId xmlns:a16="http://schemas.microsoft.com/office/drawing/2014/main" id="{4AF5E5D9-B0F5-4D11-AE9E-FCFBF81795C1}"/>
+                <a16:creationId xmlns:a16="http://schemas.microsoft.com/office/drawing/2014/main" id="{FB45D8BF-C82D-4A66-9E33-7135056F2B6D}"/>
               </a:ext>
             </a:extLst>
           </p:cNvPr>
@@ -5044,7 +5236,7 @@
             <a:pPr algn="l">
               <a:defRPr sz="2250" b="1">
                 <a:solidFill>
-                  <a:srgbClr val="2D9B72"/>
+                  <a:srgbClr val="0B6B4F"/>
                 </a:solidFill>
                 <a:latin typeface="PingFang SC"/>
                 <a:ea typeface="PingFang SC"/>
@@ -5054,7 +5246,7 @@
             <a:r>
               <a:rPr sz="2250" b="1">
                 <a:solidFill>
-                  <a:srgbClr val="2D9B72"/>
+                  <a:srgbClr val="0B6B4F"/>
                 </a:solidFill>
                 <a:latin typeface="PingFang SC"/>
                 <a:ea typeface="PingFang SC"/>
@@ -5070,7 +5262,7 @@
           <p:cNvPr id="7" name="core-label-0">
             <a:extLst xmlns:a="http://schemas.openxmlformats.org/drawingml/2006/main">
               <a:ext uri="{FF2B5EF4-FFF2-40B4-BE49-F238E27FC236}">
-                <a16:creationId xmlns:a16="http://schemas.microsoft.com/office/drawing/2014/main" id="{C67FABD6-BA00-4B2B-951D-31E62E25F7F2}"/>
+                <a16:creationId xmlns:a16="http://schemas.microsoft.com/office/drawing/2014/main" id="{DFBD9CCD-870A-4680-AEF9-40A22A0BA0D5}"/>
               </a:ext>
             </a:extLst>
           </p:cNvPr>
@@ -5128,7 +5320,7 @@
           <p:cNvPr id="8" name="core-body-0">
             <a:extLst xmlns:a="http://schemas.openxmlformats.org/drawingml/2006/main">
               <a:ext uri="{FF2B5EF4-FFF2-40B4-BE49-F238E27FC236}">
-                <a16:creationId xmlns:a16="http://schemas.microsoft.com/office/drawing/2014/main" id="{E6567609-D311-4D86-8C6D-4FA960DDE74B}"/>
+                <a16:creationId xmlns:a16="http://schemas.microsoft.com/office/drawing/2014/main" id="{6C978B1C-FC26-4E52-8EA6-936393695FDF}"/>
               </a:ext>
             </a:extLst>
           </p:cNvPr>
@@ -5152,7 +5344,7 @@
           </a:solidFill>
           <a:ln xmlns:a="http://schemas.openxmlformats.org/drawingml/2006/main" w="19050">
             <a:solidFill>
-              <a:srgbClr val="2D9B72"/>
+              <a:srgbClr val="0B6B4F"/>
             </a:solidFill>
             <a:prstDash val="solid"/>
           </a:ln>
@@ -5192,7 +5384,7 @@
           <p:cNvPr id="9" name="core-no-1">
             <a:extLst xmlns:a="http://schemas.openxmlformats.org/drawingml/2006/main">
               <a:ext uri="{FF2B5EF4-FFF2-40B4-BE49-F238E27FC236}">
-                <a16:creationId xmlns:a16="http://schemas.microsoft.com/office/drawing/2014/main" id="{632B34DF-A0CE-441E-BDD5-FB3DFEE6D4CF}"/>
+                <a16:creationId xmlns:a16="http://schemas.microsoft.com/office/drawing/2014/main" id="{EC821172-C048-46D0-BF84-503EED9E1665}"/>
               </a:ext>
             </a:extLst>
           </p:cNvPr>
@@ -5224,7 +5416,7 @@
             <a:pPr algn="l">
               <a:defRPr sz="2250" b="1">
                 <a:solidFill>
-                  <a:srgbClr val="2D9B72"/>
+                  <a:srgbClr val="0B6B4F"/>
                 </a:solidFill>
                 <a:latin typeface="PingFang SC"/>
                 <a:ea typeface="PingFang SC"/>
@@ -5234,7 +5426,7 @@
             <a:r>
               <a:rPr sz="2250" b="1">
                 <a:solidFill>
-                  <a:srgbClr val="2D9B72"/>
+                  <a:srgbClr val="0B6B4F"/>
                 </a:solidFill>
                 <a:latin typeface="PingFang SC"/>
                 <a:ea typeface="PingFang SC"/>
@@ -5250,7 +5442,7 @@
           <p:cNvPr id="10" name="core-body-1">
             <a:extLst xmlns:a="http://schemas.openxmlformats.org/drawingml/2006/main">
               <a:ext uri="{FF2B5EF4-FFF2-40B4-BE49-F238E27FC236}">
-                <a16:creationId xmlns:a16="http://schemas.microsoft.com/office/drawing/2014/main" id="{7CC8514C-662C-43EE-AA50-5279DDCC1AF5}"/>
+                <a16:creationId xmlns:a16="http://schemas.microsoft.com/office/drawing/2014/main" id="{75E17DDB-6FC2-431D-B9B9-D894D0289B84}"/>
               </a:ext>
             </a:extLst>
           </p:cNvPr>
@@ -5314,7 +5506,7 @@
           <p:cNvPr id="11" name="s4-takeaway-rule">
             <a:extLst xmlns:a="http://schemas.openxmlformats.org/drawingml/2006/main">
               <a:ext uri="{FF2B5EF4-FFF2-40B4-BE49-F238E27FC236}">
-                <a16:creationId xmlns:a16="http://schemas.microsoft.com/office/drawing/2014/main" id="{E1DFF4E7-4587-493D-B209-A20E140AB248}"/>
+                <a16:creationId xmlns:a16="http://schemas.microsoft.com/office/drawing/2014/main" id="{F7CA7BF5-4F5E-4EDF-B94F-D9FD66F9943B}"/>
               </a:ext>
             </a:extLst>
           </p:cNvPr>
@@ -5347,7 +5539,7 @@
           <p:cNvPr id="12" name="s4-takeaway">
             <a:extLst xmlns:a="http://schemas.openxmlformats.org/drawingml/2006/main">
               <a:ext uri="{FF2B5EF4-FFF2-40B4-BE49-F238E27FC236}">
-                <a16:creationId xmlns:a16="http://schemas.microsoft.com/office/drawing/2014/main" id="{592DB7AE-9843-49E1-8178-BDB62995C305}"/>
+                <a16:creationId xmlns:a16="http://schemas.microsoft.com/office/drawing/2014/main" id="{5DAE55C7-E856-4044-9698-B07E093DC4ED}"/>
               </a:ext>
             </a:extLst>
           </p:cNvPr>
@@ -5403,7 +5595,7 @@
     </p:spTree>
     <p:extLst>
       <p:ext uri="{BB962C8B-B14F-4D97-AF65-F5344CB8AC3E}">
-        <p14:creationId xmlns:p14="http://schemas.microsoft.com/office/powerpoint/2010/main" val="418110653"/>
+        <p14:creationId xmlns:p14="http://schemas.microsoft.com/office/powerpoint/2010/main" val="566594605"/>
       </p:ext>
     </p:extLst>
   </p:cSld>
@@ -5434,7 +5626,7 @@
           <p:cNvPr id="1" name="s5-rule">
             <a:extLst xmlns:a="http://schemas.openxmlformats.org/drawingml/2006/main">
               <a:ext uri="{FF2B5EF4-FFF2-40B4-BE49-F238E27FC236}">
-                <a16:creationId xmlns:a16="http://schemas.microsoft.com/office/drawing/2014/main" id="{2740CECC-801F-450A-90C5-4A859205642F}"/>
+                <a16:creationId xmlns:a16="http://schemas.microsoft.com/office/drawing/2014/main" id="{45B8E5B5-28D2-4C16-878C-5989C6D0BA14}"/>
               </a:ext>
             </a:extLst>
           </p:cNvPr>
@@ -5467,7 +5659,7 @@
           <p:cNvPr id="2" name="s5-eyebrow">
             <a:extLst xmlns:a="http://schemas.openxmlformats.org/drawingml/2006/main">
               <a:ext uri="{FF2B5EF4-FFF2-40B4-BE49-F238E27FC236}">
-                <a16:creationId xmlns:a16="http://schemas.microsoft.com/office/drawing/2014/main" id="{D66DBE88-463F-4999-B2D7-663ED1BBB3FC}"/>
+                <a16:creationId xmlns:a16="http://schemas.microsoft.com/office/drawing/2014/main" id="{7A7E35F6-6E85-4081-AC82-A2B5E16F774A}"/>
               </a:ext>
             </a:extLst>
           </p:cNvPr>
@@ -5525,7 +5717,7 @@
           <p:cNvPr id="3" name="s5-title">
             <a:extLst xmlns:a="http://schemas.openxmlformats.org/drawingml/2006/main">
               <a:ext uri="{FF2B5EF4-FFF2-40B4-BE49-F238E27FC236}">
-                <a16:creationId xmlns:a16="http://schemas.microsoft.com/office/drawing/2014/main" id="{71E95DF3-8D89-489E-8ACB-373FAB90FB0A}"/>
+                <a16:creationId xmlns:a16="http://schemas.microsoft.com/office/drawing/2014/main" id="{1C301651-CD7C-446E-B5C3-11C8ADDAD168}"/>
               </a:ext>
             </a:extLst>
           </p:cNvPr>
@@ -5550,7 +5742,7 @@
         </p:spPr>
         <p:txBody>
           <a:bodyPr xmlns:a="http://schemas.openxmlformats.org/drawingml/2006/main" lIns="0" tIns="0" rIns="0" bIns="0" anchor="ctr">
-            <a:normAutofit fontScale="76449"/>
+            <a:normAutofit fontScale="100000"/>
           </a:bodyPr>
           <a:lstStyle xmlns:a="http://schemas.openxmlformats.org/drawingml/2006/main"/>
           <a:p xmlns:a="http://schemas.openxmlformats.org/drawingml/2006/main">
@@ -5573,7 +5765,7 @@
                 <a:ea typeface="PingFang SC"/>
                 <a:cs typeface="PingFang SC"/>
               </a:rPr>
-              <a:t>强化学习中的智能体读取状态或观测，输出动作，环境返回下一状态与奖励</a:t>
+              <a:t>强化学习把观测、动作与奖励连成控制闭环</a:t>
             </a:r>
           </a:p>
         </p:txBody>
@@ -5583,7 +5775,7 @@
           <p:cNvPr id="4" name="s5-footer">
             <a:extLst xmlns:a="http://schemas.openxmlformats.org/drawingml/2006/main">
               <a:ext uri="{FF2B5EF4-FFF2-40B4-BE49-F238E27FC236}">
-                <a16:creationId xmlns:a16="http://schemas.microsoft.com/office/drawing/2014/main" id="{FEBF87A2-A789-4AF3-8C01-9D4F72B16D9F}"/>
+                <a16:creationId xmlns:a16="http://schemas.microsoft.com/office/drawing/2014/main" id="{15BBFAA0-32EC-477B-8124-DABC6B987D64}"/>
               </a:ext>
             </a:extLst>
           </p:cNvPr>
@@ -5614,7 +5806,7 @@
           <p:cNvPr id="5" name="s5-identity">
             <a:extLst xmlns:a="http://schemas.openxmlformats.org/drawingml/2006/main">
               <a:ext uri="{FF2B5EF4-FFF2-40B4-BE49-F238E27FC236}">
-                <a16:creationId xmlns:a16="http://schemas.microsoft.com/office/drawing/2014/main" id="{69884631-C658-4856-817B-B2EAC70E9D74}"/>
+                <a16:creationId xmlns:a16="http://schemas.microsoft.com/office/drawing/2014/main" id="{46392B9A-9898-4230-9587-0E02C5BE42DB}"/>
               </a:ext>
             </a:extLst>
           </p:cNvPr>
@@ -5672,7 +5864,7 @@
           <p:cNvPr id="6" name="core-no-0">
             <a:extLst xmlns:a="http://schemas.openxmlformats.org/drawingml/2006/main">
               <a:ext uri="{FF2B5EF4-FFF2-40B4-BE49-F238E27FC236}">
-                <a16:creationId xmlns:a16="http://schemas.microsoft.com/office/drawing/2014/main" id="{ED7F415A-FEE4-4E7B-848E-1CE7F41A8D56}"/>
+                <a16:creationId xmlns:a16="http://schemas.microsoft.com/office/drawing/2014/main" id="{B41FE73F-039E-45F8-91B8-69A61B644646}"/>
               </a:ext>
             </a:extLst>
           </p:cNvPr>
@@ -5704,7 +5896,7 @@
             <a:pPr algn="l">
               <a:defRPr sz="2250" b="1">
                 <a:solidFill>
-                  <a:srgbClr val="2D9B72"/>
+                  <a:srgbClr val="0B6B4F"/>
                 </a:solidFill>
                 <a:latin typeface="PingFang SC"/>
                 <a:ea typeface="PingFang SC"/>
@@ -5714,7 +5906,7 @@
             <a:r>
               <a:rPr sz="2250" b="1">
                 <a:solidFill>
-                  <a:srgbClr val="2D9B72"/>
+                  <a:srgbClr val="0B6B4F"/>
                 </a:solidFill>
                 <a:latin typeface="PingFang SC"/>
                 <a:ea typeface="PingFang SC"/>
@@ -5730,7 +5922,7 @@
           <p:cNvPr id="7" name="core-label-0">
             <a:extLst xmlns:a="http://schemas.openxmlformats.org/drawingml/2006/main">
               <a:ext uri="{FF2B5EF4-FFF2-40B4-BE49-F238E27FC236}">
-                <a16:creationId xmlns:a16="http://schemas.microsoft.com/office/drawing/2014/main" id="{1E64631C-F557-41A8-A6C0-F7C2B84122AD}"/>
+                <a16:creationId xmlns:a16="http://schemas.microsoft.com/office/drawing/2014/main" id="{F2358569-6204-4692-8F31-6B5F7655EEB7}"/>
               </a:ext>
             </a:extLst>
           </p:cNvPr>
@@ -5788,7 +5980,7 @@
           <p:cNvPr id="8" name="core-body-0">
             <a:extLst xmlns:a="http://schemas.openxmlformats.org/drawingml/2006/main">
               <a:ext uri="{FF2B5EF4-FFF2-40B4-BE49-F238E27FC236}">
-                <a16:creationId xmlns:a16="http://schemas.microsoft.com/office/drawing/2014/main" id="{B81B3A8D-AE26-4E3C-904E-C4799C19D95F}"/>
+                <a16:creationId xmlns:a16="http://schemas.microsoft.com/office/drawing/2014/main" id="{55665A83-1C32-4F43-95D8-7E47EAE3E7CB}"/>
               </a:ext>
             </a:extLst>
           </p:cNvPr>
@@ -5812,7 +6004,7 @@
           </a:solidFill>
           <a:ln xmlns:a="http://schemas.openxmlformats.org/drawingml/2006/main" w="19050">
             <a:solidFill>
-              <a:srgbClr val="2D9B72"/>
+              <a:srgbClr val="0B6B4F"/>
             </a:solidFill>
             <a:prstDash val="solid"/>
           </a:ln>
@@ -5852,7 +6044,7 @@
           <p:cNvPr id="9" name="core-no-1">
             <a:extLst xmlns:a="http://schemas.openxmlformats.org/drawingml/2006/main">
               <a:ext uri="{FF2B5EF4-FFF2-40B4-BE49-F238E27FC236}">
-                <a16:creationId xmlns:a16="http://schemas.microsoft.com/office/drawing/2014/main" id="{D8233CEE-355A-464A-B4A0-9C7695DF5B74}"/>
+                <a16:creationId xmlns:a16="http://schemas.microsoft.com/office/drawing/2014/main" id="{47B52307-02F9-4D03-BA41-2093586895FC}"/>
               </a:ext>
             </a:extLst>
           </p:cNvPr>
@@ -5884,7 +6076,7 @@
             <a:pPr algn="l">
               <a:defRPr sz="2250" b="1">
                 <a:solidFill>
-                  <a:srgbClr val="2D9B72"/>
+                  <a:srgbClr val="0B6B4F"/>
                 </a:solidFill>
                 <a:latin typeface="PingFang SC"/>
                 <a:ea typeface="PingFang SC"/>
@@ -5894,7 +6086,7 @@
             <a:r>
               <a:rPr sz="2250" b="1">
                 <a:solidFill>
-                  <a:srgbClr val="2D9B72"/>
+                  <a:srgbClr val="0B6B4F"/>
                 </a:solidFill>
                 <a:latin typeface="PingFang SC"/>
                 <a:ea typeface="PingFang SC"/>
@@ -5910,7 +6102,7 @@
           <p:cNvPr id="10" name="core-body-1">
             <a:extLst xmlns:a="http://schemas.openxmlformats.org/drawingml/2006/main">
               <a:ext uri="{FF2B5EF4-FFF2-40B4-BE49-F238E27FC236}">
-                <a16:creationId xmlns:a16="http://schemas.microsoft.com/office/drawing/2014/main" id="{6C846088-550E-4500-9BBD-54456E8DE295}"/>
+                <a16:creationId xmlns:a16="http://schemas.microsoft.com/office/drawing/2014/main" id="{2DE50828-7A8E-4488-B018-90F50AB6A41B}"/>
               </a:ext>
             </a:extLst>
           </p:cNvPr>
@@ -5974,7 +6166,7 @@
           <p:cNvPr id="11" name="s5-takeaway-rule">
             <a:extLst xmlns:a="http://schemas.openxmlformats.org/drawingml/2006/main">
               <a:ext uri="{FF2B5EF4-FFF2-40B4-BE49-F238E27FC236}">
-                <a16:creationId xmlns:a16="http://schemas.microsoft.com/office/drawing/2014/main" id="{0F1BD726-3881-4508-B6E1-2804F828FF99}"/>
+                <a16:creationId xmlns:a16="http://schemas.microsoft.com/office/drawing/2014/main" id="{DEE76D1C-C6C3-4B54-9261-AE960B63B607}"/>
               </a:ext>
             </a:extLst>
           </p:cNvPr>
@@ -6007,7 +6199,7 @@
           <p:cNvPr id="12" name="s5-takeaway">
             <a:extLst xmlns:a="http://schemas.openxmlformats.org/drawingml/2006/main">
               <a:ext uri="{FF2B5EF4-FFF2-40B4-BE49-F238E27FC236}">
-                <a16:creationId xmlns:a16="http://schemas.microsoft.com/office/drawing/2014/main" id="{356E694E-6338-4561-9899-F8AA26F5CE76}"/>
+                <a16:creationId xmlns:a16="http://schemas.microsoft.com/office/drawing/2014/main" id="{6BC67A53-9B2B-4943-915B-E80BCAE18489}"/>
               </a:ext>
             </a:extLst>
           </p:cNvPr>
@@ -6055,7 +6247,7 @@
                 <a:ea typeface="PingFang SC"/>
                 <a:cs typeface="PingFang SC"/>
               </a:rPr>
-              <a:t>强化学习中的智能体读取状态或观测，输出动作，环境返回下一状态与奖励</a:t>
+              <a:t>强化学习把观测、动作与奖励连成控制闭环</a:t>
             </a:r>
           </a:p>
         </p:txBody>
@@ -6063,7 +6255,7 @@
     </p:spTree>
     <p:extLst>
       <p:ext uri="{BB962C8B-B14F-4D97-AF65-F5344CB8AC3E}">
-        <p14:creationId xmlns:p14="http://schemas.microsoft.com/office/powerpoint/2010/main" val="1534717148"/>
+        <p14:creationId xmlns:p14="http://schemas.microsoft.com/office/powerpoint/2010/main" val="481280607"/>
       </p:ext>
     </p:extLst>
   </p:cSld>
@@ -6094,7 +6286,7 @@
           <p:cNvPr id="1" name="s6-rule">
             <a:extLst xmlns:a="http://schemas.openxmlformats.org/drawingml/2006/main">
               <a:ext uri="{FF2B5EF4-FFF2-40B4-BE49-F238E27FC236}">
-                <a16:creationId xmlns:a16="http://schemas.microsoft.com/office/drawing/2014/main" id="{6ACA09DF-36F7-4BD4-A48E-0DDA47D38F6F}"/>
+                <a16:creationId xmlns:a16="http://schemas.microsoft.com/office/drawing/2014/main" id="{CC76D475-0A7C-4EF4-9893-B294F6368957}"/>
               </a:ext>
             </a:extLst>
           </p:cNvPr>
@@ -6127,7 +6319,7 @@
           <p:cNvPr id="2" name="s6-eyebrow">
             <a:extLst xmlns:a="http://schemas.openxmlformats.org/drawingml/2006/main">
               <a:ext uri="{FF2B5EF4-FFF2-40B4-BE49-F238E27FC236}">
-                <a16:creationId xmlns:a16="http://schemas.microsoft.com/office/drawing/2014/main" id="{274B5A22-D559-490B-AF37-FFD6F17EB31F}"/>
+                <a16:creationId xmlns:a16="http://schemas.microsoft.com/office/drawing/2014/main" id="{56EC717A-36C2-4FF9-ADA9-7AF5D8254612}"/>
               </a:ext>
             </a:extLst>
           </p:cNvPr>
@@ -6185,7 +6377,7 @@
           <p:cNvPr id="3" name="s6-title">
             <a:extLst xmlns:a="http://schemas.openxmlformats.org/drawingml/2006/main">
               <a:ext uri="{FF2B5EF4-FFF2-40B4-BE49-F238E27FC236}">
-                <a16:creationId xmlns:a16="http://schemas.microsoft.com/office/drawing/2014/main" id="{5A7A7C91-0CB9-4D93-95CE-06B390A0ED7A}"/>
+                <a16:creationId xmlns:a16="http://schemas.microsoft.com/office/drawing/2014/main" id="{F38A9718-1E10-4580-924A-A3852D07474D}"/>
               </a:ext>
             </a:extLst>
           </p:cNvPr>
@@ -6243,7 +6435,7 @@
           <p:cNvPr id="4" name="s6-footer">
             <a:extLst xmlns:a="http://schemas.openxmlformats.org/drawingml/2006/main">
               <a:ext uri="{FF2B5EF4-FFF2-40B4-BE49-F238E27FC236}">
-                <a16:creationId xmlns:a16="http://schemas.microsoft.com/office/drawing/2014/main" id="{9E225C73-5038-491C-80A2-AAEBF08DF82B}"/>
+                <a16:creationId xmlns:a16="http://schemas.microsoft.com/office/drawing/2014/main" id="{545C004A-85BC-4FAC-BBF2-FF94FEA38BD4}"/>
               </a:ext>
             </a:extLst>
           </p:cNvPr>
@@ -6274,7 +6466,7 @@
           <p:cNvPr id="5" name="s6-identity">
             <a:extLst xmlns:a="http://schemas.openxmlformats.org/drawingml/2006/main">
               <a:ext uri="{FF2B5EF4-FFF2-40B4-BE49-F238E27FC236}">
-                <a16:creationId xmlns:a16="http://schemas.microsoft.com/office/drawing/2014/main" id="{669EA310-E9C8-4234-B4D3-54160EF953F2}"/>
+                <a16:creationId xmlns:a16="http://schemas.microsoft.com/office/drawing/2014/main" id="{5971E330-E9E8-4D93-BA70-5184B1688B1C}"/>
               </a:ext>
             </a:extLst>
           </p:cNvPr>
@@ -6332,7 +6524,7 @@
           <p:cNvPr id="6" name="core-no-0">
             <a:extLst xmlns:a="http://schemas.openxmlformats.org/drawingml/2006/main">
               <a:ext uri="{FF2B5EF4-FFF2-40B4-BE49-F238E27FC236}">
-                <a16:creationId xmlns:a16="http://schemas.microsoft.com/office/drawing/2014/main" id="{346D99D5-B1F1-4D73-AE91-04750EC9B5C0}"/>
+                <a16:creationId xmlns:a16="http://schemas.microsoft.com/office/drawing/2014/main" id="{1B2F7052-F10A-4AA3-B970-1B4F43DC624B}"/>
               </a:ext>
             </a:extLst>
           </p:cNvPr>
@@ -6364,7 +6556,7 @@
             <a:pPr algn="l">
               <a:defRPr sz="2250" b="1">
                 <a:solidFill>
-                  <a:srgbClr val="2D9B72"/>
+                  <a:srgbClr val="0B6B4F"/>
                 </a:solidFill>
                 <a:latin typeface="PingFang SC"/>
                 <a:ea typeface="PingFang SC"/>
@@ -6374,7 +6566,7 @@
             <a:r>
               <a:rPr sz="2250" b="1">
                 <a:solidFill>
-                  <a:srgbClr val="2D9B72"/>
+                  <a:srgbClr val="0B6B4F"/>
                 </a:solidFill>
                 <a:latin typeface="PingFang SC"/>
                 <a:ea typeface="PingFang SC"/>
@@ -6390,7 +6582,7 @@
           <p:cNvPr id="7" name="core-label-0">
             <a:extLst xmlns:a="http://schemas.openxmlformats.org/drawingml/2006/main">
               <a:ext uri="{FF2B5EF4-FFF2-40B4-BE49-F238E27FC236}">
-                <a16:creationId xmlns:a16="http://schemas.microsoft.com/office/drawing/2014/main" id="{5CADCFF4-23B6-48E1-8CE8-4A6256C788EC}"/>
+                <a16:creationId xmlns:a16="http://schemas.microsoft.com/office/drawing/2014/main" id="{027DDC15-ED27-49EC-A212-E35DC2F12EBD}"/>
               </a:ext>
             </a:extLst>
           </p:cNvPr>
@@ -6448,7 +6640,7 @@
           <p:cNvPr id="8" name="core-body-0">
             <a:extLst xmlns:a="http://schemas.openxmlformats.org/drawingml/2006/main">
               <a:ext uri="{FF2B5EF4-FFF2-40B4-BE49-F238E27FC236}">
-                <a16:creationId xmlns:a16="http://schemas.microsoft.com/office/drawing/2014/main" id="{2D528332-252C-47AC-A330-7B47A750A4BB}"/>
+                <a16:creationId xmlns:a16="http://schemas.microsoft.com/office/drawing/2014/main" id="{B8E182BE-7226-4F33-A8DE-44ACB5717AC0}"/>
               </a:ext>
             </a:extLst>
           </p:cNvPr>
@@ -6472,7 +6664,7 @@
           </a:solidFill>
           <a:ln xmlns:a="http://schemas.openxmlformats.org/drawingml/2006/main" w="19050">
             <a:solidFill>
-              <a:srgbClr val="2D9B72"/>
+              <a:srgbClr val="0B6B4F"/>
             </a:solidFill>
             <a:prstDash val="solid"/>
           </a:ln>
@@ -6512,7 +6704,7 @@
           <p:cNvPr id="9" name="core-no-1">
             <a:extLst xmlns:a="http://schemas.openxmlformats.org/drawingml/2006/main">
               <a:ext uri="{FF2B5EF4-FFF2-40B4-BE49-F238E27FC236}">
-                <a16:creationId xmlns:a16="http://schemas.microsoft.com/office/drawing/2014/main" id="{0BCB3780-B648-434A-8A1F-F1CB4F1890E6}"/>
+                <a16:creationId xmlns:a16="http://schemas.microsoft.com/office/drawing/2014/main" id="{317BA203-2148-461E-9E78-334AD74FE70F}"/>
               </a:ext>
             </a:extLst>
           </p:cNvPr>
@@ -6544,7 +6736,7 @@
             <a:pPr algn="l">
               <a:defRPr sz="2250" b="1">
                 <a:solidFill>
-                  <a:srgbClr val="2D9B72"/>
+                  <a:srgbClr val="0B6B4F"/>
                 </a:solidFill>
                 <a:latin typeface="PingFang SC"/>
                 <a:ea typeface="PingFang SC"/>
@@ -6554,7 +6746,7 @@
             <a:r>
               <a:rPr sz="2250" b="1">
                 <a:solidFill>
-                  <a:srgbClr val="2D9B72"/>
+                  <a:srgbClr val="0B6B4F"/>
                 </a:solidFill>
                 <a:latin typeface="PingFang SC"/>
                 <a:ea typeface="PingFang SC"/>
@@ -6570,7 +6762,7 @@
           <p:cNvPr id="10" name="core-body-1">
             <a:extLst xmlns:a="http://schemas.openxmlformats.org/drawingml/2006/main">
               <a:ext uri="{FF2B5EF4-FFF2-40B4-BE49-F238E27FC236}">
-                <a16:creationId xmlns:a16="http://schemas.microsoft.com/office/drawing/2014/main" id="{6D7849E8-569B-4C0E-8C94-53EF81CF30EE}"/>
+                <a16:creationId xmlns:a16="http://schemas.microsoft.com/office/drawing/2014/main" id="{D5D0DEA5-8230-42DB-A59B-3DF43600425C}"/>
               </a:ext>
             </a:extLst>
           </p:cNvPr>
@@ -6634,7 +6826,7 @@
           <p:cNvPr id="11" name="s6-takeaway-rule">
             <a:extLst xmlns:a="http://schemas.openxmlformats.org/drawingml/2006/main">
               <a:ext uri="{FF2B5EF4-FFF2-40B4-BE49-F238E27FC236}">
-                <a16:creationId xmlns:a16="http://schemas.microsoft.com/office/drawing/2014/main" id="{B1C6A7BA-7668-45D9-8EBD-DAA71B30B7DA}"/>
+                <a16:creationId xmlns:a16="http://schemas.microsoft.com/office/drawing/2014/main" id="{38AFA467-A7E9-45AB-B22A-C91EB997B67C}"/>
               </a:ext>
             </a:extLst>
           </p:cNvPr>
@@ -6667,7 +6859,7 @@
           <p:cNvPr id="12" name="s6-takeaway">
             <a:extLst xmlns:a="http://schemas.openxmlformats.org/drawingml/2006/main">
               <a:ext uri="{FF2B5EF4-FFF2-40B4-BE49-F238E27FC236}">
-                <a16:creationId xmlns:a16="http://schemas.microsoft.com/office/drawing/2014/main" id="{1B7A6EC5-0350-4716-A3C3-F1A0F525DC64}"/>
+                <a16:creationId xmlns:a16="http://schemas.microsoft.com/office/drawing/2014/main" id="{4278843D-9FA5-4978-9599-C4B16B576C41}"/>
               </a:ext>
             </a:extLst>
           </p:cNvPr>
@@ -6723,7 +6915,7 @@
     </p:spTree>
     <p:extLst>
       <p:ext uri="{BB962C8B-B14F-4D97-AF65-F5344CB8AC3E}">
-        <p14:creationId xmlns:p14="http://schemas.microsoft.com/office/powerpoint/2010/main" val="351831469"/>
+        <p14:creationId xmlns:p14="http://schemas.microsoft.com/office/powerpoint/2010/main" val="2147319305"/>
       </p:ext>
     </p:extLst>
   </p:cSld>
@@ -6754,7 +6946,7 @@
           <p:cNvPr id="1" name="s7-rule">
             <a:extLst xmlns:a="http://schemas.openxmlformats.org/drawingml/2006/main">
               <a:ext uri="{FF2B5EF4-FFF2-40B4-BE49-F238E27FC236}">
-                <a16:creationId xmlns:a16="http://schemas.microsoft.com/office/drawing/2014/main" id="{E916D352-704D-47E8-BE74-CD8EB9D8156F}"/>
+                <a16:creationId xmlns:a16="http://schemas.microsoft.com/office/drawing/2014/main" id="{938BF341-CDA9-4C46-A0DB-26C6C61D903B}"/>
               </a:ext>
             </a:extLst>
           </p:cNvPr>
@@ -6787,7 +6979,7 @@
           <p:cNvPr id="2" name="s7-eyebrow">
             <a:extLst xmlns:a="http://schemas.openxmlformats.org/drawingml/2006/main">
               <a:ext uri="{FF2B5EF4-FFF2-40B4-BE49-F238E27FC236}">
-                <a16:creationId xmlns:a16="http://schemas.microsoft.com/office/drawing/2014/main" id="{C714E158-3924-46DA-BD80-C5053B1614F0}"/>
+                <a16:creationId xmlns:a16="http://schemas.microsoft.com/office/drawing/2014/main" id="{C7FB7847-9C1B-4DD2-83EB-F5FABE19A244}"/>
               </a:ext>
             </a:extLst>
           </p:cNvPr>
@@ -6845,7 +7037,7 @@
           <p:cNvPr id="3" name="s7-title">
             <a:extLst xmlns:a="http://schemas.openxmlformats.org/drawingml/2006/main">
               <a:ext uri="{FF2B5EF4-FFF2-40B4-BE49-F238E27FC236}">
-                <a16:creationId xmlns:a16="http://schemas.microsoft.com/office/drawing/2014/main" id="{34012C12-1C1B-4AB4-AA55-71F90D1DCC4D}"/>
+                <a16:creationId xmlns:a16="http://schemas.microsoft.com/office/drawing/2014/main" id="{EC60AE70-1761-422F-BCA5-5567AD066513}"/>
               </a:ext>
             </a:extLst>
           </p:cNvPr>
@@ -6893,7 +7085,7 @@
                 <a:ea typeface="PingFang SC"/>
                 <a:cs typeface="PingFang SC"/>
               </a:rPr>
-              <a:t>典型流程先在 Isaac Gym 等并行仿真环境训练</a:t>
+              <a:t>典型流程先在 Isaac Lab 等并行仿真环境训练</a:t>
             </a:r>
           </a:p>
         </p:txBody>
@@ -6903,7 +7095,7 @@
           <p:cNvPr id="4" name="s7-footer">
             <a:extLst xmlns:a="http://schemas.openxmlformats.org/drawingml/2006/main">
               <a:ext uri="{FF2B5EF4-FFF2-40B4-BE49-F238E27FC236}">
-                <a16:creationId xmlns:a16="http://schemas.microsoft.com/office/drawing/2014/main" id="{44C32D6C-8DF8-4FC7-B15F-8291F3348883}"/>
+                <a16:creationId xmlns:a16="http://schemas.microsoft.com/office/drawing/2014/main" id="{97039325-C135-45FA-9F25-1C19CF51B46B}"/>
               </a:ext>
             </a:extLst>
           </p:cNvPr>
@@ -6934,7 +7126,7 @@
           <p:cNvPr id="5" name="s7-identity">
             <a:extLst xmlns:a="http://schemas.openxmlformats.org/drawingml/2006/main">
               <a:ext uri="{FF2B5EF4-FFF2-40B4-BE49-F238E27FC236}">
-                <a16:creationId xmlns:a16="http://schemas.microsoft.com/office/drawing/2014/main" id="{7E890941-93E0-4B12-82A4-53ED2C15625B}"/>
+                <a16:creationId xmlns:a16="http://schemas.microsoft.com/office/drawing/2014/main" id="{7305204F-44C2-4C7F-AA02-8DCB456D9786}"/>
               </a:ext>
             </a:extLst>
           </p:cNvPr>
@@ -6992,7 +7184,7 @@
           <p:cNvPr id="6" name="core-no-0">
             <a:extLst xmlns:a="http://schemas.openxmlformats.org/drawingml/2006/main">
               <a:ext uri="{FF2B5EF4-FFF2-40B4-BE49-F238E27FC236}">
-                <a16:creationId xmlns:a16="http://schemas.microsoft.com/office/drawing/2014/main" id="{02468BC8-B6F9-421E-BED4-C8DB3A8CC981}"/>
+                <a16:creationId xmlns:a16="http://schemas.microsoft.com/office/drawing/2014/main" id="{88BD417D-2C52-4897-9E54-447D1B72E826}"/>
               </a:ext>
             </a:extLst>
           </p:cNvPr>
@@ -7024,7 +7216,7 @@
             <a:pPr algn="l">
               <a:defRPr sz="2250" b="1">
                 <a:solidFill>
-                  <a:srgbClr val="2D9B72"/>
+                  <a:srgbClr val="0B6B4F"/>
                 </a:solidFill>
                 <a:latin typeface="PingFang SC"/>
                 <a:ea typeface="PingFang SC"/>
@@ -7034,7 +7226,7 @@
             <a:r>
               <a:rPr sz="2250" b="1">
                 <a:solidFill>
-                  <a:srgbClr val="2D9B72"/>
+                  <a:srgbClr val="0B6B4F"/>
                 </a:solidFill>
                 <a:latin typeface="PingFang SC"/>
                 <a:ea typeface="PingFang SC"/>
@@ -7050,7 +7242,7 @@
           <p:cNvPr id="7" name="core-label-0">
             <a:extLst xmlns:a="http://schemas.openxmlformats.org/drawingml/2006/main">
               <a:ext uri="{FF2B5EF4-FFF2-40B4-BE49-F238E27FC236}">
-                <a16:creationId xmlns:a16="http://schemas.microsoft.com/office/drawing/2014/main" id="{99A2F4B8-2DCF-40B3-BB23-15546977EE53}"/>
+                <a16:creationId xmlns:a16="http://schemas.microsoft.com/office/drawing/2014/main" id="{DA97B666-E549-4B64-9B9E-4CB6721A7FB4}"/>
               </a:ext>
             </a:extLst>
           </p:cNvPr>
@@ -7108,7 +7300,7 @@
           <p:cNvPr id="8" name="core-body-0">
             <a:extLst xmlns:a="http://schemas.openxmlformats.org/drawingml/2006/main">
               <a:ext uri="{FF2B5EF4-FFF2-40B4-BE49-F238E27FC236}">
-                <a16:creationId xmlns:a16="http://schemas.microsoft.com/office/drawing/2014/main" id="{A20B54C2-4375-4356-ABD6-ABD97999EAA7}"/>
+                <a16:creationId xmlns:a16="http://schemas.microsoft.com/office/drawing/2014/main" id="{95AD622B-60D2-4F10-95D0-1AF4D811C4F2}"/>
               </a:ext>
             </a:extLst>
           </p:cNvPr>
@@ -7132,7 +7324,7 @@
           </a:solidFill>
           <a:ln xmlns:a="http://schemas.openxmlformats.org/drawingml/2006/main" w="19050">
             <a:solidFill>
-              <a:srgbClr val="2D9B72"/>
+              <a:srgbClr val="0B6B4F"/>
             </a:solidFill>
             <a:prstDash val="solid"/>
           </a:ln>
@@ -7162,7 +7354,7 @@
                 <a:ea typeface="PingFang SC"/>
                 <a:cs typeface="PingFang SC"/>
               </a:rPr>
-              <a:t>典型流程先在 Isaac Gym 等并行仿真环境训练，在 Play 阶段观察策略，再用 MuJoCo 等不同仿真器做 Sim2Sim 检查，最后进入真机 Sim2Real…</a:t>
+              <a:t>典型流程先在 Isaac Lab 等并行仿真环境训练；在 Play 阶段观察策略；再用 MuJoCo 等不同仿真器做 Sim2Sim 检查；最后进入真机 Sim2Real</a:t>
             </a:r>
           </a:p>
         </p:txBody>
@@ -7172,7 +7364,7 @@
           <p:cNvPr id="9" name="core-no-1">
             <a:extLst xmlns:a="http://schemas.openxmlformats.org/drawingml/2006/main">
               <a:ext uri="{FF2B5EF4-FFF2-40B4-BE49-F238E27FC236}">
-                <a16:creationId xmlns:a16="http://schemas.microsoft.com/office/drawing/2014/main" id="{4BF6B991-2EAC-4586-A379-D08B0E92E4C7}"/>
+                <a16:creationId xmlns:a16="http://schemas.microsoft.com/office/drawing/2014/main" id="{1D734695-CAB8-4A58-AC0C-45434919D43D}"/>
               </a:ext>
             </a:extLst>
           </p:cNvPr>
@@ -7204,7 +7396,7 @@
             <a:pPr algn="l">
               <a:defRPr sz="2250" b="1">
                 <a:solidFill>
-                  <a:srgbClr val="2D9B72"/>
+                  <a:srgbClr val="0B6B4F"/>
                 </a:solidFill>
                 <a:latin typeface="PingFang SC"/>
                 <a:ea typeface="PingFang SC"/>
@@ -7214,7 +7406,7 @@
             <a:r>
               <a:rPr sz="2250" b="1">
                 <a:solidFill>
-                  <a:srgbClr val="2D9B72"/>
+                  <a:srgbClr val="0B6B4F"/>
                 </a:solidFill>
                 <a:latin typeface="PingFang SC"/>
                 <a:ea typeface="PingFang SC"/>
@@ -7230,7 +7422,7 @@
           <p:cNvPr id="10" name="core-body-1">
             <a:extLst xmlns:a="http://schemas.openxmlformats.org/drawingml/2006/main">
               <a:ext uri="{FF2B5EF4-FFF2-40B4-BE49-F238E27FC236}">
-                <a16:creationId xmlns:a16="http://schemas.microsoft.com/office/drawing/2014/main" id="{BD826CDC-9C35-4FE9-951D-351C2F3032F4}"/>
+                <a16:creationId xmlns:a16="http://schemas.microsoft.com/office/drawing/2014/main" id="{244CB71F-637E-4F2F-B745-8C8F751286C4}"/>
               </a:ext>
             </a:extLst>
           </p:cNvPr>
@@ -7294,7 +7486,7 @@
           <p:cNvPr id="11" name="s7-takeaway-rule">
             <a:extLst xmlns:a="http://schemas.openxmlformats.org/drawingml/2006/main">
               <a:ext uri="{FF2B5EF4-FFF2-40B4-BE49-F238E27FC236}">
-                <a16:creationId xmlns:a16="http://schemas.microsoft.com/office/drawing/2014/main" id="{C8651057-AA17-4194-8186-EBF13603A5B5}"/>
+                <a16:creationId xmlns:a16="http://schemas.microsoft.com/office/drawing/2014/main" id="{6C7BAF51-D9DD-45E2-8421-709CA6857A01}"/>
               </a:ext>
             </a:extLst>
           </p:cNvPr>
@@ -7327,7 +7519,7 @@
           <p:cNvPr id="12" name="s7-takeaway">
             <a:extLst xmlns:a="http://schemas.openxmlformats.org/drawingml/2006/main">
               <a:ext uri="{FF2B5EF4-FFF2-40B4-BE49-F238E27FC236}">
-                <a16:creationId xmlns:a16="http://schemas.microsoft.com/office/drawing/2014/main" id="{6621D497-E20A-4A94-8FA3-AFF0955271CB}"/>
+                <a16:creationId xmlns:a16="http://schemas.microsoft.com/office/drawing/2014/main" id="{134CAB4A-B2CC-404B-9964-A24EBA0C9A81}"/>
               </a:ext>
             </a:extLst>
           </p:cNvPr>
@@ -7375,7 +7567,7 @@
                 <a:ea typeface="PingFang SC"/>
                 <a:cs typeface="PingFang SC"/>
               </a:rPr>
-              <a:t>典型流程先在 Isaac Gym 等并行仿真环境训练</a:t>
+              <a:t>典型流程先在 Isaac Lab 等并行仿真环境训练</a:t>
             </a:r>
           </a:p>
         </p:txBody>
@@ -7383,7 +7575,7 @@
     </p:spTree>
     <p:extLst>
       <p:ext uri="{BB962C8B-B14F-4D97-AF65-F5344CB8AC3E}">
-        <p14:creationId xmlns:p14="http://schemas.microsoft.com/office/powerpoint/2010/main" val="1217199901"/>
+        <p14:creationId xmlns:p14="http://schemas.microsoft.com/office/powerpoint/2010/main" val="1301948714"/>
       </p:ext>
     </p:extLst>
   </p:cSld>
@@ -7414,7 +7606,7 @@
           <p:cNvPr id="1" name="s8-rule">
             <a:extLst xmlns:a="http://schemas.openxmlformats.org/drawingml/2006/main">
               <a:ext uri="{FF2B5EF4-FFF2-40B4-BE49-F238E27FC236}">
-                <a16:creationId xmlns:a16="http://schemas.microsoft.com/office/drawing/2014/main" id="{7F8E9F52-7796-4C08-8B99-ED6CBDD3EF64}"/>
+                <a16:creationId xmlns:a16="http://schemas.microsoft.com/office/drawing/2014/main" id="{6A958F8B-6510-45C6-940A-760FA3FFC24E}"/>
               </a:ext>
             </a:extLst>
           </p:cNvPr>
@@ -7447,7 +7639,7 @@
           <p:cNvPr id="2" name="s8-eyebrow">
             <a:extLst xmlns:a="http://schemas.openxmlformats.org/drawingml/2006/main">
               <a:ext uri="{FF2B5EF4-FFF2-40B4-BE49-F238E27FC236}">
-                <a16:creationId xmlns:a16="http://schemas.microsoft.com/office/drawing/2014/main" id="{BB939E16-BE6A-4C7B-8AF5-B66C1D7A0DB5}"/>
+                <a16:creationId xmlns:a16="http://schemas.microsoft.com/office/drawing/2014/main" id="{A5978D97-6023-47E3-9D54-475E2B7168D3}"/>
               </a:ext>
             </a:extLst>
           </p:cNvPr>
@@ -7505,7 +7697,7 @@
           <p:cNvPr id="3" name="s8-title">
             <a:extLst xmlns:a="http://schemas.openxmlformats.org/drawingml/2006/main">
               <a:ext uri="{FF2B5EF4-FFF2-40B4-BE49-F238E27FC236}">
-                <a16:creationId xmlns:a16="http://schemas.microsoft.com/office/drawing/2014/main" id="{DE8E41D4-4ECC-47E0-8336-E31AA13C31C9}"/>
+                <a16:creationId xmlns:a16="http://schemas.microsoft.com/office/drawing/2014/main" id="{A1DF8730-CFD4-4840-B62D-F3C08C8AFA8C}"/>
               </a:ext>
             </a:extLst>
           </p:cNvPr>
@@ -7530,7 +7722,7 @@
         </p:spPr>
         <p:txBody>
           <a:bodyPr xmlns:a="http://schemas.openxmlformats.org/drawingml/2006/main" lIns="0" tIns="0" rIns="0" bIns="0" anchor="ctr">
-            <a:normAutofit fontScale="81381"/>
+            <a:normAutofit fontScale="100000"/>
           </a:bodyPr>
           <a:lstStyle xmlns:a="http://schemas.openxmlformats.org/drawingml/2006/main"/>
           <a:p xmlns:a="http://schemas.openxmlformats.org/drawingml/2006/main">
@@ -7553,7 +7745,7 @@
                 <a:ea typeface="PingFang SC"/>
                 <a:cs typeface="PingFang SC"/>
               </a:rPr>
-              <a:t>每次放开新速度或新地形前，都应通过稳定性、温度、电量与急停检查</a:t>
+              <a:t>真机扩速前必须检查稳定性、温度与急停</a:t>
             </a:r>
           </a:p>
         </p:txBody>
@@ -7563,7 +7755,7 @@
           <p:cNvPr id="4" name="s8-footer">
             <a:extLst xmlns:a="http://schemas.openxmlformats.org/drawingml/2006/main">
               <a:ext uri="{FF2B5EF4-FFF2-40B4-BE49-F238E27FC236}">
-                <a16:creationId xmlns:a16="http://schemas.microsoft.com/office/drawing/2014/main" id="{9068FC89-897F-438D-82F2-0850AED1B1B6}"/>
+                <a16:creationId xmlns:a16="http://schemas.microsoft.com/office/drawing/2014/main" id="{DD17407F-2CDB-4F26-B408-29D3D37015A3}"/>
               </a:ext>
             </a:extLst>
           </p:cNvPr>
@@ -7594,7 +7786,7 @@
           <p:cNvPr id="5" name="s8-identity">
             <a:extLst xmlns:a="http://schemas.openxmlformats.org/drawingml/2006/main">
               <a:ext uri="{FF2B5EF4-FFF2-40B4-BE49-F238E27FC236}">
-                <a16:creationId xmlns:a16="http://schemas.microsoft.com/office/drawing/2014/main" id="{7D68D0E3-1AE2-44A5-B1F7-5749AE0DCF5C}"/>
+                <a16:creationId xmlns:a16="http://schemas.microsoft.com/office/drawing/2014/main" id="{156BC800-C5FE-4F2A-8A7B-FE693B5A74DD}"/>
               </a:ext>
             </a:extLst>
           </p:cNvPr>
@@ -7652,7 +7844,7 @@
           <p:cNvPr id="6" name="case-title">
             <a:extLst xmlns:a="http://schemas.openxmlformats.org/drawingml/2006/main">
               <a:ext uri="{FF2B5EF4-FFF2-40B4-BE49-F238E27FC236}">
-                <a16:creationId xmlns:a16="http://schemas.microsoft.com/office/drawing/2014/main" id="{B95A057D-7FAA-49F8-B88F-760DEDECF544}"/>
+                <a16:creationId xmlns:a16="http://schemas.microsoft.com/office/drawing/2014/main" id="{85B5A5ED-9710-48FC-954C-5DEA2C0169D5}"/>
               </a:ext>
             </a:extLst>
           </p:cNvPr>
@@ -7716,7 +7908,7 @@
           <p:cNvPr id="7" name="case-row-0">
             <a:extLst xmlns:a="http://schemas.openxmlformats.org/drawingml/2006/main">
               <a:ext uri="{FF2B5EF4-FFF2-40B4-BE49-F238E27FC236}">
-                <a16:creationId xmlns:a16="http://schemas.microsoft.com/office/drawing/2014/main" id="{222C60FE-90E0-43C1-B346-5179E9FF8796}"/>
+                <a16:creationId xmlns:a16="http://schemas.microsoft.com/office/drawing/2014/main" id="{8363DD2D-6F61-4323-B0A4-85CC7F32AB9A}"/>
               </a:ext>
             </a:extLst>
           </p:cNvPr>
@@ -7770,7 +7962,7 @@
                 <a:ea typeface="PingFang SC"/>
                 <a:cs typeface="PingFang SC"/>
               </a:rPr>
-              <a:t>场景｜团队在 unitree rl gym 中训练机器人按照速度指令前进，并准备部署到真实设备</a:t>
+              <a:t>场景｜团队在 unitree_rl_gym 中训练机器人按照速度指令前进，并准备部署到真实设备</a:t>
             </a:r>
           </a:p>
         </p:txBody>
@@ -7780,7 +7972,7 @@
           <p:cNvPr id="8" name="case-row-1">
             <a:extLst xmlns:a="http://schemas.openxmlformats.org/drawingml/2006/main">
               <a:ext uri="{FF2B5EF4-FFF2-40B4-BE49-F238E27FC236}">
-                <a16:creationId xmlns:a16="http://schemas.microsoft.com/office/drawing/2014/main" id="{777B1215-7A2F-472E-B788-5EC1043A0615}"/>
+                <a16:creationId xmlns:a16="http://schemas.microsoft.com/office/drawing/2014/main" id="{42DC549C-8172-41CF-B4CC-8ADE3A184756}"/>
               </a:ext>
             </a:extLst>
           </p:cNvPr>
@@ -7844,7 +8036,7 @@
           <p:cNvPr id="9" name="case-row-2">
             <a:extLst xmlns:a="http://schemas.openxmlformats.org/drawingml/2006/main">
               <a:ext uri="{FF2B5EF4-FFF2-40B4-BE49-F238E27FC236}">
-                <a16:creationId xmlns:a16="http://schemas.microsoft.com/office/drawing/2014/main" id="{ABC43A00-0757-430F-9428-8A745C34CEC6}"/>
+                <a16:creationId xmlns:a16="http://schemas.microsoft.com/office/drawing/2014/main" id="{42966EC2-F7ED-4781-8A67-522F8E67C02D}"/>
               </a:ext>
             </a:extLst>
           </p:cNvPr>
@@ -7908,7 +8100,7 @@
           <p:cNvPr id="10" name="case-row-3">
             <a:extLst xmlns:a="http://schemas.openxmlformats.org/drawingml/2006/main">
               <a:ext uri="{FF2B5EF4-FFF2-40B4-BE49-F238E27FC236}">
-                <a16:creationId xmlns:a16="http://schemas.microsoft.com/office/drawing/2014/main" id="{2DB4FE64-60B4-4CD5-86C7-3597E254351B}"/>
+                <a16:creationId xmlns:a16="http://schemas.microsoft.com/office/drawing/2014/main" id="{2A5744FA-AEEB-4699-947B-EB35EE5FE8D5}"/>
               </a:ext>
             </a:extLst>
           </p:cNvPr>
@@ -7972,7 +8164,7 @@
           <p:cNvPr id="11" name="case-row-4">
             <a:extLst xmlns:a="http://schemas.openxmlformats.org/drawingml/2006/main">
               <a:ext uri="{FF2B5EF4-FFF2-40B4-BE49-F238E27FC236}">
-                <a16:creationId xmlns:a16="http://schemas.microsoft.com/office/drawing/2014/main" id="{C6D7EE8B-6AAE-4018-A6AC-45B5E88ACAEC}"/>
+                <a16:creationId xmlns:a16="http://schemas.microsoft.com/office/drawing/2014/main" id="{1ECE3FDD-317A-4995-B8AE-6307038F60D1}"/>
               </a:ext>
             </a:extLst>
           </p:cNvPr>
@@ -7996,7 +8188,7 @@
           </a:solidFill>
           <a:ln xmlns:a="http://schemas.openxmlformats.org/drawingml/2006/main" w="9525">
             <a:solidFill>
-              <a:srgbClr val="2D9B72"/>
+              <a:srgbClr val="0B6B4F"/>
             </a:solidFill>
             <a:prstDash val="solid"/>
           </a:ln>
@@ -8036,7 +8228,7 @@
           <p:cNvPr id="12" name="s8-takeaway-rule">
             <a:extLst xmlns:a="http://schemas.openxmlformats.org/drawingml/2006/main">
               <a:ext uri="{FF2B5EF4-FFF2-40B4-BE49-F238E27FC236}">
-                <a16:creationId xmlns:a16="http://schemas.microsoft.com/office/drawing/2014/main" id="{0661F8B8-58EC-4A18-AABE-FF3F5C8FD6B9}"/>
+                <a16:creationId xmlns:a16="http://schemas.microsoft.com/office/drawing/2014/main" id="{2C3DD520-F8D1-4735-A543-F6983175324C}"/>
               </a:ext>
             </a:extLst>
           </p:cNvPr>
@@ -8069,7 +8261,7 @@
           <p:cNvPr id="13" name="s8-takeaway">
             <a:extLst xmlns:a="http://schemas.openxmlformats.org/drawingml/2006/main">
               <a:ext uri="{FF2B5EF4-FFF2-40B4-BE49-F238E27FC236}">
-                <a16:creationId xmlns:a16="http://schemas.microsoft.com/office/drawing/2014/main" id="{E7DC3AC9-BFBC-4390-9B09-4821F1F68910}"/>
+                <a16:creationId xmlns:a16="http://schemas.microsoft.com/office/drawing/2014/main" id="{3C77D63D-762E-49D1-9498-D8BD07FCE2CC}"/>
               </a:ext>
             </a:extLst>
           </p:cNvPr>
@@ -8117,7 +8309,7 @@
                 <a:ea typeface="PingFang SC"/>
                 <a:cs typeface="PingFang SC"/>
               </a:rPr>
-              <a:t>每次放开新速度或新地形前，都应通过稳定性、温度、电量与急停检查</a:t>
+              <a:t>真机扩速前必须检查稳定性、温度与急停</a:t>
             </a:r>
           </a:p>
         </p:txBody>
@@ -8125,7 +8317,7 @@
     </p:spTree>
     <p:extLst>
       <p:ext uri="{BB962C8B-B14F-4D97-AF65-F5344CB8AC3E}">
-        <p14:creationId xmlns:p14="http://schemas.microsoft.com/office/powerpoint/2010/main" val="2042601586"/>
+        <p14:creationId xmlns:p14="http://schemas.microsoft.com/office/powerpoint/2010/main" val="327327300"/>
       </p:ext>
     </p:extLst>
   </p:cSld>
@@ -8156,7 +8348,7 @@
           <p:cNvPr id="1" name="s9-rule">
             <a:extLst xmlns:a="http://schemas.openxmlformats.org/drawingml/2006/main">
               <a:ext uri="{FF2B5EF4-FFF2-40B4-BE49-F238E27FC236}">
-                <a16:creationId xmlns:a16="http://schemas.microsoft.com/office/drawing/2014/main" id="{37FF9D28-E044-4B26-89E1-61E3B94C5D54}"/>
+                <a16:creationId xmlns:a16="http://schemas.microsoft.com/office/drawing/2014/main" id="{0A70746C-12A3-4105-8560-B5348370C895}"/>
               </a:ext>
             </a:extLst>
           </p:cNvPr>
@@ -8189,7 +8381,7 @@
           <p:cNvPr id="2" name="s9-eyebrow">
             <a:extLst xmlns:a="http://schemas.openxmlformats.org/drawingml/2006/main">
               <a:ext uri="{FF2B5EF4-FFF2-40B4-BE49-F238E27FC236}">
-                <a16:creationId xmlns:a16="http://schemas.microsoft.com/office/drawing/2014/main" id="{0501F5C3-C1EE-4002-9E4C-BF08C492D918}"/>
+                <a16:creationId xmlns:a16="http://schemas.microsoft.com/office/drawing/2014/main" id="{8658F8CA-AF33-4936-8AA7-BB90BD273459}"/>
               </a:ext>
             </a:extLst>
           </p:cNvPr>
@@ -8247,7 +8439,7 @@
           <p:cNvPr id="3" name="s9-title">
             <a:extLst xmlns:a="http://schemas.openxmlformats.org/drawingml/2006/main">
               <a:ext uri="{FF2B5EF4-FFF2-40B4-BE49-F238E27FC236}">
-                <a16:creationId xmlns:a16="http://schemas.microsoft.com/office/drawing/2014/main" id="{07F539F3-D5E4-495E-900A-26513DEBBEBB}"/>
+                <a16:creationId xmlns:a16="http://schemas.microsoft.com/office/drawing/2014/main" id="{76EDE056-5804-413C-A48B-4D761BA28BB6}"/>
               </a:ext>
             </a:extLst>
           </p:cNvPr>
@@ -8295,7 +8487,7 @@
                 <a:ea typeface="PingFang SC"/>
                 <a:cs typeface="PingFang SC"/>
               </a:rPr>
-              <a:t>把方法落实为可验证的行动</a:t>
+              <a:t>运动控制与迁移：一次可验收练习</a:t>
             </a:r>
           </a:p>
         </p:txBody>
@@ -8305,7 +8497,7 @@
           <p:cNvPr id="4" name="s9-footer">
             <a:extLst xmlns:a="http://schemas.openxmlformats.org/drawingml/2006/main">
               <a:ext uri="{FF2B5EF4-FFF2-40B4-BE49-F238E27FC236}">
-                <a16:creationId xmlns:a16="http://schemas.microsoft.com/office/drawing/2014/main" id="{769F5E6D-EABA-4016-B203-85A52E426559}"/>
+                <a16:creationId xmlns:a16="http://schemas.microsoft.com/office/drawing/2014/main" id="{61CA8691-6A0F-4A8E-B55E-5E9CF31BC292}"/>
               </a:ext>
             </a:extLst>
           </p:cNvPr>
@@ -8336,7 +8528,7 @@
           <p:cNvPr id="5" name="s9-identity">
             <a:extLst xmlns:a="http://schemas.openxmlformats.org/drawingml/2006/main">
               <a:ext uri="{FF2B5EF4-FFF2-40B4-BE49-F238E27FC236}">
-                <a16:creationId xmlns:a16="http://schemas.microsoft.com/office/drawing/2014/main" id="{20139808-80BC-4B25-8976-7BF7CCCBC052}"/>
+                <a16:creationId xmlns:a16="http://schemas.microsoft.com/office/drawing/2014/main" id="{45DF7666-1735-45F9-AD42-04F9E3CD1A28}"/>
               </a:ext>
             </a:extLst>
           </p:cNvPr>
@@ -8394,7 +8586,7 @@
           <p:cNvPr id="6" name="practice-circle-0">
             <a:extLst xmlns:a="http://schemas.openxmlformats.org/drawingml/2006/main">
               <a:ext uri="{FF2B5EF4-FFF2-40B4-BE49-F238E27FC236}">
-                <a16:creationId xmlns:a16="http://schemas.microsoft.com/office/drawing/2014/main" id="{DEEA0FB4-C452-43FC-BD67-9B23894DAEFB}"/>
+                <a16:creationId xmlns:a16="http://schemas.microsoft.com/office/drawing/2014/main" id="{A64672D3-9244-4FA9-824A-57A8DB82C85E}"/>
               </a:ext>
             </a:extLst>
           </p:cNvPr>
@@ -8427,7 +8619,7 @@
           <p:cNvPr id="7" name="practice-number-0">
             <a:extLst xmlns:a="http://schemas.openxmlformats.org/drawingml/2006/main">
               <a:ext uri="{FF2B5EF4-FFF2-40B4-BE49-F238E27FC236}">
-                <a16:creationId xmlns:a16="http://schemas.microsoft.com/office/drawing/2014/main" id="{32060A85-1CD8-4417-8BE4-FC58E3F7A287}"/>
+                <a16:creationId xmlns:a16="http://schemas.microsoft.com/office/drawing/2014/main" id="{ABF0127C-BC9F-4BE0-A9FD-4C9454401855}"/>
               </a:ext>
             </a:extLst>
           </p:cNvPr>
@@ -8485,7 +8677,7 @@
           <p:cNvPr id="8" name="practice-item-0">
             <a:extLst xmlns:a="http://schemas.openxmlformats.org/drawingml/2006/main">
               <a:ext uri="{FF2B5EF4-FFF2-40B4-BE49-F238E27FC236}">
-                <a16:creationId xmlns:a16="http://schemas.microsoft.com/office/drawing/2014/main" id="{BBB117C0-9143-4451-A968-7F3F1ADD95D6}"/>
+                <a16:creationId xmlns:a16="http://schemas.microsoft.com/office/drawing/2014/main" id="{5E4A8BA9-EE69-4F23-BBDE-EBF5514EA3E5}"/>
               </a:ext>
             </a:extLst>
           </p:cNvPr>
@@ -8549,7 +8741,7 @@
           <p:cNvPr id="9" name="practice-connector-0">
             <a:extLst xmlns:a="http://schemas.openxmlformats.org/drawingml/2006/main">
               <a:ext uri="{FF2B5EF4-FFF2-40B4-BE49-F238E27FC236}">
-                <a16:creationId xmlns:a16="http://schemas.microsoft.com/office/drawing/2014/main" id="{859DFB15-EFD4-42CD-AD8A-A416BB76F1DC}"/>
+                <a16:creationId xmlns:a16="http://schemas.microsoft.com/office/drawing/2014/main" id="{DED3D6D9-D732-41B0-8139-D1C1DC5A92C0}"/>
               </a:ext>
             </a:extLst>
           </p:cNvPr>
@@ -8569,7 +8761,7 @@
           <a:noFill xmlns:a="http://schemas.openxmlformats.org/drawingml/2006/main"/>
           <a:ln xmlns:a="http://schemas.openxmlformats.org/drawingml/2006/main" w="28575">
             <a:solidFill>
-              <a:srgbClr val="2D9B72"/>
+              <a:srgbClr val="0B6B4F"/>
             </a:solidFill>
             <a:prstDash val="solid"/>
           </a:ln>
@@ -8580,7 +8772,7 @@
           <p:cNvPr id="10" name="practice-circle-1">
             <a:extLst xmlns:a="http://schemas.openxmlformats.org/drawingml/2006/main">
               <a:ext uri="{FF2B5EF4-FFF2-40B4-BE49-F238E27FC236}">
-                <a16:creationId xmlns:a16="http://schemas.microsoft.com/office/drawing/2014/main" id="{48F4C37C-0057-4C34-989A-973589362B23}"/>
+                <a16:creationId xmlns:a16="http://schemas.microsoft.com/office/drawing/2014/main" id="{C320EBA2-BAD2-42E4-B66F-2D5367882DA7}"/>
               </a:ext>
             </a:extLst>
           </p:cNvPr>
@@ -8613,7 +8805,7 @@
           <p:cNvPr id="11" name="practice-number-1">
             <a:extLst xmlns:a="http://schemas.openxmlformats.org/drawingml/2006/main">
               <a:ext uri="{FF2B5EF4-FFF2-40B4-BE49-F238E27FC236}">
-                <a16:creationId xmlns:a16="http://schemas.microsoft.com/office/drawing/2014/main" id="{F276D5E4-65EB-479D-B477-98B404ED8E49}"/>
+                <a16:creationId xmlns:a16="http://schemas.microsoft.com/office/drawing/2014/main" id="{D5BE523C-270A-4097-8C82-F8B7096A68D6}"/>
               </a:ext>
             </a:extLst>
           </p:cNvPr>
@@ -8671,7 +8863,7 @@
           <p:cNvPr id="12" name="practice-item-1">
             <a:extLst xmlns:a="http://schemas.openxmlformats.org/drawingml/2006/main">
               <a:ext uri="{FF2B5EF4-FFF2-40B4-BE49-F238E27FC236}">
-                <a16:creationId xmlns:a16="http://schemas.microsoft.com/office/drawing/2014/main" id="{7DE270AA-D9CA-4559-B99B-B05D4ACD34BC}"/>
+                <a16:creationId xmlns:a16="http://schemas.microsoft.com/office/drawing/2014/main" id="{106BCDB7-A8DC-4BB7-97D7-9B0519B988A5}"/>
               </a:ext>
             </a:extLst>
           </p:cNvPr>
@@ -8735,7 +8927,7 @@
           <p:cNvPr id="13" name="practice-connector-1">
             <a:extLst xmlns:a="http://schemas.openxmlformats.org/drawingml/2006/main">
               <a:ext uri="{FF2B5EF4-FFF2-40B4-BE49-F238E27FC236}">
-                <a16:creationId xmlns:a16="http://schemas.microsoft.com/office/drawing/2014/main" id="{EDD4CB72-0B2C-450F-AF60-7FF447D58DD9}"/>
+                <a16:creationId xmlns:a16="http://schemas.microsoft.com/office/drawing/2014/main" id="{ED7E425C-454C-436A-AA25-D28EE6A3B380}"/>
               </a:ext>
             </a:extLst>
           </p:cNvPr>
@@ -8755,7 +8947,7 @@
           <a:noFill xmlns:a="http://schemas.openxmlformats.org/drawingml/2006/main"/>
           <a:ln xmlns:a="http://schemas.openxmlformats.org/drawingml/2006/main" w="28575">
             <a:solidFill>
-              <a:srgbClr val="2D9B72"/>
+              <a:srgbClr val="0B6B4F"/>
             </a:solidFill>
             <a:prstDash val="solid"/>
           </a:ln>
@@ -8766,7 +8958,7 @@
           <p:cNvPr id="14" name="practice-circle-2">
             <a:extLst xmlns:a="http://schemas.openxmlformats.org/drawingml/2006/main">
               <a:ext uri="{FF2B5EF4-FFF2-40B4-BE49-F238E27FC236}">
-                <a16:creationId xmlns:a16="http://schemas.microsoft.com/office/drawing/2014/main" id="{6D3A4BBA-2006-4572-9176-0230B68AF814}"/>
+                <a16:creationId xmlns:a16="http://schemas.microsoft.com/office/drawing/2014/main" id="{DAFD3910-4B97-4C26-B056-BA30432E3A3D}"/>
               </a:ext>
             </a:extLst>
           </p:cNvPr>
@@ -8784,7 +8976,7 @@
             <a:avLst/>
           </a:prstGeom>
           <a:solidFill xmlns:a="http://schemas.openxmlformats.org/drawingml/2006/main">
-            <a:srgbClr val="2D9B72"/>
+            <a:srgbClr val="0B6B4F"/>
           </a:solidFill>
           <a:ln xmlns:a="http://schemas.openxmlformats.org/drawingml/2006/main" w="28575">
             <a:solidFill>
@@ -8799,7 +8991,7 @@
           <p:cNvPr id="15" name="practice-number-2">
             <a:extLst xmlns:a="http://schemas.openxmlformats.org/drawingml/2006/main">
               <a:ext uri="{FF2B5EF4-FFF2-40B4-BE49-F238E27FC236}">
-                <a16:creationId xmlns:a16="http://schemas.microsoft.com/office/drawing/2014/main" id="{91131DCD-4514-455A-BEA2-BD535A701504}"/>
+                <a16:creationId xmlns:a16="http://schemas.microsoft.com/office/drawing/2014/main" id="{1D575F20-858B-4F89-9FC7-76F15605CE91}"/>
               </a:ext>
             </a:extLst>
           </p:cNvPr>
@@ -8857,7 +9049,7 @@
           <p:cNvPr id="16" name="practice-item-2">
             <a:extLst xmlns:a="http://schemas.openxmlformats.org/drawingml/2006/main">
               <a:ext uri="{FF2B5EF4-FFF2-40B4-BE49-F238E27FC236}">
-                <a16:creationId xmlns:a16="http://schemas.microsoft.com/office/drawing/2014/main" id="{EE6BB2E9-6F82-409D-B076-CA177A5A2A38}"/>
+                <a16:creationId xmlns:a16="http://schemas.microsoft.com/office/drawing/2014/main" id="{3FBAF36D-A0C4-4EBA-942E-1553F9FB3BBD}"/>
               </a:ext>
             </a:extLst>
           </p:cNvPr>
@@ -8881,7 +9073,7 @@
           </a:solidFill>
           <a:ln xmlns:a="http://schemas.openxmlformats.org/drawingml/2006/main" w="19050">
             <a:solidFill>
-              <a:srgbClr val="2D9B72"/>
+              <a:srgbClr val="0B6B4F"/>
             </a:solidFill>
             <a:prstDash val="solid"/>
           </a:ln>
@@ -8919,7 +9111,7 @@
     </p:spTree>
     <p:extLst>
       <p:ext uri="{BB962C8B-B14F-4D97-AF65-F5344CB8AC3E}">
-        <p14:creationId xmlns:p14="http://schemas.microsoft.com/office/powerpoint/2010/main" val="594593556"/>
+        <p14:creationId xmlns:p14="http://schemas.microsoft.com/office/powerpoint/2010/main" val="1814544556"/>
       </p:ext>
     </p:extLst>
   </p:cSld>

--- a/docs/public/course-assets/course-pptx/em-004.pptx
+++ b/docs/public/course-assets/course-pptx/em-004.pptx
@@ -2,23 +2,23 @@
 <file path=ppt/presentation.xml><?xml version="1.0" encoding="utf-8"?>
 <p:presentation xmlns:p="http://schemas.openxmlformats.org/presentationml/2006/main">
   <p:sldMasterIdLst>
-    <p:sldMasterId xmlns:r="http://schemas.openxmlformats.org/officeDocument/2006/relationships" id="2147483648" r:id="R981faee184204e0a"/>
+    <p:sldMasterId xmlns:r="http://schemas.openxmlformats.org/officeDocument/2006/relationships" id="2147483648" r:id="Rf247b51152e94da3"/>
   </p:sldMasterIdLst>
   <p:notesMasterIdLst>
-    <p:notesMasterId xmlns:r="http://schemas.openxmlformats.org/officeDocument/2006/relationships" r:id="R057a546ed77547a1"/>
+    <p:notesMasterId xmlns:r="http://schemas.openxmlformats.org/officeDocument/2006/relationships" r:id="R3a26c17b474d4c53"/>
   </p:notesMasterIdLst>
   <p:sldIdLst>
-    <p:sldId xmlns:r="http://schemas.openxmlformats.org/officeDocument/2006/relationships" id="256" r:id="R2c1f983e5aa44013"/>
-    <p:sldId xmlns:r="http://schemas.openxmlformats.org/officeDocument/2006/relationships" id="257" r:id="Rd975f8b1ea6f48e7"/>
-    <p:sldId xmlns:r="http://schemas.openxmlformats.org/officeDocument/2006/relationships" id="258" r:id="Raa95008d8e374e97"/>
-    <p:sldId xmlns:r="http://schemas.openxmlformats.org/officeDocument/2006/relationships" id="259" r:id="Rc650c2f7e70a463b"/>
-    <p:sldId xmlns:r="http://schemas.openxmlformats.org/officeDocument/2006/relationships" id="260" r:id="Rfdb6bbe39696479e"/>
-    <p:sldId xmlns:r="http://schemas.openxmlformats.org/officeDocument/2006/relationships" id="261" r:id="R08aea5abafeb4545"/>
-    <p:sldId xmlns:r="http://schemas.openxmlformats.org/officeDocument/2006/relationships" id="262" r:id="R3c0fa7ccfd58475a"/>
-    <p:sldId xmlns:r="http://schemas.openxmlformats.org/officeDocument/2006/relationships" id="263" r:id="R2e606c88c62342d2"/>
-    <p:sldId xmlns:r="http://schemas.openxmlformats.org/officeDocument/2006/relationships" id="264" r:id="R7b68239181804cd1"/>
-    <p:sldId xmlns:r="http://schemas.openxmlformats.org/officeDocument/2006/relationships" id="265" r:id="Rcc394612783744f9"/>
-    <p:sldId xmlns:r="http://schemas.openxmlformats.org/officeDocument/2006/relationships" id="266" r:id="Ra707b7ba85b346e2"/>
+    <p:sldId xmlns:r="http://schemas.openxmlformats.org/officeDocument/2006/relationships" id="256" r:id="R917625980afd43c1"/>
+    <p:sldId xmlns:r="http://schemas.openxmlformats.org/officeDocument/2006/relationships" id="257" r:id="R7e0e5cc36b9c4d1a"/>
+    <p:sldId xmlns:r="http://schemas.openxmlformats.org/officeDocument/2006/relationships" id="258" r:id="R84f2e103a9b24050"/>
+    <p:sldId xmlns:r="http://schemas.openxmlformats.org/officeDocument/2006/relationships" id="259" r:id="Rf505fccc01cf438f"/>
+    <p:sldId xmlns:r="http://schemas.openxmlformats.org/officeDocument/2006/relationships" id="260" r:id="R2b4d4c1e7d5c468a"/>
+    <p:sldId xmlns:r="http://schemas.openxmlformats.org/officeDocument/2006/relationships" id="261" r:id="Rb661d0b2f8a04b8e"/>
+    <p:sldId xmlns:r="http://schemas.openxmlformats.org/officeDocument/2006/relationships" id="262" r:id="R62cffbf204be4a6e"/>
+    <p:sldId xmlns:r="http://schemas.openxmlformats.org/officeDocument/2006/relationships" id="263" r:id="R9ad5c3158321412b"/>
+    <p:sldId xmlns:r="http://schemas.openxmlformats.org/officeDocument/2006/relationships" id="264" r:id="Rd7795c33a26745b7"/>
+    <p:sldId xmlns:r="http://schemas.openxmlformats.org/officeDocument/2006/relationships" id="265" r:id="R5c0b211c0c994bee"/>
+    <p:sldId xmlns:r="http://schemas.openxmlformats.org/officeDocument/2006/relationships" id="266" r:id="R37a803a356ba43f8"/>
   </p:sldIdLst>
   <p:sldSz cx="12192000" cy="6858000"/>
   <p:notesSz cx="6858000" cy="9144000"/>
@@ -1271,7 +1271,7 @@
   </p:cSld>
   <p:clrMap bg1="lt1" tx1="dk1" bg2="lt2" tx2="dk2" accent1="accent1" accent2="accent2" accent3="accent3" accent4="accent4" accent5="accent5" accent6="accent6" hlink="hlink" folHlink="folHlink"/>
   <p:sldLayoutIdLst>
-    <p:sldLayoutId xmlns:r="http://schemas.openxmlformats.org/officeDocument/2006/relationships" id="2147483649" r:id="R044bc77fc69b49c7"/>
+    <p:sldLayoutId xmlns:r="http://schemas.openxmlformats.org/officeDocument/2006/relationships" id="2147483649" r:id="R24c6cb414349430c"/>
   </p:sldLayoutIdLst>
   <p:txStyles>
     <p:titleStyle>
@@ -1822,7 +1822,7 @@
           <p:cNvPr id="1" name="cover-rule">
             <a:extLst xmlns:a="http://schemas.openxmlformats.org/drawingml/2006/main">
               <a:ext uri="{FF2B5EF4-FFF2-40B4-BE49-F238E27FC236}">
-                <a16:creationId xmlns:a16="http://schemas.microsoft.com/office/drawing/2014/main" id="{8BA8094C-4124-48CA-B75C-E487F4950FAB}"/>
+                <a16:creationId xmlns:a16="http://schemas.microsoft.com/office/drawing/2014/main" id="{B51805B0-B5D6-4EF7-87BD-8FFA2FF58685}"/>
               </a:ext>
             </a:extLst>
           </p:cNvPr>
@@ -1855,7 +1855,7 @@
           <p:cNvPr id="2" name="cover-ring-1">
             <a:extLst xmlns:a="http://schemas.openxmlformats.org/drawingml/2006/main">
               <a:ext uri="{FF2B5EF4-FFF2-40B4-BE49-F238E27FC236}">
-                <a16:creationId xmlns:a16="http://schemas.microsoft.com/office/drawing/2014/main" id="{421CE4F9-6336-4407-B6C3-8042CC95B07E}"/>
+                <a16:creationId xmlns:a16="http://schemas.microsoft.com/office/drawing/2014/main" id="{2376AA40-D37A-4BF2-A078-0456A801A0A6}"/>
               </a:ext>
             </a:extLst>
           </p:cNvPr>
@@ -1886,7 +1886,7 @@
           <p:cNvPr id="3" name="cover-ring-2">
             <a:extLst xmlns:a="http://schemas.openxmlformats.org/drawingml/2006/main">
               <a:ext uri="{FF2B5EF4-FFF2-40B4-BE49-F238E27FC236}">
-                <a16:creationId xmlns:a16="http://schemas.microsoft.com/office/drawing/2014/main" id="{F235E614-AF22-4570-9935-A4F88DD92C40}"/>
+                <a16:creationId xmlns:a16="http://schemas.microsoft.com/office/drawing/2014/main" id="{C2A047AF-C2AD-4D6D-9822-65ECCC229C83}"/>
               </a:ext>
             </a:extLst>
           </p:cNvPr>
@@ -1917,7 +1917,7 @@
           <p:cNvPr id="4" name="cover-core">
             <a:extLst xmlns:a="http://schemas.openxmlformats.org/drawingml/2006/main">
               <a:ext uri="{FF2B5EF4-FFF2-40B4-BE49-F238E27FC236}">
-                <a16:creationId xmlns:a16="http://schemas.microsoft.com/office/drawing/2014/main" id="{5A8098BE-EB64-47E8-A7C9-8E7A00304AD3}"/>
+                <a16:creationId xmlns:a16="http://schemas.microsoft.com/office/drawing/2014/main" id="{9A6C5996-DCCF-41C1-B43B-42D2A0733B4C}"/>
               </a:ext>
             </a:extLst>
           </p:cNvPr>
@@ -1950,7 +1950,7 @@
           <p:cNvPr id="5" name="cover-line-1">
             <a:extLst xmlns:a="http://schemas.openxmlformats.org/drawingml/2006/main">
               <a:ext uri="{FF2B5EF4-FFF2-40B4-BE49-F238E27FC236}">
-                <a16:creationId xmlns:a16="http://schemas.microsoft.com/office/drawing/2014/main" id="{AC5D2A6A-12E4-44E0-A739-6115C3271570}"/>
+                <a16:creationId xmlns:a16="http://schemas.microsoft.com/office/drawing/2014/main" id="{D8C1D6BE-D587-41C2-B3AB-FAE6D5EE86A7}"/>
               </a:ext>
             </a:extLst>
           </p:cNvPr>
@@ -1981,7 +1981,7 @@
           <p:cNvPr id="6" name="cover-line-2">
             <a:extLst xmlns:a="http://schemas.openxmlformats.org/drawingml/2006/main">
               <a:ext uri="{FF2B5EF4-FFF2-40B4-BE49-F238E27FC236}">
-                <a16:creationId xmlns:a16="http://schemas.microsoft.com/office/drawing/2014/main" id="{808E245C-EDE5-4928-BEDE-B4760BF1DB15}"/>
+                <a16:creationId xmlns:a16="http://schemas.microsoft.com/office/drawing/2014/main" id="{0AC9A469-CBBE-4BD3-9E68-82ED3476A806}"/>
               </a:ext>
             </a:extLst>
           </p:cNvPr>
@@ -2012,7 +2012,7 @@
           <p:cNvPr id="7" name="cover-eyebrow">
             <a:extLst xmlns:a="http://schemas.openxmlformats.org/drawingml/2006/main">
               <a:ext uri="{FF2B5EF4-FFF2-40B4-BE49-F238E27FC236}">
-                <a16:creationId xmlns:a16="http://schemas.microsoft.com/office/drawing/2014/main" id="{A872A28C-27F4-44A2-9573-870CE55CE1A0}"/>
+                <a16:creationId xmlns:a16="http://schemas.microsoft.com/office/drawing/2014/main" id="{4774423E-8764-4145-B810-D280E45B2285}"/>
               </a:ext>
             </a:extLst>
           </p:cNvPr>
@@ -2070,7 +2070,7 @@
           <p:cNvPr id="8" name="cover-title">
             <a:extLst xmlns:a="http://schemas.openxmlformats.org/drawingml/2006/main">
               <a:ext uri="{FF2B5EF4-FFF2-40B4-BE49-F238E27FC236}">
-                <a16:creationId xmlns:a16="http://schemas.microsoft.com/office/drawing/2014/main" id="{FA634CA2-3990-4915-ACF8-F9F1F2185E34}"/>
+                <a16:creationId xmlns:a16="http://schemas.microsoft.com/office/drawing/2014/main" id="{87F016A9-B35A-4EC6-9507-A8BD41031CAF}"/>
               </a:ext>
             </a:extLst>
           </p:cNvPr>
@@ -2128,7 +2128,7 @@
           <p:cNvPr id="9" name="cover-subtitle">
             <a:extLst xmlns:a="http://schemas.openxmlformats.org/drawingml/2006/main">
               <a:ext uri="{FF2B5EF4-FFF2-40B4-BE49-F238E27FC236}">
-                <a16:creationId xmlns:a16="http://schemas.microsoft.com/office/drawing/2014/main" id="{7564D229-0128-40FA-AB64-735E58998DD3}"/>
+                <a16:creationId xmlns:a16="http://schemas.microsoft.com/office/drawing/2014/main" id="{062255AE-0B68-4150-9F06-27C590BBD7B4}"/>
               </a:ext>
             </a:extLst>
           </p:cNvPr>
@@ -2190,7 +2190,7 @@
           <p:cNvPr id="10" name="cover-lead">
             <a:extLst xmlns:a="http://schemas.openxmlformats.org/drawingml/2006/main">
               <a:ext uri="{FF2B5EF4-FFF2-40B4-BE49-F238E27FC236}">
-                <a16:creationId xmlns:a16="http://schemas.microsoft.com/office/drawing/2014/main" id="{2ECAE4E2-7ACD-4817-90F5-6CF26929B971}"/>
+                <a16:creationId xmlns:a16="http://schemas.microsoft.com/office/drawing/2014/main" id="{8FA46B7A-C61F-43E0-8DC5-E803B37B266D}"/>
               </a:ext>
             </a:extLst>
           </p:cNvPr>
@@ -2248,7 +2248,7 @@
           <p:cNvPr id="11" name="cover-course">
             <a:extLst xmlns:a="http://schemas.openxmlformats.org/drawingml/2006/main">
               <a:ext uri="{FF2B5EF4-FFF2-40B4-BE49-F238E27FC236}">
-                <a16:creationId xmlns:a16="http://schemas.microsoft.com/office/drawing/2014/main" id="{8D0A3076-91C8-4A28-AEE5-A1368A70E6F9}"/>
+                <a16:creationId xmlns:a16="http://schemas.microsoft.com/office/drawing/2014/main" id="{93F1D905-2CA3-4F00-A543-5C3D3AC16F8A}"/>
               </a:ext>
             </a:extLst>
           </p:cNvPr>
@@ -2306,7 +2306,7 @@
           <p:cNvPr id="12" name="cover-id">
             <a:extLst xmlns:a="http://schemas.openxmlformats.org/drawingml/2006/main">
               <a:ext uri="{FF2B5EF4-FFF2-40B4-BE49-F238E27FC236}">
-                <a16:creationId xmlns:a16="http://schemas.microsoft.com/office/drawing/2014/main" id="{9E768B93-B73A-4A04-B6DC-D6EF7258EA2F}"/>
+                <a16:creationId xmlns:a16="http://schemas.microsoft.com/office/drawing/2014/main" id="{496A2B92-85D5-44F9-A084-EEA699A8E49E}"/>
               </a:ext>
             </a:extLst>
           </p:cNvPr>
@@ -2362,7 +2362,7 @@
     </p:spTree>
     <p:extLst>
       <p:ext uri="{BB962C8B-B14F-4D97-AF65-F5344CB8AC3E}">
-        <p14:creationId xmlns:p14="http://schemas.microsoft.com/office/powerpoint/2010/main" val="199298483"/>
+        <p14:creationId xmlns:p14="http://schemas.microsoft.com/office/powerpoint/2010/main" val="587671619"/>
       </p:ext>
     </p:extLst>
   </p:cSld>
@@ -2393,7 +2393,7 @@
           <p:cNvPr id="1" name="s10-rule">
             <a:extLst xmlns:a="http://schemas.openxmlformats.org/drawingml/2006/main">
               <a:ext uri="{FF2B5EF4-FFF2-40B4-BE49-F238E27FC236}">
-                <a16:creationId xmlns:a16="http://schemas.microsoft.com/office/drawing/2014/main" id="{75FFB556-371E-434A-9212-D80C2C74BF3A}"/>
+                <a16:creationId xmlns:a16="http://schemas.microsoft.com/office/drawing/2014/main" id="{04255118-A8AE-4008-9929-26455E013B2B}"/>
               </a:ext>
             </a:extLst>
           </p:cNvPr>
@@ -2426,7 +2426,7 @@
           <p:cNvPr id="2" name="s10-eyebrow">
             <a:extLst xmlns:a="http://schemas.openxmlformats.org/drawingml/2006/main">
               <a:ext uri="{FF2B5EF4-FFF2-40B4-BE49-F238E27FC236}">
-                <a16:creationId xmlns:a16="http://schemas.microsoft.com/office/drawing/2014/main" id="{1C1AFB59-0E73-48BC-BBBF-EE93E67EA586}"/>
+                <a16:creationId xmlns:a16="http://schemas.microsoft.com/office/drawing/2014/main" id="{E9628935-C1E2-48F0-9DE5-D0F73D36849F}"/>
               </a:ext>
             </a:extLst>
           </p:cNvPr>
@@ -2484,7 +2484,7 @@
           <p:cNvPr id="3" name="s10-title">
             <a:extLst xmlns:a="http://schemas.openxmlformats.org/drawingml/2006/main">
               <a:ext uri="{FF2B5EF4-FFF2-40B4-BE49-F238E27FC236}">
-                <a16:creationId xmlns:a16="http://schemas.microsoft.com/office/drawing/2014/main" id="{A2D3D88A-0584-483B-AD43-614DDD90692B}"/>
+                <a16:creationId xmlns:a16="http://schemas.microsoft.com/office/drawing/2014/main" id="{A32C0E23-F625-411A-9E49-7CACD9E76D31}"/>
               </a:ext>
             </a:extLst>
           </p:cNvPr>
@@ -2542,7 +2542,7 @@
           <p:cNvPr id="4" name="s10-footer">
             <a:extLst xmlns:a="http://schemas.openxmlformats.org/drawingml/2006/main">
               <a:ext uri="{FF2B5EF4-FFF2-40B4-BE49-F238E27FC236}">
-                <a16:creationId xmlns:a16="http://schemas.microsoft.com/office/drawing/2014/main" id="{683C549B-3C26-4729-A99C-A5E867B06B6E}"/>
+                <a16:creationId xmlns:a16="http://schemas.microsoft.com/office/drawing/2014/main" id="{05D1DE17-FE86-42EF-A788-AFA213AF871A}"/>
               </a:ext>
             </a:extLst>
           </p:cNvPr>
@@ -2573,7 +2573,7 @@
           <p:cNvPr id="5" name="s10-identity">
             <a:extLst xmlns:a="http://schemas.openxmlformats.org/drawingml/2006/main">
               <a:ext uri="{FF2B5EF4-FFF2-40B4-BE49-F238E27FC236}">
-                <a16:creationId xmlns:a16="http://schemas.microsoft.com/office/drawing/2014/main" id="{6D721EB2-6680-408E-AF4E-0C3DD6DF6E43}"/>
+                <a16:creationId xmlns:a16="http://schemas.microsoft.com/office/drawing/2014/main" id="{B657533C-9485-4DD4-BDA5-4D52AE8AA9AC}"/>
               </a:ext>
             </a:extLst>
           </p:cNvPr>
@@ -2631,7 +2631,7 @@
           <p:cNvPr id="6" name="recap-circle-0">
             <a:extLst xmlns:a="http://schemas.openxmlformats.org/drawingml/2006/main">
               <a:ext uri="{FF2B5EF4-FFF2-40B4-BE49-F238E27FC236}">
-                <a16:creationId xmlns:a16="http://schemas.microsoft.com/office/drawing/2014/main" id="{C1CAAAA2-1243-44A4-98AF-F73529ED087C}"/>
+                <a16:creationId xmlns:a16="http://schemas.microsoft.com/office/drawing/2014/main" id="{62E9CA11-4931-4600-B2DD-47610CCBC2DD}"/>
               </a:ext>
             </a:extLst>
           </p:cNvPr>
@@ -2664,7 +2664,7 @@
           <p:cNvPr id="7" name="recap-number-0">
             <a:extLst xmlns:a="http://schemas.openxmlformats.org/drawingml/2006/main">
               <a:ext uri="{FF2B5EF4-FFF2-40B4-BE49-F238E27FC236}">
-                <a16:creationId xmlns:a16="http://schemas.microsoft.com/office/drawing/2014/main" id="{C08606FD-1C38-4A65-A3E0-3BA284222D3A}"/>
+                <a16:creationId xmlns:a16="http://schemas.microsoft.com/office/drawing/2014/main" id="{4609B029-8FCD-42C3-AACD-4645BBEF3F12}"/>
               </a:ext>
             </a:extLst>
           </p:cNvPr>
@@ -2722,7 +2722,7 @@
           <p:cNvPr id="8" name="recap-item-0">
             <a:extLst xmlns:a="http://schemas.openxmlformats.org/drawingml/2006/main">
               <a:ext uri="{FF2B5EF4-FFF2-40B4-BE49-F238E27FC236}">
-                <a16:creationId xmlns:a16="http://schemas.microsoft.com/office/drawing/2014/main" id="{87EC06C7-9C4A-4FC4-BFB6-AD973A36067D}"/>
+                <a16:creationId xmlns:a16="http://schemas.microsoft.com/office/drawing/2014/main" id="{CAF69229-BEBE-43F4-B434-2033851817BE}"/>
               </a:ext>
             </a:extLst>
           </p:cNvPr>
@@ -2786,7 +2786,7 @@
           <p:cNvPr id="9" name="recap-connector-0">
             <a:extLst xmlns:a="http://schemas.openxmlformats.org/drawingml/2006/main">
               <a:ext uri="{FF2B5EF4-FFF2-40B4-BE49-F238E27FC236}">
-                <a16:creationId xmlns:a16="http://schemas.microsoft.com/office/drawing/2014/main" id="{1370E1E1-C569-4A39-AB07-414CC29B8E71}"/>
+                <a16:creationId xmlns:a16="http://schemas.microsoft.com/office/drawing/2014/main" id="{9979044A-A442-4710-893A-C37090D32CD2}"/>
               </a:ext>
             </a:extLst>
           </p:cNvPr>
@@ -2817,7 +2817,7 @@
           <p:cNvPr id="10" name="recap-circle-1">
             <a:extLst xmlns:a="http://schemas.openxmlformats.org/drawingml/2006/main">
               <a:ext uri="{FF2B5EF4-FFF2-40B4-BE49-F238E27FC236}">
-                <a16:creationId xmlns:a16="http://schemas.microsoft.com/office/drawing/2014/main" id="{0F588BBE-0F56-4B63-99F6-A32D94D54CC4}"/>
+                <a16:creationId xmlns:a16="http://schemas.microsoft.com/office/drawing/2014/main" id="{CF748DDC-CB14-4073-9570-7B48ACD9D217}"/>
               </a:ext>
             </a:extLst>
           </p:cNvPr>
@@ -2850,7 +2850,7 @@
           <p:cNvPr id="11" name="recap-number-1">
             <a:extLst xmlns:a="http://schemas.openxmlformats.org/drawingml/2006/main">
               <a:ext uri="{FF2B5EF4-FFF2-40B4-BE49-F238E27FC236}">
-                <a16:creationId xmlns:a16="http://schemas.microsoft.com/office/drawing/2014/main" id="{690046C8-8B73-4202-8719-6132B499CDED}"/>
+                <a16:creationId xmlns:a16="http://schemas.microsoft.com/office/drawing/2014/main" id="{42CF9643-8048-4CE7-BC50-BC463D612E6C}"/>
               </a:ext>
             </a:extLst>
           </p:cNvPr>
@@ -2908,7 +2908,7 @@
           <p:cNvPr id="12" name="recap-item-1">
             <a:extLst xmlns:a="http://schemas.openxmlformats.org/drawingml/2006/main">
               <a:ext uri="{FF2B5EF4-FFF2-40B4-BE49-F238E27FC236}">
-                <a16:creationId xmlns:a16="http://schemas.microsoft.com/office/drawing/2014/main" id="{C91B9C31-01BB-48E5-9FFD-117D0433CCF5}"/>
+                <a16:creationId xmlns:a16="http://schemas.microsoft.com/office/drawing/2014/main" id="{F8CB47E9-F8B4-40A3-9367-50F6FA7588DB}"/>
               </a:ext>
             </a:extLst>
           </p:cNvPr>
@@ -2972,7 +2972,7 @@
           <p:cNvPr id="13" name="recap-connector-1">
             <a:extLst xmlns:a="http://schemas.openxmlformats.org/drawingml/2006/main">
               <a:ext uri="{FF2B5EF4-FFF2-40B4-BE49-F238E27FC236}">
-                <a16:creationId xmlns:a16="http://schemas.microsoft.com/office/drawing/2014/main" id="{B49209BA-083B-4D8F-924A-547EBB6F17F8}"/>
+                <a16:creationId xmlns:a16="http://schemas.microsoft.com/office/drawing/2014/main" id="{5628C367-1B3F-4234-A68A-CAAA6152617F}"/>
               </a:ext>
             </a:extLst>
           </p:cNvPr>
@@ -3003,7 +3003,7 @@
           <p:cNvPr id="14" name="recap-circle-2">
             <a:extLst xmlns:a="http://schemas.openxmlformats.org/drawingml/2006/main">
               <a:ext uri="{FF2B5EF4-FFF2-40B4-BE49-F238E27FC236}">
-                <a16:creationId xmlns:a16="http://schemas.microsoft.com/office/drawing/2014/main" id="{2B4C3F3F-BD66-43E2-A9B5-74E9E7375C08}"/>
+                <a16:creationId xmlns:a16="http://schemas.microsoft.com/office/drawing/2014/main" id="{B7F8F29E-1FB1-4DEB-BF18-B53B84ACA707}"/>
               </a:ext>
             </a:extLst>
           </p:cNvPr>
@@ -3036,7 +3036,7 @@
           <p:cNvPr id="15" name="recap-number-2">
             <a:extLst xmlns:a="http://schemas.openxmlformats.org/drawingml/2006/main">
               <a:ext uri="{FF2B5EF4-FFF2-40B4-BE49-F238E27FC236}">
-                <a16:creationId xmlns:a16="http://schemas.microsoft.com/office/drawing/2014/main" id="{615A8056-337E-4416-89CC-60E0DFBDBDC3}"/>
+                <a16:creationId xmlns:a16="http://schemas.microsoft.com/office/drawing/2014/main" id="{0202AC4D-0C94-4BDE-9EC9-17EEF960652E}"/>
               </a:ext>
             </a:extLst>
           </p:cNvPr>
@@ -3094,7 +3094,7 @@
           <p:cNvPr id="16" name="recap-item-2">
             <a:extLst xmlns:a="http://schemas.openxmlformats.org/drawingml/2006/main">
               <a:ext uri="{FF2B5EF4-FFF2-40B4-BE49-F238E27FC236}">
-                <a16:creationId xmlns:a16="http://schemas.microsoft.com/office/drawing/2014/main" id="{4D81F751-E089-4DDF-A034-46482442BB20}"/>
+                <a16:creationId xmlns:a16="http://schemas.microsoft.com/office/drawing/2014/main" id="{DBB2794F-051D-4933-A5B8-210A3F962FE3}"/>
               </a:ext>
             </a:extLst>
           </p:cNvPr>
@@ -3156,7 +3156,7 @@
     </p:spTree>
     <p:extLst>
       <p:ext uri="{BB962C8B-B14F-4D97-AF65-F5344CB8AC3E}">
-        <p14:creationId xmlns:p14="http://schemas.microsoft.com/office/powerpoint/2010/main" val="1263116508"/>
+        <p14:creationId xmlns:p14="http://schemas.microsoft.com/office/powerpoint/2010/main" val="291024767"/>
       </p:ext>
     </p:extLst>
   </p:cSld>
@@ -3187,7 +3187,7 @@
           <p:cNvPr id="1" name="s11-rule">
             <a:extLst xmlns:a="http://schemas.openxmlformats.org/drawingml/2006/main">
               <a:ext uri="{FF2B5EF4-FFF2-40B4-BE49-F238E27FC236}">
-                <a16:creationId xmlns:a16="http://schemas.microsoft.com/office/drawing/2014/main" id="{067D90E6-FAD1-48DB-B940-5DC73F5AF267}"/>
+                <a16:creationId xmlns:a16="http://schemas.microsoft.com/office/drawing/2014/main" id="{72946826-C9EC-468A-B6DF-50ACA8BC854F}"/>
               </a:ext>
             </a:extLst>
           </p:cNvPr>
@@ -3220,7 +3220,7 @@
           <p:cNvPr id="2" name="s11-eyebrow">
             <a:extLst xmlns:a="http://schemas.openxmlformats.org/drawingml/2006/main">
               <a:ext uri="{FF2B5EF4-FFF2-40B4-BE49-F238E27FC236}">
-                <a16:creationId xmlns:a16="http://schemas.microsoft.com/office/drawing/2014/main" id="{0E656E1B-34EF-46CA-BF59-B6B9AAEA4ECF}"/>
+                <a16:creationId xmlns:a16="http://schemas.microsoft.com/office/drawing/2014/main" id="{AFFE1E97-9998-4366-AA8A-2E1520741A7C}"/>
               </a:ext>
             </a:extLst>
           </p:cNvPr>
@@ -3278,7 +3278,7 @@
           <p:cNvPr id="3" name="s11-title">
             <a:extLst xmlns:a="http://schemas.openxmlformats.org/drawingml/2006/main">
               <a:ext uri="{FF2B5EF4-FFF2-40B4-BE49-F238E27FC236}">
-                <a16:creationId xmlns:a16="http://schemas.microsoft.com/office/drawing/2014/main" id="{438A14B2-E985-45B5-A445-D8AE4EC11C86}"/>
+                <a16:creationId xmlns:a16="http://schemas.microsoft.com/office/drawing/2014/main" id="{F40F393C-BEA8-4DA5-A252-DFA3A3211D02}"/>
               </a:ext>
             </a:extLst>
           </p:cNvPr>
@@ -3336,7 +3336,7 @@
           <p:cNvPr id="4" name="s11-footer">
             <a:extLst xmlns:a="http://schemas.openxmlformats.org/drawingml/2006/main">
               <a:ext uri="{FF2B5EF4-FFF2-40B4-BE49-F238E27FC236}">
-                <a16:creationId xmlns:a16="http://schemas.microsoft.com/office/drawing/2014/main" id="{1F01713F-7ACF-491F-8F30-928B7DD481C9}"/>
+                <a16:creationId xmlns:a16="http://schemas.microsoft.com/office/drawing/2014/main" id="{8D841CF8-3A1F-4892-B260-9AB74C3BF567}"/>
               </a:ext>
             </a:extLst>
           </p:cNvPr>
@@ -3367,7 +3367,7 @@
           <p:cNvPr id="5" name="s11-identity">
             <a:extLst xmlns:a="http://schemas.openxmlformats.org/drawingml/2006/main">
               <a:ext uri="{FF2B5EF4-FFF2-40B4-BE49-F238E27FC236}">
-                <a16:creationId xmlns:a16="http://schemas.microsoft.com/office/drawing/2014/main" id="{9AEC796D-5C49-4CED-8737-E8C05DA44975}"/>
+                <a16:creationId xmlns:a16="http://schemas.microsoft.com/office/drawing/2014/main" id="{5E187305-9917-43E6-9241-4CBCAF2DA33E}"/>
               </a:ext>
             </a:extLst>
           </p:cNvPr>
@@ -3425,7 +3425,7 @@
           <p:cNvPr id="6" name="source-0">
             <a:extLst xmlns:a="http://schemas.openxmlformats.org/drawingml/2006/main">
               <a:ext uri="{FF2B5EF4-FFF2-40B4-BE49-F238E27FC236}">
-                <a16:creationId xmlns:a16="http://schemas.microsoft.com/office/drawing/2014/main" id="{A652F829-F9BA-40A3-BF08-BFB41069C2B9}"/>
+                <a16:creationId xmlns:a16="http://schemas.microsoft.com/office/drawing/2014/main" id="{E331FDE0-0C2C-4851-8DFE-32250BF41FFE}"/>
               </a:ext>
             </a:extLst>
           </p:cNvPr>
@@ -3489,7 +3489,7 @@
           <p:cNvPr id="7" name="source-1">
             <a:extLst xmlns:a="http://schemas.openxmlformats.org/drawingml/2006/main">
               <a:ext uri="{FF2B5EF4-FFF2-40B4-BE49-F238E27FC236}">
-                <a16:creationId xmlns:a16="http://schemas.microsoft.com/office/drawing/2014/main" id="{E1DE0BC5-982D-440C-8785-3BD9C6FEF236}"/>
+                <a16:creationId xmlns:a16="http://schemas.microsoft.com/office/drawing/2014/main" id="{7B9E3829-F685-4C4A-9F6F-C529CDE3D8A3}"/>
               </a:ext>
             </a:extLst>
           </p:cNvPr>
@@ -3553,7 +3553,7 @@
           <p:cNvPr id="8" name="source-2">
             <a:extLst xmlns:a="http://schemas.openxmlformats.org/drawingml/2006/main">
               <a:ext uri="{FF2B5EF4-FFF2-40B4-BE49-F238E27FC236}">
-                <a16:creationId xmlns:a16="http://schemas.microsoft.com/office/drawing/2014/main" id="{3074BDD1-9F1A-4E73-85AF-D51C56C33573}"/>
+                <a16:creationId xmlns:a16="http://schemas.microsoft.com/office/drawing/2014/main" id="{BC3591AD-45DD-4D4B-89F9-E9CCAB07C5DC}"/>
               </a:ext>
             </a:extLst>
           </p:cNvPr>
@@ -3617,7 +3617,7 @@
           <p:cNvPr id="9" name="source-3">
             <a:extLst xmlns:a="http://schemas.openxmlformats.org/drawingml/2006/main">
               <a:ext uri="{FF2B5EF4-FFF2-40B4-BE49-F238E27FC236}">
-                <a16:creationId xmlns:a16="http://schemas.microsoft.com/office/drawing/2014/main" id="{5DA547C0-6652-4836-8795-7A3F5A2447AB}"/>
+                <a16:creationId xmlns:a16="http://schemas.microsoft.com/office/drawing/2014/main" id="{79147ADD-B62E-4CF5-B8F7-AD39875CE2E2}"/>
               </a:ext>
             </a:extLst>
           </p:cNvPr>
@@ -3681,7 +3681,7 @@
           <p:cNvPr id="10" name="source-4">
             <a:extLst xmlns:a="http://schemas.openxmlformats.org/drawingml/2006/main">
               <a:ext uri="{FF2B5EF4-FFF2-40B4-BE49-F238E27FC236}">
-                <a16:creationId xmlns:a16="http://schemas.microsoft.com/office/drawing/2014/main" id="{6DC944FD-1039-4A69-8014-15B146DF0CF1}"/>
+                <a16:creationId xmlns:a16="http://schemas.microsoft.com/office/drawing/2014/main" id="{1E8394E9-1827-475E-81EA-E6208C139116}"/>
               </a:ext>
             </a:extLst>
           </p:cNvPr>
@@ -3745,7 +3745,7 @@
           <p:cNvPr id="11" name="s11-takeaway-rule">
             <a:extLst xmlns:a="http://schemas.openxmlformats.org/drawingml/2006/main">
               <a:ext uri="{FF2B5EF4-FFF2-40B4-BE49-F238E27FC236}">
-                <a16:creationId xmlns:a16="http://schemas.microsoft.com/office/drawing/2014/main" id="{7DC8AE91-41BB-4031-9F36-5553BDADA1D0}"/>
+                <a16:creationId xmlns:a16="http://schemas.microsoft.com/office/drawing/2014/main" id="{91DA0355-F575-4F3C-B4AA-2D818EA73459}"/>
               </a:ext>
             </a:extLst>
           </p:cNvPr>
@@ -3778,7 +3778,7 @@
           <p:cNvPr id="12" name="s11-takeaway">
             <a:extLst xmlns:a="http://schemas.openxmlformats.org/drawingml/2006/main">
               <a:ext uri="{FF2B5EF4-FFF2-40B4-BE49-F238E27FC236}">
-                <a16:creationId xmlns:a16="http://schemas.microsoft.com/office/drawing/2014/main" id="{FCF02E2E-0FDC-430D-9DD3-6AFCC6FBA70D}"/>
+                <a16:creationId xmlns:a16="http://schemas.microsoft.com/office/drawing/2014/main" id="{1CAC8F0C-8043-4049-88C3-4FF0630D1BE7}"/>
               </a:ext>
             </a:extLst>
           </p:cNvPr>
@@ -3803,7 +3803,7 @@
         </p:spPr>
         <p:txBody>
           <a:bodyPr xmlns:a="http://schemas.openxmlformats.org/drawingml/2006/main" lIns="0" tIns="0" rIns="0" bIns="0" anchor="ctr">
-            <a:normAutofit fontScale="100000"/>
+            <a:normAutofit fontScale="95911"/>
           </a:bodyPr>
           <a:lstStyle xmlns:a="http://schemas.openxmlformats.org/drawingml/2006/main"/>
           <a:p xmlns:a="http://schemas.openxmlformats.org/drawingml/2006/main">
@@ -3826,7 +3826,7 @@
                 <a:ea typeface="PingFang SC"/>
                 <a:cs typeface="PingFang SC"/>
               </a:rPr>
-              <a:t>公开幻灯片只使用课程原创文字与原生图形；完整论证、链接和事实边界请见本节讲义。</a:t>
+              <a:t>课程精编页用于讲授主线；播放器中的“原课件”模式保留团队 PowerPoint 精选页、真实图片和可播放视频。</a:t>
             </a:r>
           </a:p>
         </p:txBody>
@@ -3834,7 +3834,7 @@
     </p:spTree>
     <p:extLst>
       <p:ext uri="{BB962C8B-B14F-4D97-AF65-F5344CB8AC3E}">
-        <p14:creationId xmlns:p14="http://schemas.microsoft.com/office/powerpoint/2010/main" val="1929352391"/>
+        <p14:creationId xmlns:p14="http://schemas.microsoft.com/office/powerpoint/2010/main" val="1042841013"/>
       </p:ext>
     </p:extLst>
   </p:cSld>
@@ -3865,7 +3865,7 @@
           <p:cNvPr id="1" name="s2-rule">
             <a:extLst xmlns:a="http://schemas.openxmlformats.org/drawingml/2006/main">
               <a:ext uri="{FF2B5EF4-FFF2-40B4-BE49-F238E27FC236}">
-                <a16:creationId xmlns:a16="http://schemas.microsoft.com/office/drawing/2014/main" id="{D75E64FB-31DB-4DCE-BA00-3124C724BD4B}"/>
+                <a16:creationId xmlns:a16="http://schemas.microsoft.com/office/drawing/2014/main" id="{3DC37798-4BFE-46C1-A534-0FC6FC1BC97E}"/>
               </a:ext>
             </a:extLst>
           </p:cNvPr>
@@ -3898,7 +3898,7 @@
           <p:cNvPr id="2" name="s2-eyebrow">
             <a:extLst xmlns:a="http://schemas.openxmlformats.org/drawingml/2006/main">
               <a:ext uri="{FF2B5EF4-FFF2-40B4-BE49-F238E27FC236}">
-                <a16:creationId xmlns:a16="http://schemas.microsoft.com/office/drawing/2014/main" id="{8F332F3D-1011-4F1E-A413-C2FC09530831}"/>
+                <a16:creationId xmlns:a16="http://schemas.microsoft.com/office/drawing/2014/main" id="{0F15031A-9130-4378-A584-131920F73A94}"/>
               </a:ext>
             </a:extLst>
           </p:cNvPr>
@@ -3956,7 +3956,7 @@
           <p:cNvPr id="3" name="s2-title">
             <a:extLst xmlns:a="http://schemas.openxmlformats.org/drawingml/2006/main">
               <a:ext uri="{FF2B5EF4-FFF2-40B4-BE49-F238E27FC236}">
-                <a16:creationId xmlns:a16="http://schemas.microsoft.com/office/drawing/2014/main" id="{9108E648-EB75-4941-933D-6EE5FC7FE605}"/>
+                <a16:creationId xmlns:a16="http://schemas.microsoft.com/office/drawing/2014/main" id="{31856D9B-EF36-4EDF-99B9-BE2F44299AE6}"/>
               </a:ext>
             </a:extLst>
           </p:cNvPr>
@@ -4014,7 +4014,7 @@
           <p:cNvPr id="4" name="s2-footer">
             <a:extLst xmlns:a="http://schemas.openxmlformats.org/drawingml/2006/main">
               <a:ext uri="{FF2B5EF4-FFF2-40B4-BE49-F238E27FC236}">
-                <a16:creationId xmlns:a16="http://schemas.microsoft.com/office/drawing/2014/main" id="{739809D3-2257-4036-846C-2F201F4543E6}"/>
+                <a16:creationId xmlns:a16="http://schemas.microsoft.com/office/drawing/2014/main" id="{BE7F1330-D559-44F5-8382-59081C71EA51}"/>
               </a:ext>
             </a:extLst>
           </p:cNvPr>
@@ -4045,7 +4045,7 @@
           <p:cNvPr id="5" name="s2-identity">
             <a:extLst xmlns:a="http://schemas.openxmlformats.org/drawingml/2006/main">
               <a:ext uri="{FF2B5EF4-FFF2-40B4-BE49-F238E27FC236}">
-                <a16:creationId xmlns:a16="http://schemas.microsoft.com/office/drawing/2014/main" id="{8C312B4E-4C88-41FC-9AD6-346F691323A4}"/>
+                <a16:creationId xmlns:a16="http://schemas.microsoft.com/office/drawing/2014/main" id="{DA833169-729E-412D-8361-425C2DF1ABE2}"/>
               </a:ext>
             </a:extLst>
           </p:cNvPr>
@@ -4103,7 +4103,7 @@
           <p:cNvPr id="6" name="objective-1">
             <a:extLst xmlns:a="http://schemas.openxmlformats.org/drawingml/2006/main">
               <a:ext uri="{FF2B5EF4-FFF2-40B4-BE49-F238E27FC236}">
-                <a16:creationId xmlns:a16="http://schemas.microsoft.com/office/drawing/2014/main" id="{F30BCDEA-41FA-406D-8AE1-044D79E94E09}"/>
+                <a16:creationId xmlns:a16="http://schemas.microsoft.com/office/drawing/2014/main" id="{FEF47824-298E-4F20-8FC7-B37729C9D819}"/>
               </a:ext>
             </a:extLst>
           </p:cNvPr>
@@ -4190,7 +4190,7 @@
           <p:cNvPr id="7" name="objective-2">
             <a:extLst xmlns:a="http://schemas.openxmlformats.org/drawingml/2006/main">
               <a:ext uri="{FF2B5EF4-FFF2-40B4-BE49-F238E27FC236}">
-                <a16:creationId xmlns:a16="http://schemas.microsoft.com/office/drawing/2014/main" id="{EBD8CA39-FF82-442A-8510-53EE9F0AFAC5}"/>
+                <a16:creationId xmlns:a16="http://schemas.microsoft.com/office/drawing/2014/main" id="{EE252BB8-D3FB-49DE-AAA0-FDADFB46C506}"/>
               </a:ext>
             </a:extLst>
           </p:cNvPr>
@@ -4275,7 +4275,7 @@
     </p:spTree>
     <p:extLst>
       <p:ext uri="{BB962C8B-B14F-4D97-AF65-F5344CB8AC3E}">
-        <p14:creationId xmlns:p14="http://schemas.microsoft.com/office/powerpoint/2010/main" val="434139197"/>
+        <p14:creationId xmlns:p14="http://schemas.microsoft.com/office/powerpoint/2010/main" val="2111565392"/>
       </p:ext>
     </p:extLst>
   </p:cSld>
@@ -4306,7 +4306,7 @@
           <p:cNvPr id="1" name="s3-rule">
             <a:extLst xmlns:a="http://schemas.openxmlformats.org/drawingml/2006/main">
               <a:ext uri="{FF2B5EF4-FFF2-40B4-BE49-F238E27FC236}">
-                <a16:creationId xmlns:a16="http://schemas.microsoft.com/office/drawing/2014/main" id="{A8E3DE80-8DB8-405A-847F-49E6157D4092}"/>
+                <a16:creationId xmlns:a16="http://schemas.microsoft.com/office/drawing/2014/main" id="{EFCBE9A1-37CE-48DA-B78E-D3F245B12A02}"/>
               </a:ext>
             </a:extLst>
           </p:cNvPr>
@@ -4339,7 +4339,7 @@
           <p:cNvPr id="2" name="s3-eyebrow">
             <a:extLst xmlns:a="http://schemas.openxmlformats.org/drawingml/2006/main">
               <a:ext uri="{FF2B5EF4-FFF2-40B4-BE49-F238E27FC236}">
-                <a16:creationId xmlns:a16="http://schemas.microsoft.com/office/drawing/2014/main" id="{BA2FA8E9-C6DD-4279-9D80-831DB8E1534B}"/>
+                <a16:creationId xmlns:a16="http://schemas.microsoft.com/office/drawing/2014/main" id="{10073A4B-161B-4EFD-AE1A-818863761DD4}"/>
               </a:ext>
             </a:extLst>
           </p:cNvPr>
@@ -4397,7 +4397,7 @@
           <p:cNvPr id="3" name="s3-title">
             <a:extLst xmlns:a="http://schemas.openxmlformats.org/drawingml/2006/main">
               <a:ext uri="{FF2B5EF4-FFF2-40B4-BE49-F238E27FC236}">
-                <a16:creationId xmlns:a16="http://schemas.microsoft.com/office/drawing/2014/main" id="{9057772C-F2D7-4851-A0F7-C24EF48B87F2}"/>
+                <a16:creationId xmlns:a16="http://schemas.microsoft.com/office/drawing/2014/main" id="{EBF9076B-3464-4B47-870D-EE7474CB5F2F}"/>
               </a:ext>
             </a:extLst>
           </p:cNvPr>
@@ -4455,7 +4455,7 @@
           <p:cNvPr id="4" name="s3-footer">
             <a:extLst xmlns:a="http://schemas.openxmlformats.org/drawingml/2006/main">
               <a:ext uri="{FF2B5EF4-FFF2-40B4-BE49-F238E27FC236}">
-                <a16:creationId xmlns:a16="http://schemas.microsoft.com/office/drawing/2014/main" id="{D29836CD-D404-444A-A764-888829BCE8DA}"/>
+                <a16:creationId xmlns:a16="http://schemas.microsoft.com/office/drawing/2014/main" id="{F339884A-5FAD-4C80-A372-AF7240E369C6}"/>
               </a:ext>
             </a:extLst>
           </p:cNvPr>
@@ -4486,7 +4486,7 @@
           <p:cNvPr id="5" name="s3-identity">
             <a:extLst xmlns:a="http://schemas.openxmlformats.org/drawingml/2006/main">
               <a:ext uri="{FF2B5EF4-FFF2-40B4-BE49-F238E27FC236}">
-                <a16:creationId xmlns:a16="http://schemas.microsoft.com/office/drawing/2014/main" id="{9064D1F7-E4AA-46B0-AA2D-DC413C66C4CA}"/>
+                <a16:creationId xmlns:a16="http://schemas.microsoft.com/office/drawing/2014/main" id="{EE6C62B2-0F9E-4495-9D08-B226EE21E280}"/>
               </a:ext>
             </a:extLst>
           </p:cNvPr>
@@ -4544,7 +4544,7 @@
           <p:cNvPr id="6" name="core-no-0">
             <a:extLst xmlns:a="http://schemas.openxmlformats.org/drawingml/2006/main">
               <a:ext uri="{FF2B5EF4-FFF2-40B4-BE49-F238E27FC236}">
-                <a16:creationId xmlns:a16="http://schemas.microsoft.com/office/drawing/2014/main" id="{2DE5738A-1CDA-43BF-80CB-27921ABA1F56}"/>
+                <a16:creationId xmlns:a16="http://schemas.microsoft.com/office/drawing/2014/main" id="{6BF18FC5-AF67-4E3A-9F08-4C4B8DF4572B}"/>
               </a:ext>
             </a:extLst>
           </p:cNvPr>
@@ -4602,7 +4602,7 @@
           <p:cNvPr id="7" name="core-label-0">
             <a:extLst xmlns:a="http://schemas.openxmlformats.org/drawingml/2006/main">
               <a:ext uri="{FF2B5EF4-FFF2-40B4-BE49-F238E27FC236}">
-                <a16:creationId xmlns:a16="http://schemas.microsoft.com/office/drawing/2014/main" id="{894C7CD5-0AE8-4BB0-9AAD-E333FFFB999D}"/>
+                <a16:creationId xmlns:a16="http://schemas.microsoft.com/office/drawing/2014/main" id="{89AD3106-1A01-427B-ABA7-0500C7540B24}"/>
               </a:ext>
             </a:extLst>
           </p:cNvPr>
@@ -4660,7 +4660,7 @@
           <p:cNvPr id="8" name="core-body-0">
             <a:extLst xmlns:a="http://schemas.openxmlformats.org/drawingml/2006/main">
               <a:ext uri="{FF2B5EF4-FFF2-40B4-BE49-F238E27FC236}">
-                <a16:creationId xmlns:a16="http://schemas.microsoft.com/office/drawing/2014/main" id="{066FF5A4-6890-45B7-B9E4-049E80AC0EFC}"/>
+                <a16:creationId xmlns:a16="http://schemas.microsoft.com/office/drawing/2014/main" id="{981DF7E0-9307-47E3-A02A-1EFD7047DBB4}"/>
               </a:ext>
             </a:extLst>
           </p:cNvPr>
@@ -4724,7 +4724,7 @@
           <p:cNvPr id="9" name="core-no-1">
             <a:extLst xmlns:a="http://schemas.openxmlformats.org/drawingml/2006/main">
               <a:ext uri="{FF2B5EF4-FFF2-40B4-BE49-F238E27FC236}">
-                <a16:creationId xmlns:a16="http://schemas.microsoft.com/office/drawing/2014/main" id="{CC5BFF76-AAD1-4296-87D1-5B45B42E200C}"/>
+                <a16:creationId xmlns:a16="http://schemas.microsoft.com/office/drawing/2014/main" id="{4B976CB8-B619-4798-962D-BEA254D2C9CD}"/>
               </a:ext>
             </a:extLst>
           </p:cNvPr>
@@ -4782,7 +4782,7 @@
           <p:cNvPr id="10" name="core-body-1">
             <a:extLst xmlns:a="http://schemas.openxmlformats.org/drawingml/2006/main">
               <a:ext uri="{FF2B5EF4-FFF2-40B4-BE49-F238E27FC236}">
-                <a16:creationId xmlns:a16="http://schemas.microsoft.com/office/drawing/2014/main" id="{0EB645A1-1C7E-470A-A53C-2E91213F965E}"/>
+                <a16:creationId xmlns:a16="http://schemas.microsoft.com/office/drawing/2014/main" id="{175F6CBE-6B3A-46C2-8D05-1E0CFB1CB511}"/>
               </a:ext>
             </a:extLst>
           </p:cNvPr>
@@ -4846,7 +4846,7 @@
           <p:cNvPr id="11" name="s3-takeaway-rule">
             <a:extLst xmlns:a="http://schemas.openxmlformats.org/drawingml/2006/main">
               <a:ext uri="{FF2B5EF4-FFF2-40B4-BE49-F238E27FC236}">
-                <a16:creationId xmlns:a16="http://schemas.microsoft.com/office/drawing/2014/main" id="{766ACA15-6088-41F1-8EE9-DAFAE4CC920C}"/>
+                <a16:creationId xmlns:a16="http://schemas.microsoft.com/office/drawing/2014/main" id="{D99BC7A6-1299-48B9-9B99-465987ABAFD1}"/>
               </a:ext>
             </a:extLst>
           </p:cNvPr>
@@ -4879,7 +4879,7 @@
           <p:cNvPr id="12" name="s3-takeaway">
             <a:extLst xmlns:a="http://schemas.openxmlformats.org/drawingml/2006/main">
               <a:ext uri="{FF2B5EF4-FFF2-40B4-BE49-F238E27FC236}">
-                <a16:creationId xmlns:a16="http://schemas.microsoft.com/office/drawing/2014/main" id="{8DEE3534-4F79-4426-A20B-F0277127CA3B}"/>
+                <a16:creationId xmlns:a16="http://schemas.microsoft.com/office/drawing/2014/main" id="{C6680CBA-6EC4-44F2-8585-55A53253EC65}"/>
               </a:ext>
             </a:extLst>
           </p:cNvPr>
@@ -4935,7 +4935,7 @@
     </p:spTree>
     <p:extLst>
       <p:ext uri="{BB962C8B-B14F-4D97-AF65-F5344CB8AC3E}">
-        <p14:creationId xmlns:p14="http://schemas.microsoft.com/office/powerpoint/2010/main" val="1421004169"/>
+        <p14:creationId xmlns:p14="http://schemas.microsoft.com/office/powerpoint/2010/main" val="487466116"/>
       </p:ext>
     </p:extLst>
   </p:cSld>
@@ -4966,7 +4966,7 @@
           <p:cNvPr id="1" name="s4-rule">
             <a:extLst xmlns:a="http://schemas.openxmlformats.org/drawingml/2006/main">
               <a:ext uri="{FF2B5EF4-FFF2-40B4-BE49-F238E27FC236}">
-                <a16:creationId xmlns:a16="http://schemas.microsoft.com/office/drawing/2014/main" id="{0BED30CC-61E8-4D49-939F-D37DB8785279}"/>
+                <a16:creationId xmlns:a16="http://schemas.microsoft.com/office/drawing/2014/main" id="{F2D6E3AE-F42C-4955-90C6-E7996FE68716}"/>
               </a:ext>
             </a:extLst>
           </p:cNvPr>
@@ -4999,7 +4999,7 @@
           <p:cNvPr id="2" name="s4-eyebrow">
             <a:extLst xmlns:a="http://schemas.openxmlformats.org/drawingml/2006/main">
               <a:ext uri="{FF2B5EF4-FFF2-40B4-BE49-F238E27FC236}">
-                <a16:creationId xmlns:a16="http://schemas.microsoft.com/office/drawing/2014/main" id="{7D523CC5-2588-4F4F-AD7B-C5B2147C47A4}"/>
+                <a16:creationId xmlns:a16="http://schemas.microsoft.com/office/drawing/2014/main" id="{ED7B13B8-730F-4A97-813C-8185C90F777B}"/>
               </a:ext>
             </a:extLst>
           </p:cNvPr>
@@ -5057,7 +5057,7 @@
           <p:cNvPr id="3" name="s4-title">
             <a:extLst xmlns:a="http://schemas.openxmlformats.org/drawingml/2006/main">
               <a:ext uri="{FF2B5EF4-FFF2-40B4-BE49-F238E27FC236}">
-                <a16:creationId xmlns:a16="http://schemas.microsoft.com/office/drawing/2014/main" id="{7434E46B-76BB-4E0A-BEF8-3AB5F5E4EBCF}"/>
+                <a16:creationId xmlns:a16="http://schemas.microsoft.com/office/drawing/2014/main" id="{9AB95167-9229-46B6-ADE5-DA5FAF88DB14}"/>
               </a:ext>
             </a:extLst>
           </p:cNvPr>
@@ -5115,7 +5115,7 @@
           <p:cNvPr id="4" name="s4-footer">
             <a:extLst xmlns:a="http://schemas.openxmlformats.org/drawingml/2006/main">
               <a:ext uri="{FF2B5EF4-FFF2-40B4-BE49-F238E27FC236}">
-                <a16:creationId xmlns:a16="http://schemas.microsoft.com/office/drawing/2014/main" id="{25187161-0238-44F1-B315-53E83FB3E12F}"/>
+                <a16:creationId xmlns:a16="http://schemas.microsoft.com/office/drawing/2014/main" id="{9E558475-C0C0-4407-8633-7FE2687ADDC8}"/>
               </a:ext>
             </a:extLst>
           </p:cNvPr>
@@ -5146,7 +5146,7 @@
           <p:cNvPr id="5" name="s4-identity">
             <a:extLst xmlns:a="http://schemas.openxmlformats.org/drawingml/2006/main">
               <a:ext uri="{FF2B5EF4-FFF2-40B4-BE49-F238E27FC236}">
-                <a16:creationId xmlns:a16="http://schemas.microsoft.com/office/drawing/2014/main" id="{F6B07BED-93C6-42D5-A62C-AAE649676624}"/>
+                <a16:creationId xmlns:a16="http://schemas.microsoft.com/office/drawing/2014/main" id="{103E34AB-46FB-4C2B-B22F-42759A8CE1CC}"/>
               </a:ext>
             </a:extLst>
           </p:cNvPr>
@@ -5204,7 +5204,7 @@
           <p:cNvPr id="6" name="core-no-0">
             <a:extLst xmlns:a="http://schemas.openxmlformats.org/drawingml/2006/main">
               <a:ext uri="{FF2B5EF4-FFF2-40B4-BE49-F238E27FC236}">
-                <a16:creationId xmlns:a16="http://schemas.microsoft.com/office/drawing/2014/main" id="{FB45D8BF-C82D-4A66-9E33-7135056F2B6D}"/>
+                <a16:creationId xmlns:a16="http://schemas.microsoft.com/office/drawing/2014/main" id="{0DDB909E-C4F0-45D4-AB84-DFCF93B8E42D}"/>
               </a:ext>
             </a:extLst>
           </p:cNvPr>
@@ -5262,7 +5262,7 @@
           <p:cNvPr id="7" name="core-label-0">
             <a:extLst xmlns:a="http://schemas.openxmlformats.org/drawingml/2006/main">
               <a:ext uri="{FF2B5EF4-FFF2-40B4-BE49-F238E27FC236}">
-                <a16:creationId xmlns:a16="http://schemas.microsoft.com/office/drawing/2014/main" id="{DFBD9CCD-870A-4680-AEF9-40A22A0BA0D5}"/>
+                <a16:creationId xmlns:a16="http://schemas.microsoft.com/office/drawing/2014/main" id="{2D07149B-B519-4F53-8100-C2AEF427FE80}"/>
               </a:ext>
             </a:extLst>
           </p:cNvPr>
@@ -5320,7 +5320,7 @@
           <p:cNvPr id="8" name="core-body-0">
             <a:extLst xmlns:a="http://schemas.openxmlformats.org/drawingml/2006/main">
               <a:ext uri="{FF2B5EF4-FFF2-40B4-BE49-F238E27FC236}">
-                <a16:creationId xmlns:a16="http://schemas.microsoft.com/office/drawing/2014/main" id="{6C978B1C-FC26-4E52-8EA6-936393695FDF}"/>
+                <a16:creationId xmlns:a16="http://schemas.microsoft.com/office/drawing/2014/main" id="{138462D8-2536-4912-99E5-0C2E1376ACE2}"/>
               </a:ext>
             </a:extLst>
           </p:cNvPr>
@@ -5384,7 +5384,7 @@
           <p:cNvPr id="9" name="core-no-1">
             <a:extLst xmlns:a="http://schemas.openxmlformats.org/drawingml/2006/main">
               <a:ext uri="{FF2B5EF4-FFF2-40B4-BE49-F238E27FC236}">
-                <a16:creationId xmlns:a16="http://schemas.microsoft.com/office/drawing/2014/main" id="{EC821172-C048-46D0-BF84-503EED9E1665}"/>
+                <a16:creationId xmlns:a16="http://schemas.microsoft.com/office/drawing/2014/main" id="{224D7427-7688-4034-83F2-AD55CD364789}"/>
               </a:ext>
             </a:extLst>
           </p:cNvPr>
@@ -5442,7 +5442,7 @@
           <p:cNvPr id="10" name="core-body-1">
             <a:extLst xmlns:a="http://schemas.openxmlformats.org/drawingml/2006/main">
               <a:ext uri="{FF2B5EF4-FFF2-40B4-BE49-F238E27FC236}">
-                <a16:creationId xmlns:a16="http://schemas.microsoft.com/office/drawing/2014/main" id="{75E17DDB-6FC2-431D-B9B9-D894D0289B84}"/>
+                <a16:creationId xmlns:a16="http://schemas.microsoft.com/office/drawing/2014/main" id="{87687E35-C1A9-4FCC-AE20-983EBE99A3E5}"/>
               </a:ext>
             </a:extLst>
           </p:cNvPr>
@@ -5506,7 +5506,7 @@
           <p:cNvPr id="11" name="s4-takeaway-rule">
             <a:extLst xmlns:a="http://schemas.openxmlformats.org/drawingml/2006/main">
               <a:ext uri="{FF2B5EF4-FFF2-40B4-BE49-F238E27FC236}">
-                <a16:creationId xmlns:a16="http://schemas.microsoft.com/office/drawing/2014/main" id="{F7CA7BF5-4F5E-4EDF-B94F-D9FD66F9943B}"/>
+                <a16:creationId xmlns:a16="http://schemas.microsoft.com/office/drawing/2014/main" id="{B2154C99-6244-40F3-84F9-FAE819FC8BCB}"/>
               </a:ext>
             </a:extLst>
           </p:cNvPr>
@@ -5539,7 +5539,7 @@
           <p:cNvPr id="12" name="s4-takeaway">
             <a:extLst xmlns:a="http://schemas.openxmlformats.org/drawingml/2006/main">
               <a:ext uri="{FF2B5EF4-FFF2-40B4-BE49-F238E27FC236}">
-                <a16:creationId xmlns:a16="http://schemas.microsoft.com/office/drawing/2014/main" id="{5DAE55C7-E856-4044-9698-B07E093DC4ED}"/>
+                <a16:creationId xmlns:a16="http://schemas.microsoft.com/office/drawing/2014/main" id="{AD18DD49-9A8D-4132-96C9-B0DAC6E4F8D9}"/>
               </a:ext>
             </a:extLst>
           </p:cNvPr>
@@ -5595,7 +5595,7 @@
     </p:spTree>
     <p:extLst>
       <p:ext uri="{BB962C8B-B14F-4D97-AF65-F5344CB8AC3E}">
-        <p14:creationId xmlns:p14="http://schemas.microsoft.com/office/powerpoint/2010/main" val="566594605"/>
+        <p14:creationId xmlns:p14="http://schemas.microsoft.com/office/powerpoint/2010/main" val="1653810824"/>
       </p:ext>
     </p:extLst>
   </p:cSld>
@@ -5626,7 +5626,7 @@
           <p:cNvPr id="1" name="s5-rule">
             <a:extLst xmlns:a="http://schemas.openxmlformats.org/drawingml/2006/main">
               <a:ext uri="{FF2B5EF4-FFF2-40B4-BE49-F238E27FC236}">
-                <a16:creationId xmlns:a16="http://schemas.microsoft.com/office/drawing/2014/main" id="{45B8E5B5-28D2-4C16-878C-5989C6D0BA14}"/>
+                <a16:creationId xmlns:a16="http://schemas.microsoft.com/office/drawing/2014/main" id="{854A38AA-A977-4421-AC33-CC668100CE45}"/>
               </a:ext>
             </a:extLst>
           </p:cNvPr>
@@ -5659,7 +5659,7 @@
           <p:cNvPr id="2" name="s5-eyebrow">
             <a:extLst xmlns:a="http://schemas.openxmlformats.org/drawingml/2006/main">
               <a:ext uri="{FF2B5EF4-FFF2-40B4-BE49-F238E27FC236}">
-                <a16:creationId xmlns:a16="http://schemas.microsoft.com/office/drawing/2014/main" id="{7A7E35F6-6E85-4081-AC82-A2B5E16F774A}"/>
+                <a16:creationId xmlns:a16="http://schemas.microsoft.com/office/drawing/2014/main" id="{BCE9C835-3B34-46D3-A577-D99C1839EA33}"/>
               </a:ext>
             </a:extLst>
           </p:cNvPr>
@@ -5717,7 +5717,7 @@
           <p:cNvPr id="3" name="s5-title">
             <a:extLst xmlns:a="http://schemas.openxmlformats.org/drawingml/2006/main">
               <a:ext uri="{FF2B5EF4-FFF2-40B4-BE49-F238E27FC236}">
-                <a16:creationId xmlns:a16="http://schemas.microsoft.com/office/drawing/2014/main" id="{1C301651-CD7C-446E-B5C3-11C8ADDAD168}"/>
+                <a16:creationId xmlns:a16="http://schemas.microsoft.com/office/drawing/2014/main" id="{EB53EEE4-08C1-49CD-9995-11D54030E62E}"/>
               </a:ext>
             </a:extLst>
           </p:cNvPr>
@@ -5775,7 +5775,7 @@
           <p:cNvPr id="4" name="s5-footer">
             <a:extLst xmlns:a="http://schemas.openxmlformats.org/drawingml/2006/main">
               <a:ext uri="{FF2B5EF4-FFF2-40B4-BE49-F238E27FC236}">
-                <a16:creationId xmlns:a16="http://schemas.microsoft.com/office/drawing/2014/main" id="{15BBFAA0-32EC-477B-8124-DABC6B987D64}"/>
+                <a16:creationId xmlns:a16="http://schemas.microsoft.com/office/drawing/2014/main" id="{7BE558F9-545E-446A-8829-21B59D9C3185}"/>
               </a:ext>
             </a:extLst>
           </p:cNvPr>
@@ -5806,7 +5806,7 @@
           <p:cNvPr id="5" name="s5-identity">
             <a:extLst xmlns:a="http://schemas.openxmlformats.org/drawingml/2006/main">
               <a:ext uri="{FF2B5EF4-FFF2-40B4-BE49-F238E27FC236}">
-                <a16:creationId xmlns:a16="http://schemas.microsoft.com/office/drawing/2014/main" id="{46392B9A-9898-4230-9587-0E02C5BE42DB}"/>
+                <a16:creationId xmlns:a16="http://schemas.microsoft.com/office/drawing/2014/main" id="{85B1844D-73FF-4F51-A20F-96AE4E4A47CA}"/>
               </a:ext>
             </a:extLst>
           </p:cNvPr>
@@ -5864,7 +5864,7 @@
           <p:cNvPr id="6" name="core-no-0">
             <a:extLst xmlns:a="http://schemas.openxmlformats.org/drawingml/2006/main">
               <a:ext uri="{FF2B5EF4-FFF2-40B4-BE49-F238E27FC236}">
-                <a16:creationId xmlns:a16="http://schemas.microsoft.com/office/drawing/2014/main" id="{B41FE73F-039E-45F8-91B8-69A61B644646}"/>
+                <a16:creationId xmlns:a16="http://schemas.microsoft.com/office/drawing/2014/main" id="{CABFB9E8-E003-4AA2-9E5C-56FB634D286A}"/>
               </a:ext>
             </a:extLst>
           </p:cNvPr>
@@ -5922,7 +5922,7 @@
           <p:cNvPr id="7" name="core-label-0">
             <a:extLst xmlns:a="http://schemas.openxmlformats.org/drawingml/2006/main">
               <a:ext uri="{FF2B5EF4-FFF2-40B4-BE49-F238E27FC236}">
-                <a16:creationId xmlns:a16="http://schemas.microsoft.com/office/drawing/2014/main" id="{F2358569-6204-4692-8F31-6B5F7655EEB7}"/>
+                <a16:creationId xmlns:a16="http://schemas.microsoft.com/office/drawing/2014/main" id="{86685511-A3D0-43BC-BCCF-601B089BB18C}"/>
               </a:ext>
             </a:extLst>
           </p:cNvPr>
@@ -5980,7 +5980,7 @@
           <p:cNvPr id="8" name="core-body-0">
             <a:extLst xmlns:a="http://schemas.openxmlformats.org/drawingml/2006/main">
               <a:ext uri="{FF2B5EF4-FFF2-40B4-BE49-F238E27FC236}">
-                <a16:creationId xmlns:a16="http://schemas.microsoft.com/office/drawing/2014/main" id="{55665A83-1C32-4F43-95D8-7E47EAE3E7CB}"/>
+                <a16:creationId xmlns:a16="http://schemas.microsoft.com/office/drawing/2014/main" id="{EC4A2B5E-93A0-46FF-B095-60A13E7504D8}"/>
               </a:ext>
             </a:extLst>
           </p:cNvPr>
@@ -6044,7 +6044,7 @@
           <p:cNvPr id="9" name="core-no-1">
             <a:extLst xmlns:a="http://schemas.openxmlformats.org/drawingml/2006/main">
               <a:ext uri="{FF2B5EF4-FFF2-40B4-BE49-F238E27FC236}">
-                <a16:creationId xmlns:a16="http://schemas.microsoft.com/office/drawing/2014/main" id="{47B52307-02F9-4D03-BA41-2093586895FC}"/>
+                <a16:creationId xmlns:a16="http://schemas.microsoft.com/office/drawing/2014/main" id="{3B282483-F899-4666-897E-B4C2CFE222C9}"/>
               </a:ext>
             </a:extLst>
           </p:cNvPr>
@@ -6102,7 +6102,7 @@
           <p:cNvPr id="10" name="core-body-1">
             <a:extLst xmlns:a="http://schemas.openxmlformats.org/drawingml/2006/main">
               <a:ext uri="{FF2B5EF4-FFF2-40B4-BE49-F238E27FC236}">
-                <a16:creationId xmlns:a16="http://schemas.microsoft.com/office/drawing/2014/main" id="{2DE50828-7A8E-4488-B018-90F50AB6A41B}"/>
+                <a16:creationId xmlns:a16="http://schemas.microsoft.com/office/drawing/2014/main" id="{FE23497D-C9BA-48E6-96C9-B74912896774}"/>
               </a:ext>
             </a:extLst>
           </p:cNvPr>
@@ -6166,7 +6166,7 @@
           <p:cNvPr id="11" name="s5-takeaway-rule">
             <a:extLst xmlns:a="http://schemas.openxmlformats.org/drawingml/2006/main">
               <a:ext uri="{FF2B5EF4-FFF2-40B4-BE49-F238E27FC236}">
-                <a16:creationId xmlns:a16="http://schemas.microsoft.com/office/drawing/2014/main" id="{DEE76D1C-C6C3-4B54-9261-AE960B63B607}"/>
+                <a16:creationId xmlns:a16="http://schemas.microsoft.com/office/drawing/2014/main" id="{A797A75C-9AD8-4B97-B857-CDD6A93183B6}"/>
               </a:ext>
             </a:extLst>
           </p:cNvPr>
@@ -6199,7 +6199,7 @@
           <p:cNvPr id="12" name="s5-takeaway">
             <a:extLst xmlns:a="http://schemas.openxmlformats.org/drawingml/2006/main">
               <a:ext uri="{FF2B5EF4-FFF2-40B4-BE49-F238E27FC236}">
-                <a16:creationId xmlns:a16="http://schemas.microsoft.com/office/drawing/2014/main" id="{6BC67A53-9B2B-4943-915B-E80BCAE18489}"/>
+                <a16:creationId xmlns:a16="http://schemas.microsoft.com/office/drawing/2014/main" id="{F70EBE5B-7786-403C-9CD6-F84977854344}"/>
               </a:ext>
             </a:extLst>
           </p:cNvPr>
@@ -6255,7 +6255,7 @@
     </p:spTree>
     <p:extLst>
       <p:ext uri="{BB962C8B-B14F-4D97-AF65-F5344CB8AC3E}">
-        <p14:creationId xmlns:p14="http://schemas.microsoft.com/office/powerpoint/2010/main" val="481280607"/>
+        <p14:creationId xmlns:p14="http://schemas.microsoft.com/office/powerpoint/2010/main" val="1422429022"/>
       </p:ext>
     </p:extLst>
   </p:cSld>
@@ -6286,7 +6286,7 @@
           <p:cNvPr id="1" name="s6-rule">
             <a:extLst xmlns:a="http://schemas.openxmlformats.org/drawingml/2006/main">
               <a:ext uri="{FF2B5EF4-FFF2-40B4-BE49-F238E27FC236}">
-                <a16:creationId xmlns:a16="http://schemas.microsoft.com/office/drawing/2014/main" id="{CC76D475-0A7C-4EF4-9893-B294F6368957}"/>
+                <a16:creationId xmlns:a16="http://schemas.microsoft.com/office/drawing/2014/main" id="{88D6BA9F-F7E4-476C-9C9E-C9E63AFEF351}"/>
               </a:ext>
             </a:extLst>
           </p:cNvPr>
@@ -6319,7 +6319,7 @@
           <p:cNvPr id="2" name="s6-eyebrow">
             <a:extLst xmlns:a="http://schemas.openxmlformats.org/drawingml/2006/main">
               <a:ext uri="{FF2B5EF4-FFF2-40B4-BE49-F238E27FC236}">
-                <a16:creationId xmlns:a16="http://schemas.microsoft.com/office/drawing/2014/main" id="{56EC717A-36C2-4FF9-ADA9-7AF5D8254612}"/>
+                <a16:creationId xmlns:a16="http://schemas.microsoft.com/office/drawing/2014/main" id="{34156C62-C605-414C-9784-FD78DB2C1D80}"/>
               </a:ext>
             </a:extLst>
           </p:cNvPr>
@@ -6377,7 +6377,7 @@
           <p:cNvPr id="3" name="s6-title">
             <a:extLst xmlns:a="http://schemas.openxmlformats.org/drawingml/2006/main">
               <a:ext uri="{FF2B5EF4-FFF2-40B4-BE49-F238E27FC236}">
-                <a16:creationId xmlns:a16="http://schemas.microsoft.com/office/drawing/2014/main" id="{F38A9718-1E10-4580-924A-A3852D07474D}"/>
+                <a16:creationId xmlns:a16="http://schemas.microsoft.com/office/drawing/2014/main" id="{587C35ED-3AA2-4D49-8344-4AE1E28777E5}"/>
               </a:ext>
             </a:extLst>
           </p:cNvPr>
@@ -6435,7 +6435,7 @@
           <p:cNvPr id="4" name="s6-footer">
             <a:extLst xmlns:a="http://schemas.openxmlformats.org/drawingml/2006/main">
               <a:ext uri="{FF2B5EF4-FFF2-40B4-BE49-F238E27FC236}">
-                <a16:creationId xmlns:a16="http://schemas.microsoft.com/office/drawing/2014/main" id="{545C004A-85BC-4FAC-BBF2-FF94FEA38BD4}"/>
+                <a16:creationId xmlns:a16="http://schemas.microsoft.com/office/drawing/2014/main" id="{CEF93088-6841-4BF8-B7CF-07128F53ECF0}"/>
               </a:ext>
             </a:extLst>
           </p:cNvPr>
@@ -6466,7 +6466,7 @@
           <p:cNvPr id="5" name="s6-identity">
             <a:extLst xmlns:a="http://schemas.openxmlformats.org/drawingml/2006/main">
               <a:ext uri="{FF2B5EF4-FFF2-40B4-BE49-F238E27FC236}">
-                <a16:creationId xmlns:a16="http://schemas.microsoft.com/office/drawing/2014/main" id="{5971E330-E9E8-4D93-BA70-5184B1688B1C}"/>
+                <a16:creationId xmlns:a16="http://schemas.microsoft.com/office/drawing/2014/main" id="{924C8137-6BC9-4D4B-BDED-32610530F023}"/>
               </a:ext>
             </a:extLst>
           </p:cNvPr>
@@ -6524,7 +6524,7 @@
           <p:cNvPr id="6" name="core-no-0">
             <a:extLst xmlns:a="http://schemas.openxmlformats.org/drawingml/2006/main">
               <a:ext uri="{FF2B5EF4-FFF2-40B4-BE49-F238E27FC236}">
-                <a16:creationId xmlns:a16="http://schemas.microsoft.com/office/drawing/2014/main" id="{1B2F7052-F10A-4AA3-B970-1B4F43DC624B}"/>
+                <a16:creationId xmlns:a16="http://schemas.microsoft.com/office/drawing/2014/main" id="{0251AE69-2FFD-4217-9D37-22C0700CD4B5}"/>
               </a:ext>
             </a:extLst>
           </p:cNvPr>
@@ -6582,7 +6582,7 @@
           <p:cNvPr id="7" name="core-label-0">
             <a:extLst xmlns:a="http://schemas.openxmlformats.org/drawingml/2006/main">
               <a:ext uri="{FF2B5EF4-FFF2-40B4-BE49-F238E27FC236}">
-                <a16:creationId xmlns:a16="http://schemas.microsoft.com/office/drawing/2014/main" id="{027DDC15-ED27-49EC-A212-E35DC2F12EBD}"/>
+                <a16:creationId xmlns:a16="http://schemas.microsoft.com/office/drawing/2014/main" id="{EBC4B380-5B32-4DED-943E-63C3807872AD}"/>
               </a:ext>
             </a:extLst>
           </p:cNvPr>
@@ -6640,7 +6640,7 @@
           <p:cNvPr id="8" name="core-body-0">
             <a:extLst xmlns:a="http://schemas.openxmlformats.org/drawingml/2006/main">
               <a:ext uri="{FF2B5EF4-FFF2-40B4-BE49-F238E27FC236}">
-                <a16:creationId xmlns:a16="http://schemas.microsoft.com/office/drawing/2014/main" id="{B8E182BE-7226-4F33-A8DE-44ACB5717AC0}"/>
+                <a16:creationId xmlns:a16="http://schemas.microsoft.com/office/drawing/2014/main" id="{B16F768B-4892-4460-AB99-EFE1304DDAFD}"/>
               </a:ext>
             </a:extLst>
           </p:cNvPr>
@@ -6704,7 +6704,7 @@
           <p:cNvPr id="9" name="core-no-1">
             <a:extLst xmlns:a="http://schemas.openxmlformats.org/drawingml/2006/main">
               <a:ext uri="{FF2B5EF4-FFF2-40B4-BE49-F238E27FC236}">
-                <a16:creationId xmlns:a16="http://schemas.microsoft.com/office/drawing/2014/main" id="{317BA203-2148-461E-9E78-334AD74FE70F}"/>
+                <a16:creationId xmlns:a16="http://schemas.microsoft.com/office/drawing/2014/main" id="{A32E1474-3849-4C05-879E-66D054B9D3A4}"/>
               </a:ext>
             </a:extLst>
           </p:cNvPr>
@@ -6762,7 +6762,7 @@
           <p:cNvPr id="10" name="core-body-1">
             <a:extLst xmlns:a="http://schemas.openxmlformats.org/drawingml/2006/main">
               <a:ext uri="{FF2B5EF4-FFF2-40B4-BE49-F238E27FC236}">
-                <a16:creationId xmlns:a16="http://schemas.microsoft.com/office/drawing/2014/main" id="{D5D0DEA5-8230-42DB-A59B-3DF43600425C}"/>
+                <a16:creationId xmlns:a16="http://schemas.microsoft.com/office/drawing/2014/main" id="{3C12F230-7F67-46D9-801F-C1BD423A251F}"/>
               </a:ext>
             </a:extLst>
           </p:cNvPr>
@@ -6826,7 +6826,7 @@
           <p:cNvPr id="11" name="s6-takeaway-rule">
             <a:extLst xmlns:a="http://schemas.openxmlformats.org/drawingml/2006/main">
               <a:ext uri="{FF2B5EF4-FFF2-40B4-BE49-F238E27FC236}">
-                <a16:creationId xmlns:a16="http://schemas.microsoft.com/office/drawing/2014/main" id="{38AFA467-A7E9-45AB-B22A-C91EB997B67C}"/>
+                <a16:creationId xmlns:a16="http://schemas.microsoft.com/office/drawing/2014/main" id="{1CD1A028-97ED-47A0-ACD8-BB295B868527}"/>
               </a:ext>
             </a:extLst>
           </p:cNvPr>
@@ -6859,7 +6859,7 @@
           <p:cNvPr id="12" name="s6-takeaway">
             <a:extLst xmlns:a="http://schemas.openxmlformats.org/drawingml/2006/main">
               <a:ext uri="{FF2B5EF4-FFF2-40B4-BE49-F238E27FC236}">
-                <a16:creationId xmlns:a16="http://schemas.microsoft.com/office/drawing/2014/main" id="{4278843D-9FA5-4978-9599-C4B16B576C41}"/>
+                <a16:creationId xmlns:a16="http://schemas.microsoft.com/office/drawing/2014/main" id="{7ECD0DCA-7653-4B22-A5EE-3E037AE4E16D}"/>
               </a:ext>
             </a:extLst>
           </p:cNvPr>
@@ -6915,7 +6915,7 @@
     </p:spTree>
     <p:extLst>
       <p:ext uri="{BB962C8B-B14F-4D97-AF65-F5344CB8AC3E}">
-        <p14:creationId xmlns:p14="http://schemas.microsoft.com/office/powerpoint/2010/main" val="2147319305"/>
+        <p14:creationId xmlns:p14="http://schemas.microsoft.com/office/powerpoint/2010/main" val="1732003113"/>
       </p:ext>
     </p:extLst>
   </p:cSld>
@@ -6946,7 +6946,7 @@
           <p:cNvPr id="1" name="s7-rule">
             <a:extLst xmlns:a="http://schemas.openxmlformats.org/drawingml/2006/main">
               <a:ext uri="{FF2B5EF4-FFF2-40B4-BE49-F238E27FC236}">
-                <a16:creationId xmlns:a16="http://schemas.microsoft.com/office/drawing/2014/main" id="{938BF341-CDA9-4C46-A0DB-26C6C61D903B}"/>
+                <a16:creationId xmlns:a16="http://schemas.microsoft.com/office/drawing/2014/main" id="{64117DA6-DBDF-4AFD-ABD1-15E3D0737F84}"/>
               </a:ext>
             </a:extLst>
           </p:cNvPr>
@@ -6979,7 +6979,7 @@
           <p:cNvPr id="2" name="s7-eyebrow">
             <a:extLst xmlns:a="http://schemas.openxmlformats.org/drawingml/2006/main">
               <a:ext uri="{FF2B5EF4-FFF2-40B4-BE49-F238E27FC236}">
-                <a16:creationId xmlns:a16="http://schemas.microsoft.com/office/drawing/2014/main" id="{C7FB7847-9C1B-4DD2-83EB-F5FABE19A244}"/>
+                <a16:creationId xmlns:a16="http://schemas.microsoft.com/office/drawing/2014/main" id="{00AEAA38-7308-44B2-BDFA-CB80B2DCF0DB}"/>
               </a:ext>
             </a:extLst>
           </p:cNvPr>
@@ -7037,7 +7037,7 @@
           <p:cNvPr id="3" name="s7-title">
             <a:extLst xmlns:a="http://schemas.openxmlformats.org/drawingml/2006/main">
               <a:ext uri="{FF2B5EF4-FFF2-40B4-BE49-F238E27FC236}">
-                <a16:creationId xmlns:a16="http://schemas.microsoft.com/office/drawing/2014/main" id="{EC60AE70-1761-422F-BCA5-5567AD066513}"/>
+                <a16:creationId xmlns:a16="http://schemas.microsoft.com/office/drawing/2014/main" id="{8C6FCAF0-8D84-4B45-A520-ACDDF1B5D534}"/>
               </a:ext>
             </a:extLst>
           </p:cNvPr>
@@ -7095,7 +7095,7 @@
           <p:cNvPr id="4" name="s7-footer">
             <a:extLst xmlns:a="http://schemas.openxmlformats.org/drawingml/2006/main">
               <a:ext uri="{FF2B5EF4-FFF2-40B4-BE49-F238E27FC236}">
-                <a16:creationId xmlns:a16="http://schemas.microsoft.com/office/drawing/2014/main" id="{97039325-C135-45FA-9F25-1C19CF51B46B}"/>
+                <a16:creationId xmlns:a16="http://schemas.microsoft.com/office/drawing/2014/main" id="{E2C290B6-0943-49C9-8F1F-FDCF6DC2ABF7}"/>
               </a:ext>
             </a:extLst>
           </p:cNvPr>
@@ -7126,7 +7126,7 @@
           <p:cNvPr id="5" name="s7-identity">
             <a:extLst xmlns:a="http://schemas.openxmlformats.org/drawingml/2006/main">
               <a:ext uri="{FF2B5EF4-FFF2-40B4-BE49-F238E27FC236}">
-                <a16:creationId xmlns:a16="http://schemas.microsoft.com/office/drawing/2014/main" id="{7305204F-44C2-4C7F-AA02-8DCB456D9786}"/>
+                <a16:creationId xmlns:a16="http://schemas.microsoft.com/office/drawing/2014/main" id="{8FA0352C-AA8E-4D33-9186-E9A172A05EE7}"/>
               </a:ext>
             </a:extLst>
           </p:cNvPr>
@@ -7184,7 +7184,7 @@
           <p:cNvPr id="6" name="core-no-0">
             <a:extLst xmlns:a="http://schemas.openxmlformats.org/drawingml/2006/main">
               <a:ext uri="{FF2B5EF4-FFF2-40B4-BE49-F238E27FC236}">
-                <a16:creationId xmlns:a16="http://schemas.microsoft.com/office/drawing/2014/main" id="{88BD417D-2C52-4897-9E54-447D1B72E826}"/>
+                <a16:creationId xmlns:a16="http://schemas.microsoft.com/office/drawing/2014/main" id="{4F240130-1FCB-4951-ACD6-33CA359A669B}"/>
               </a:ext>
             </a:extLst>
           </p:cNvPr>
@@ -7242,7 +7242,7 @@
           <p:cNvPr id="7" name="core-label-0">
             <a:extLst xmlns:a="http://schemas.openxmlformats.org/drawingml/2006/main">
               <a:ext uri="{FF2B5EF4-FFF2-40B4-BE49-F238E27FC236}">
-                <a16:creationId xmlns:a16="http://schemas.microsoft.com/office/drawing/2014/main" id="{DA97B666-E549-4B64-9B9E-4CB6721A7FB4}"/>
+                <a16:creationId xmlns:a16="http://schemas.microsoft.com/office/drawing/2014/main" id="{A788BA3B-CB96-46E4-B5B4-7C59D10D8321}"/>
               </a:ext>
             </a:extLst>
           </p:cNvPr>
@@ -7300,7 +7300,7 @@
           <p:cNvPr id="8" name="core-body-0">
             <a:extLst xmlns:a="http://schemas.openxmlformats.org/drawingml/2006/main">
               <a:ext uri="{FF2B5EF4-FFF2-40B4-BE49-F238E27FC236}">
-                <a16:creationId xmlns:a16="http://schemas.microsoft.com/office/drawing/2014/main" id="{95AD622B-60D2-4F10-95D0-1AF4D811C4F2}"/>
+                <a16:creationId xmlns:a16="http://schemas.microsoft.com/office/drawing/2014/main" id="{8A9186C0-7FB3-4596-8AF5-E2C7A5F099C8}"/>
               </a:ext>
             </a:extLst>
           </p:cNvPr>
@@ -7364,7 +7364,7 @@
           <p:cNvPr id="9" name="core-no-1">
             <a:extLst xmlns:a="http://schemas.openxmlformats.org/drawingml/2006/main">
               <a:ext uri="{FF2B5EF4-FFF2-40B4-BE49-F238E27FC236}">
-                <a16:creationId xmlns:a16="http://schemas.microsoft.com/office/drawing/2014/main" id="{1D734695-CAB8-4A58-AC0C-45434919D43D}"/>
+                <a16:creationId xmlns:a16="http://schemas.microsoft.com/office/drawing/2014/main" id="{D6C078C0-29D8-42D5-B068-1F5009597317}"/>
               </a:ext>
             </a:extLst>
           </p:cNvPr>
@@ -7422,7 +7422,7 @@
           <p:cNvPr id="10" name="core-body-1">
             <a:extLst xmlns:a="http://schemas.openxmlformats.org/drawingml/2006/main">
               <a:ext uri="{FF2B5EF4-FFF2-40B4-BE49-F238E27FC236}">
-                <a16:creationId xmlns:a16="http://schemas.microsoft.com/office/drawing/2014/main" id="{244CB71F-637E-4F2F-B745-8C8F751286C4}"/>
+                <a16:creationId xmlns:a16="http://schemas.microsoft.com/office/drawing/2014/main" id="{5AB16437-33A5-4F7A-87B1-DB3BFBE1E68A}"/>
               </a:ext>
             </a:extLst>
           </p:cNvPr>
@@ -7486,7 +7486,7 @@
           <p:cNvPr id="11" name="s7-takeaway-rule">
             <a:extLst xmlns:a="http://schemas.openxmlformats.org/drawingml/2006/main">
               <a:ext uri="{FF2B5EF4-FFF2-40B4-BE49-F238E27FC236}">
-                <a16:creationId xmlns:a16="http://schemas.microsoft.com/office/drawing/2014/main" id="{6C7BAF51-D9DD-45E2-8421-709CA6857A01}"/>
+                <a16:creationId xmlns:a16="http://schemas.microsoft.com/office/drawing/2014/main" id="{1B970BC7-495E-4801-954F-1FC09708DD48}"/>
               </a:ext>
             </a:extLst>
           </p:cNvPr>
@@ -7519,7 +7519,7 @@
           <p:cNvPr id="12" name="s7-takeaway">
             <a:extLst xmlns:a="http://schemas.openxmlformats.org/drawingml/2006/main">
               <a:ext uri="{FF2B5EF4-FFF2-40B4-BE49-F238E27FC236}">
-                <a16:creationId xmlns:a16="http://schemas.microsoft.com/office/drawing/2014/main" id="{134CAB4A-B2CC-404B-9964-A24EBA0C9A81}"/>
+                <a16:creationId xmlns:a16="http://schemas.microsoft.com/office/drawing/2014/main" id="{AEEC589C-8F0C-4A74-85DC-D68BEF8040FD}"/>
               </a:ext>
             </a:extLst>
           </p:cNvPr>
@@ -7575,7 +7575,7 @@
     </p:spTree>
     <p:extLst>
       <p:ext uri="{BB962C8B-B14F-4D97-AF65-F5344CB8AC3E}">
-        <p14:creationId xmlns:p14="http://schemas.microsoft.com/office/powerpoint/2010/main" val="1301948714"/>
+        <p14:creationId xmlns:p14="http://schemas.microsoft.com/office/powerpoint/2010/main" val="740863155"/>
       </p:ext>
     </p:extLst>
   </p:cSld>
@@ -7606,7 +7606,7 @@
           <p:cNvPr id="1" name="s8-rule">
             <a:extLst xmlns:a="http://schemas.openxmlformats.org/drawingml/2006/main">
               <a:ext uri="{FF2B5EF4-FFF2-40B4-BE49-F238E27FC236}">
-                <a16:creationId xmlns:a16="http://schemas.microsoft.com/office/drawing/2014/main" id="{6A958F8B-6510-45C6-940A-760FA3FFC24E}"/>
+                <a16:creationId xmlns:a16="http://schemas.microsoft.com/office/drawing/2014/main" id="{9758E3DA-04FC-455C-8625-6CE53A19217D}"/>
               </a:ext>
             </a:extLst>
           </p:cNvPr>
@@ -7639,7 +7639,7 @@
           <p:cNvPr id="2" name="s8-eyebrow">
             <a:extLst xmlns:a="http://schemas.openxmlformats.org/drawingml/2006/main">
               <a:ext uri="{FF2B5EF4-FFF2-40B4-BE49-F238E27FC236}">
-                <a16:creationId xmlns:a16="http://schemas.microsoft.com/office/drawing/2014/main" id="{A5978D97-6023-47E3-9D54-475E2B7168D3}"/>
+                <a16:creationId xmlns:a16="http://schemas.microsoft.com/office/drawing/2014/main" id="{259A7984-6E51-43B0-A327-FCED48199B63}"/>
               </a:ext>
             </a:extLst>
           </p:cNvPr>
@@ -7697,7 +7697,7 @@
           <p:cNvPr id="3" name="s8-title">
             <a:extLst xmlns:a="http://schemas.openxmlformats.org/drawingml/2006/main">
               <a:ext uri="{FF2B5EF4-FFF2-40B4-BE49-F238E27FC236}">
-                <a16:creationId xmlns:a16="http://schemas.microsoft.com/office/drawing/2014/main" id="{A1DF8730-CFD4-4840-B62D-F3C08C8AFA8C}"/>
+                <a16:creationId xmlns:a16="http://schemas.microsoft.com/office/drawing/2014/main" id="{CDA42913-6633-4763-9541-96542362F165}"/>
               </a:ext>
             </a:extLst>
           </p:cNvPr>
@@ -7755,7 +7755,7 @@
           <p:cNvPr id="4" name="s8-footer">
             <a:extLst xmlns:a="http://schemas.openxmlformats.org/drawingml/2006/main">
               <a:ext uri="{FF2B5EF4-FFF2-40B4-BE49-F238E27FC236}">
-                <a16:creationId xmlns:a16="http://schemas.microsoft.com/office/drawing/2014/main" id="{DD17407F-2CDB-4F26-B408-29D3D37015A3}"/>
+                <a16:creationId xmlns:a16="http://schemas.microsoft.com/office/drawing/2014/main" id="{C585078A-8A68-42D7-B3ED-5FF548CA9138}"/>
               </a:ext>
             </a:extLst>
           </p:cNvPr>
@@ -7786,7 +7786,7 @@
           <p:cNvPr id="5" name="s8-identity">
             <a:extLst xmlns:a="http://schemas.openxmlformats.org/drawingml/2006/main">
               <a:ext uri="{FF2B5EF4-FFF2-40B4-BE49-F238E27FC236}">
-                <a16:creationId xmlns:a16="http://schemas.microsoft.com/office/drawing/2014/main" id="{156BC800-C5FE-4F2A-8A7B-FE693B5A74DD}"/>
+                <a16:creationId xmlns:a16="http://schemas.microsoft.com/office/drawing/2014/main" id="{F1F9B1F5-B7B7-433D-A1C6-1698A6F62C18}"/>
               </a:ext>
             </a:extLst>
           </p:cNvPr>
@@ -7844,7 +7844,7 @@
           <p:cNvPr id="6" name="case-title">
             <a:extLst xmlns:a="http://schemas.openxmlformats.org/drawingml/2006/main">
               <a:ext uri="{FF2B5EF4-FFF2-40B4-BE49-F238E27FC236}">
-                <a16:creationId xmlns:a16="http://schemas.microsoft.com/office/drawing/2014/main" id="{85B5A5ED-9710-48FC-954C-5DEA2C0169D5}"/>
+                <a16:creationId xmlns:a16="http://schemas.microsoft.com/office/drawing/2014/main" id="{492B374F-2AC0-4357-A625-AE36446F4E8C}"/>
               </a:ext>
             </a:extLst>
           </p:cNvPr>
@@ -7908,7 +7908,7 @@
           <p:cNvPr id="7" name="case-row-0">
             <a:extLst xmlns:a="http://schemas.openxmlformats.org/drawingml/2006/main">
               <a:ext uri="{FF2B5EF4-FFF2-40B4-BE49-F238E27FC236}">
-                <a16:creationId xmlns:a16="http://schemas.microsoft.com/office/drawing/2014/main" id="{8363DD2D-6F61-4323-B0A4-85CC7F32AB9A}"/>
+                <a16:creationId xmlns:a16="http://schemas.microsoft.com/office/drawing/2014/main" id="{A096B1F8-CF9E-4AE5-95CE-B66E24B8E9DA}"/>
               </a:ext>
             </a:extLst>
           </p:cNvPr>
@@ -7972,7 +7972,7 @@
           <p:cNvPr id="8" name="case-row-1">
             <a:extLst xmlns:a="http://schemas.openxmlformats.org/drawingml/2006/main">
               <a:ext uri="{FF2B5EF4-FFF2-40B4-BE49-F238E27FC236}">
-                <a16:creationId xmlns:a16="http://schemas.microsoft.com/office/drawing/2014/main" id="{42DC549C-8172-41CF-B4CC-8ADE3A184756}"/>
+                <a16:creationId xmlns:a16="http://schemas.microsoft.com/office/drawing/2014/main" id="{310FF9AB-0D13-4225-B2FB-54B723B0CF0F}"/>
               </a:ext>
             </a:extLst>
           </p:cNvPr>
@@ -8036,7 +8036,7 @@
           <p:cNvPr id="9" name="case-row-2">
             <a:extLst xmlns:a="http://schemas.openxmlformats.org/drawingml/2006/main">
               <a:ext uri="{FF2B5EF4-FFF2-40B4-BE49-F238E27FC236}">
-                <a16:creationId xmlns:a16="http://schemas.microsoft.com/office/drawing/2014/main" id="{42966EC2-F7ED-4781-8A67-522F8E67C02D}"/>
+                <a16:creationId xmlns:a16="http://schemas.microsoft.com/office/drawing/2014/main" id="{49B1C095-7F54-4CAA-AA7A-96CDFFC3B8A8}"/>
               </a:ext>
             </a:extLst>
           </p:cNvPr>
@@ -8100,7 +8100,7 @@
           <p:cNvPr id="10" name="case-row-3">
             <a:extLst xmlns:a="http://schemas.openxmlformats.org/drawingml/2006/main">
               <a:ext uri="{FF2B5EF4-FFF2-40B4-BE49-F238E27FC236}">
-                <a16:creationId xmlns:a16="http://schemas.microsoft.com/office/drawing/2014/main" id="{2A5744FA-AEEB-4699-947B-EB35EE5FE8D5}"/>
+                <a16:creationId xmlns:a16="http://schemas.microsoft.com/office/drawing/2014/main" id="{88D0B3EA-01FF-409E-A854-FB0A2A26533D}"/>
               </a:ext>
             </a:extLst>
           </p:cNvPr>
@@ -8164,7 +8164,7 @@
           <p:cNvPr id="11" name="case-row-4">
             <a:extLst xmlns:a="http://schemas.openxmlformats.org/drawingml/2006/main">
               <a:ext uri="{FF2B5EF4-FFF2-40B4-BE49-F238E27FC236}">
-                <a16:creationId xmlns:a16="http://schemas.microsoft.com/office/drawing/2014/main" id="{1ECE3FDD-317A-4995-B8AE-6307038F60D1}"/>
+                <a16:creationId xmlns:a16="http://schemas.microsoft.com/office/drawing/2014/main" id="{8EED53F0-BB67-4BFC-9B3D-D8887E6AC299}"/>
               </a:ext>
             </a:extLst>
           </p:cNvPr>
@@ -8228,7 +8228,7 @@
           <p:cNvPr id="12" name="s8-takeaway-rule">
             <a:extLst xmlns:a="http://schemas.openxmlformats.org/drawingml/2006/main">
               <a:ext uri="{FF2B5EF4-FFF2-40B4-BE49-F238E27FC236}">
-                <a16:creationId xmlns:a16="http://schemas.microsoft.com/office/drawing/2014/main" id="{2C3DD520-F8D1-4735-A543-F6983175324C}"/>
+                <a16:creationId xmlns:a16="http://schemas.microsoft.com/office/drawing/2014/main" id="{4AA57F42-FE57-44F0-B5EE-49F5B5117BE5}"/>
               </a:ext>
             </a:extLst>
           </p:cNvPr>
@@ -8261,7 +8261,7 @@
           <p:cNvPr id="13" name="s8-takeaway">
             <a:extLst xmlns:a="http://schemas.openxmlformats.org/drawingml/2006/main">
               <a:ext uri="{FF2B5EF4-FFF2-40B4-BE49-F238E27FC236}">
-                <a16:creationId xmlns:a16="http://schemas.microsoft.com/office/drawing/2014/main" id="{3C77D63D-762E-49D1-9498-D8BD07FCE2CC}"/>
+                <a16:creationId xmlns:a16="http://schemas.microsoft.com/office/drawing/2014/main" id="{1ECE97D3-453B-4FFC-8AFC-BC7C7C1916E1}"/>
               </a:ext>
             </a:extLst>
           </p:cNvPr>
@@ -8317,7 +8317,7 @@
     </p:spTree>
     <p:extLst>
       <p:ext uri="{BB962C8B-B14F-4D97-AF65-F5344CB8AC3E}">
-        <p14:creationId xmlns:p14="http://schemas.microsoft.com/office/powerpoint/2010/main" val="327327300"/>
+        <p14:creationId xmlns:p14="http://schemas.microsoft.com/office/powerpoint/2010/main" val="450137139"/>
       </p:ext>
     </p:extLst>
   </p:cSld>
@@ -8348,7 +8348,7 @@
           <p:cNvPr id="1" name="s9-rule">
             <a:extLst xmlns:a="http://schemas.openxmlformats.org/drawingml/2006/main">
               <a:ext uri="{FF2B5EF4-FFF2-40B4-BE49-F238E27FC236}">
-                <a16:creationId xmlns:a16="http://schemas.microsoft.com/office/drawing/2014/main" id="{0A70746C-12A3-4105-8560-B5348370C895}"/>
+                <a16:creationId xmlns:a16="http://schemas.microsoft.com/office/drawing/2014/main" id="{BB84B106-82C9-4C92-B008-2803BF3B6B57}"/>
               </a:ext>
             </a:extLst>
           </p:cNvPr>
@@ -8381,7 +8381,7 @@
           <p:cNvPr id="2" name="s9-eyebrow">
             <a:extLst xmlns:a="http://schemas.openxmlformats.org/drawingml/2006/main">
               <a:ext uri="{FF2B5EF4-FFF2-40B4-BE49-F238E27FC236}">
-                <a16:creationId xmlns:a16="http://schemas.microsoft.com/office/drawing/2014/main" id="{8658F8CA-AF33-4936-8AA7-BB90BD273459}"/>
+                <a16:creationId xmlns:a16="http://schemas.microsoft.com/office/drawing/2014/main" id="{187ABF7B-A479-4574-A7AC-1EDEF790C2FD}"/>
               </a:ext>
             </a:extLst>
           </p:cNvPr>
@@ -8439,7 +8439,7 @@
           <p:cNvPr id="3" name="s9-title">
             <a:extLst xmlns:a="http://schemas.openxmlformats.org/drawingml/2006/main">
               <a:ext uri="{FF2B5EF4-FFF2-40B4-BE49-F238E27FC236}">
-                <a16:creationId xmlns:a16="http://schemas.microsoft.com/office/drawing/2014/main" id="{76EDE056-5804-413C-A48B-4D761BA28BB6}"/>
+                <a16:creationId xmlns:a16="http://schemas.microsoft.com/office/drawing/2014/main" id="{C6BBB53E-AA44-49ED-AB44-912410070ED1}"/>
               </a:ext>
             </a:extLst>
           </p:cNvPr>
@@ -8497,7 +8497,7 @@
           <p:cNvPr id="4" name="s9-footer">
             <a:extLst xmlns:a="http://schemas.openxmlformats.org/drawingml/2006/main">
               <a:ext uri="{FF2B5EF4-FFF2-40B4-BE49-F238E27FC236}">
-                <a16:creationId xmlns:a16="http://schemas.microsoft.com/office/drawing/2014/main" id="{61CA8691-6A0F-4A8E-B55E-5E9CF31BC292}"/>
+                <a16:creationId xmlns:a16="http://schemas.microsoft.com/office/drawing/2014/main" id="{921B45F0-1374-41F3-BBE3-F07A3CC8DD0B}"/>
               </a:ext>
             </a:extLst>
           </p:cNvPr>
@@ -8528,7 +8528,7 @@
           <p:cNvPr id="5" name="s9-identity">
             <a:extLst xmlns:a="http://schemas.openxmlformats.org/drawingml/2006/main">
               <a:ext uri="{FF2B5EF4-FFF2-40B4-BE49-F238E27FC236}">
-                <a16:creationId xmlns:a16="http://schemas.microsoft.com/office/drawing/2014/main" id="{45DF7666-1735-45F9-AD42-04F9E3CD1A28}"/>
+                <a16:creationId xmlns:a16="http://schemas.microsoft.com/office/drawing/2014/main" id="{4178252F-2E35-41D9-9575-5E33BB692371}"/>
               </a:ext>
             </a:extLst>
           </p:cNvPr>
@@ -8586,7 +8586,7 @@
           <p:cNvPr id="6" name="practice-circle-0">
             <a:extLst xmlns:a="http://schemas.openxmlformats.org/drawingml/2006/main">
               <a:ext uri="{FF2B5EF4-FFF2-40B4-BE49-F238E27FC236}">
-                <a16:creationId xmlns:a16="http://schemas.microsoft.com/office/drawing/2014/main" id="{A64672D3-9244-4FA9-824A-57A8DB82C85E}"/>
+                <a16:creationId xmlns:a16="http://schemas.microsoft.com/office/drawing/2014/main" id="{B82809CF-628E-4A29-BBE4-70A397001545}"/>
               </a:ext>
             </a:extLst>
           </p:cNvPr>
@@ -8619,7 +8619,7 @@
           <p:cNvPr id="7" name="practice-number-0">
             <a:extLst xmlns:a="http://schemas.openxmlformats.org/drawingml/2006/main">
               <a:ext uri="{FF2B5EF4-FFF2-40B4-BE49-F238E27FC236}">
-                <a16:creationId xmlns:a16="http://schemas.microsoft.com/office/drawing/2014/main" id="{ABF0127C-BC9F-4BE0-A9FD-4C9454401855}"/>
+                <a16:creationId xmlns:a16="http://schemas.microsoft.com/office/drawing/2014/main" id="{1D61E3FC-CA52-48F5-9B60-57F43BC3F3D6}"/>
               </a:ext>
             </a:extLst>
           </p:cNvPr>
@@ -8677,7 +8677,7 @@
           <p:cNvPr id="8" name="practice-item-0">
             <a:extLst xmlns:a="http://schemas.openxmlformats.org/drawingml/2006/main">
               <a:ext uri="{FF2B5EF4-FFF2-40B4-BE49-F238E27FC236}">
-                <a16:creationId xmlns:a16="http://schemas.microsoft.com/office/drawing/2014/main" id="{5E4A8BA9-EE69-4F23-BBDE-EBF5514EA3E5}"/>
+                <a16:creationId xmlns:a16="http://schemas.microsoft.com/office/drawing/2014/main" id="{85400721-1C6C-44E2-80B5-9025AA41C45C}"/>
               </a:ext>
             </a:extLst>
           </p:cNvPr>
@@ -8741,7 +8741,7 @@
           <p:cNvPr id="9" name="practice-connector-0">
             <a:extLst xmlns:a="http://schemas.openxmlformats.org/drawingml/2006/main">
               <a:ext uri="{FF2B5EF4-FFF2-40B4-BE49-F238E27FC236}">
-                <a16:creationId xmlns:a16="http://schemas.microsoft.com/office/drawing/2014/main" id="{DED3D6D9-D732-41B0-8139-D1C1DC5A92C0}"/>
+                <a16:creationId xmlns:a16="http://schemas.microsoft.com/office/drawing/2014/main" id="{1C333AC0-6805-4441-BEC6-521C9A4A74C3}"/>
               </a:ext>
             </a:extLst>
           </p:cNvPr>
@@ -8772,7 +8772,7 @@
           <p:cNvPr id="10" name="practice-circle-1">
             <a:extLst xmlns:a="http://schemas.openxmlformats.org/drawingml/2006/main">
               <a:ext uri="{FF2B5EF4-FFF2-40B4-BE49-F238E27FC236}">
-                <a16:creationId xmlns:a16="http://schemas.microsoft.com/office/drawing/2014/main" id="{C320EBA2-BAD2-42E4-B66F-2D5367882DA7}"/>
+                <a16:creationId xmlns:a16="http://schemas.microsoft.com/office/drawing/2014/main" id="{DB988DA6-26D8-4EF6-9D18-DA291EF9BAB1}"/>
               </a:ext>
             </a:extLst>
           </p:cNvPr>
@@ -8805,7 +8805,7 @@
           <p:cNvPr id="11" name="practice-number-1">
             <a:extLst xmlns:a="http://schemas.openxmlformats.org/drawingml/2006/main">
               <a:ext uri="{FF2B5EF4-FFF2-40B4-BE49-F238E27FC236}">
-                <a16:creationId xmlns:a16="http://schemas.microsoft.com/office/drawing/2014/main" id="{D5BE523C-270A-4097-8C82-F8B7096A68D6}"/>
+                <a16:creationId xmlns:a16="http://schemas.microsoft.com/office/drawing/2014/main" id="{53840AA2-71DB-42D0-B8C3-B3AADFEBC678}"/>
               </a:ext>
             </a:extLst>
           </p:cNvPr>
@@ -8863,7 +8863,7 @@
           <p:cNvPr id="12" name="practice-item-1">
             <a:extLst xmlns:a="http://schemas.openxmlformats.org/drawingml/2006/main">
               <a:ext uri="{FF2B5EF4-FFF2-40B4-BE49-F238E27FC236}">
-                <a16:creationId xmlns:a16="http://schemas.microsoft.com/office/drawing/2014/main" id="{106BCDB7-A8DC-4BB7-97D7-9B0519B988A5}"/>
+                <a16:creationId xmlns:a16="http://schemas.microsoft.com/office/drawing/2014/main" id="{C399CA5B-B31F-4463-BAD2-0885DC436A08}"/>
               </a:ext>
             </a:extLst>
           </p:cNvPr>
@@ -8927,7 +8927,7 @@
           <p:cNvPr id="13" name="practice-connector-1">
             <a:extLst xmlns:a="http://schemas.openxmlformats.org/drawingml/2006/main">
               <a:ext uri="{FF2B5EF4-FFF2-40B4-BE49-F238E27FC236}">
-                <a16:creationId xmlns:a16="http://schemas.microsoft.com/office/drawing/2014/main" id="{ED7E425C-454C-436A-AA25-D28EE6A3B380}"/>
+                <a16:creationId xmlns:a16="http://schemas.microsoft.com/office/drawing/2014/main" id="{F401957D-3303-4AA7-A926-6B9A61BB060B}"/>
               </a:ext>
             </a:extLst>
           </p:cNvPr>
@@ -8958,7 +8958,7 @@
           <p:cNvPr id="14" name="practice-circle-2">
             <a:extLst xmlns:a="http://schemas.openxmlformats.org/drawingml/2006/main">
               <a:ext uri="{FF2B5EF4-FFF2-40B4-BE49-F238E27FC236}">
-                <a16:creationId xmlns:a16="http://schemas.microsoft.com/office/drawing/2014/main" id="{DAFD3910-4B97-4C26-B056-BA30432E3A3D}"/>
+                <a16:creationId xmlns:a16="http://schemas.microsoft.com/office/drawing/2014/main" id="{3A41A96C-104D-4159-BE0A-0EA5190AA748}"/>
               </a:ext>
             </a:extLst>
           </p:cNvPr>
@@ -8991,7 +8991,7 @@
           <p:cNvPr id="15" name="practice-number-2">
             <a:extLst xmlns:a="http://schemas.openxmlformats.org/drawingml/2006/main">
               <a:ext uri="{FF2B5EF4-FFF2-40B4-BE49-F238E27FC236}">
-                <a16:creationId xmlns:a16="http://schemas.microsoft.com/office/drawing/2014/main" id="{1D575F20-858B-4F89-9FC7-76F15605CE91}"/>
+                <a16:creationId xmlns:a16="http://schemas.microsoft.com/office/drawing/2014/main" id="{7AA08ED3-BF68-4269-ABB0-32A55A1970C8}"/>
               </a:ext>
             </a:extLst>
           </p:cNvPr>
@@ -9049,7 +9049,7 @@
           <p:cNvPr id="16" name="practice-item-2">
             <a:extLst xmlns:a="http://schemas.openxmlformats.org/drawingml/2006/main">
               <a:ext uri="{FF2B5EF4-FFF2-40B4-BE49-F238E27FC236}">
-                <a16:creationId xmlns:a16="http://schemas.microsoft.com/office/drawing/2014/main" id="{3FBAF36D-A0C4-4EBA-942E-1553F9FB3BBD}"/>
+                <a16:creationId xmlns:a16="http://schemas.microsoft.com/office/drawing/2014/main" id="{0236A86C-A2AE-4EC0-BF7F-5BFBAEC32079}"/>
               </a:ext>
             </a:extLst>
           </p:cNvPr>
@@ -9111,7 +9111,7 @@
     </p:spTree>
     <p:extLst>
       <p:ext uri="{BB962C8B-B14F-4D97-AF65-F5344CB8AC3E}">
-        <p14:creationId xmlns:p14="http://schemas.microsoft.com/office/powerpoint/2010/main" val="1814544556"/>
+        <p14:creationId xmlns:p14="http://schemas.microsoft.com/office/powerpoint/2010/main" val="1817740547"/>
       </p:ext>
     </p:extLst>
   </p:cSld>

--- a/docs/public/course-assets/course-pptx/em-004.pptx
+++ b/docs/public/course-assets/course-pptx/em-004.pptx
@@ -2,23 +2,23 @@
 <file path=ppt/presentation.xml><?xml version="1.0" encoding="utf-8"?>
 <p:presentation xmlns:p="http://schemas.openxmlformats.org/presentationml/2006/main">
   <p:sldMasterIdLst>
-    <p:sldMasterId xmlns:r="http://schemas.openxmlformats.org/officeDocument/2006/relationships" id="2147483648" r:id="Rf247b51152e94da3"/>
+    <p:sldMasterId xmlns:r="http://schemas.openxmlformats.org/officeDocument/2006/relationships" id="2147483648" r:id="R74ca2cad5b10472c"/>
   </p:sldMasterIdLst>
   <p:notesMasterIdLst>
-    <p:notesMasterId xmlns:r="http://schemas.openxmlformats.org/officeDocument/2006/relationships" r:id="R3a26c17b474d4c53"/>
+    <p:notesMasterId xmlns:r="http://schemas.openxmlformats.org/officeDocument/2006/relationships" r:id="Reed06ea475c84121"/>
   </p:notesMasterIdLst>
   <p:sldIdLst>
-    <p:sldId xmlns:r="http://schemas.openxmlformats.org/officeDocument/2006/relationships" id="256" r:id="R917625980afd43c1"/>
-    <p:sldId xmlns:r="http://schemas.openxmlformats.org/officeDocument/2006/relationships" id="257" r:id="R7e0e5cc36b9c4d1a"/>
-    <p:sldId xmlns:r="http://schemas.openxmlformats.org/officeDocument/2006/relationships" id="258" r:id="R84f2e103a9b24050"/>
-    <p:sldId xmlns:r="http://schemas.openxmlformats.org/officeDocument/2006/relationships" id="259" r:id="Rf505fccc01cf438f"/>
-    <p:sldId xmlns:r="http://schemas.openxmlformats.org/officeDocument/2006/relationships" id="260" r:id="R2b4d4c1e7d5c468a"/>
-    <p:sldId xmlns:r="http://schemas.openxmlformats.org/officeDocument/2006/relationships" id="261" r:id="Rb661d0b2f8a04b8e"/>
-    <p:sldId xmlns:r="http://schemas.openxmlformats.org/officeDocument/2006/relationships" id="262" r:id="R62cffbf204be4a6e"/>
-    <p:sldId xmlns:r="http://schemas.openxmlformats.org/officeDocument/2006/relationships" id="263" r:id="R9ad5c3158321412b"/>
-    <p:sldId xmlns:r="http://schemas.openxmlformats.org/officeDocument/2006/relationships" id="264" r:id="Rd7795c33a26745b7"/>
-    <p:sldId xmlns:r="http://schemas.openxmlformats.org/officeDocument/2006/relationships" id="265" r:id="R5c0b211c0c994bee"/>
-    <p:sldId xmlns:r="http://schemas.openxmlformats.org/officeDocument/2006/relationships" id="266" r:id="R37a803a356ba43f8"/>
+    <p:sldId xmlns:r="http://schemas.openxmlformats.org/officeDocument/2006/relationships" id="256" r:id="Rd7f7172b84f74971"/>
+    <p:sldId xmlns:r="http://schemas.openxmlformats.org/officeDocument/2006/relationships" id="257" r:id="Raf00af9b95564dc9"/>
+    <p:sldId xmlns:r="http://schemas.openxmlformats.org/officeDocument/2006/relationships" id="258" r:id="R51c5f7943f664b1b"/>
+    <p:sldId xmlns:r="http://schemas.openxmlformats.org/officeDocument/2006/relationships" id="259" r:id="R6382e9a4334e44ee"/>
+    <p:sldId xmlns:r="http://schemas.openxmlformats.org/officeDocument/2006/relationships" id="260" r:id="R3821de5cd5e64ad7"/>
+    <p:sldId xmlns:r="http://schemas.openxmlformats.org/officeDocument/2006/relationships" id="261" r:id="R74c03760d7314b87"/>
+    <p:sldId xmlns:r="http://schemas.openxmlformats.org/officeDocument/2006/relationships" id="262" r:id="R1dd4e92273aa4a4a"/>
+    <p:sldId xmlns:r="http://schemas.openxmlformats.org/officeDocument/2006/relationships" id="263" r:id="Re0ba3dc9b6044df0"/>
+    <p:sldId xmlns:r="http://schemas.openxmlformats.org/officeDocument/2006/relationships" id="264" r:id="R7f3a23aac61c4ede"/>
+    <p:sldId xmlns:r="http://schemas.openxmlformats.org/officeDocument/2006/relationships" id="265" r:id="R253942e00955467b"/>
+    <p:sldId xmlns:r="http://schemas.openxmlformats.org/officeDocument/2006/relationships" id="266" r:id="Rd63000cd4eaa4d0a"/>
   </p:sldIdLst>
   <p:sldSz cx="12192000" cy="6858000"/>
   <p:notesSz cx="6858000" cy="9144000"/>
@@ -1271,7 +1271,7 @@
   </p:cSld>
   <p:clrMap bg1="lt1" tx1="dk1" bg2="lt2" tx2="dk2" accent1="accent1" accent2="accent2" accent3="accent3" accent4="accent4" accent5="accent5" accent6="accent6" hlink="hlink" folHlink="folHlink"/>
   <p:sldLayoutIdLst>
-    <p:sldLayoutId xmlns:r="http://schemas.openxmlformats.org/officeDocument/2006/relationships" id="2147483649" r:id="R24c6cb414349430c"/>
+    <p:sldLayoutId xmlns:r="http://schemas.openxmlformats.org/officeDocument/2006/relationships" id="2147483649" r:id="Rbcd92e8185954ad7"/>
   </p:sldLayoutIdLst>
   <p:txStyles>
     <p:titleStyle>
@@ -1822,7 +1822,7 @@
           <p:cNvPr id="1" name="cover-rule">
             <a:extLst xmlns:a="http://schemas.openxmlformats.org/drawingml/2006/main">
               <a:ext uri="{FF2B5EF4-FFF2-40B4-BE49-F238E27FC236}">
-                <a16:creationId xmlns:a16="http://schemas.microsoft.com/office/drawing/2014/main" id="{B51805B0-B5D6-4EF7-87BD-8FFA2FF58685}"/>
+                <a16:creationId xmlns:a16="http://schemas.microsoft.com/office/drawing/2014/main" id="{B6AC80E8-2A06-409F-A98C-4B6BF80817B9}"/>
               </a:ext>
             </a:extLst>
           </p:cNvPr>
@@ -1855,7 +1855,7 @@
           <p:cNvPr id="2" name="cover-ring-1">
             <a:extLst xmlns:a="http://schemas.openxmlformats.org/drawingml/2006/main">
               <a:ext uri="{FF2B5EF4-FFF2-40B4-BE49-F238E27FC236}">
-                <a16:creationId xmlns:a16="http://schemas.microsoft.com/office/drawing/2014/main" id="{2376AA40-D37A-4BF2-A078-0456A801A0A6}"/>
+                <a16:creationId xmlns:a16="http://schemas.microsoft.com/office/drawing/2014/main" id="{D54FCBF7-67A5-4907-A7EF-4AA0430517DE}"/>
               </a:ext>
             </a:extLst>
           </p:cNvPr>
@@ -1886,7 +1886,7 @@
           <p:cNvPr id="3" name="cover-ring-2">
             <a:extLst xmlns:a="http://schemas.openxmlformats.org/drawingml/2006/main">
               <a:ext uri="{FF2B5EF4-FFF2-40B4-BE49-F238E27FC236}">
-                <a16:creationId xmlns:a16="http://schemas.microsoft.com/office/drawing/2014/main" id="{C2A047AF-C2AD-4D6D-9822-65ECCC229C83}"/>
+                <a16:creationId xmlns:a16="http://schemas.microsoft.com/office/drawing/2014/main" id="{C47C7D4D-8556-467E-924D-FE24BE73DB9C}"/>
               </a:ext>
             </a:extLst>
           </p:cNvPr>
@@ -1917,7 +1917,7 @@
           <p:cNvPr id="4" name="cover-core">
             <a:extLst xmlns:a="http://schemas.openxmlformats.org/drawingml/2006/main">
               <a:ext uri="{FF2B5EF4-FFF2-40B4-BE49-F238E27FC236}">
-                <a16:creationId xmlns:a16="http://schemas.microsoft.com/office/drawing/2014/main" id="{9A6C5996-DCCF-41C1-B43B-42D2A0733B4C}"/>
+                <a16:creationId xmlns:a16="http://schemas.microsoft.com/office/drawing/2014/main" id="{24508BCA-58F6-4E16-8336-99FC40E61007}"/>
               </a:ext>
             </a:extLst>
           </p:cNvPr>
@@ -1950,7 +1950,7 @@
           <p:cNvPr id="5" name="cover-line-1">
             <a:extLst xmlns:a="http://schemas.openxmlformats.org/drawingml/2006/main">
               <a:ext uri="{FF2B5EF4-FFF2-40B4-BE49-F238E27FC236}">
-                <a16:creationId xmlns:a16="http://schemas.microsoft.com/office/drawing/2014/main" id="{D8C1D6BE-D587-41C2-B3AB-FAE6D5EE86A7}"/>
+                <a16:creationId xmlns:a16="http://schemas.microsoft.com/office/drawing/2014/main" id="{84D9F3DC-7336-4C2C-9195-0483329DB540}"/>
               </a:ext>
             </a:extLst>
           </p:cNvPr>
@@ -1981,7 +1981,7 @@
           <p:cNvPr id="6" name="cover-line-2">
             <a:extLst xmlns:a="http://schemas.openxmlformats.org/drawingml/2006/main">
               <a:ext uri="{FF2B5EF4-FFF2-40B4-BE49-F238E27FC236}">
-                <a16:creationId xmlns:a16="http://schemas.microsoft.com/office/drawing/2014/main" id="{0AC9A469-CBBE-4BD3-9E68-82ED3476A806}"/>
+                <a16:creationId xmlns:a16="http://schemas.microsoft.com/office/drawing/2014/main" id="{9949C726-1F58-4E53-B82E-BC819E316518}"/>
               </a:ext>
             </a:extLst>
           </p:cNvPr>
@@ -2012,7 +2012,7 @@
           <p:cNvPr id="7" name="cover-eyebrow">
             <a:extLst xmlns:a="http://schemas.openxmlformats.org/drawingml/2006/main">
               <a:ext uri="{FF2B5EF4-FFF2-40B4-BE49-F238E27FC236}">
-                <a16:creationId xmlns:a16="http://schemas.microsoft.com/office/drawing/2014/main" id="{4774423E-8764-4145-B810-D280E45B2285}"/>
+                <a16:creationId xmlns:a16="http://schemas.microsoft.com/office/drawing/2014/main" id="{6BBE1087-C715-4B58-816B-38D3B382002D}"/>
               </a:ext>
             </a:extLst>
           </p:cNvPr>
@@ -2070,7 +2070,7 @@
           <p:cNvPr id="8" name="cover-title">
             <a:extLst xmlns:a="http://schemas.openxmlformats.org/drawingml/2006/main">
               <a:ext uri="{FF2B5EF4-FFF2-40B4-BE49-F238E27FC236}">
-                <a16:creationId xmlns:a16="http://schemas.microsoft.com/office/drawing/2014/main" id="{87F016A9-B35A-4EC6-9507-A8BD41031CAF}"/>
+                <a16:creationId xmlns:a16="http://schemas.microsoft.com/office/drawing/2014/main" id="{3A4D7013-AFA2-422B-BBD4-E39E2511AB4C}"/>
               </a:ext>
             </a:extLst>
           </p:cNvPr>
@@ -2128,7 +2128,7 @@
           <p:cNvPr id="9" name="cover-subtitle">
             <a:extLst xmlns:a="http://schemas.openxmlformats.org/drawingml/2006/main">
               <a:ext uri="{FF2B5EF4-FFF2-40B4-BE49-F238E27FC236}">
-                <a16:creationId xmlns:a16="http://schemas.microsoft.com/office/drawing/2014/main" id="{062255AE-0B68-4150-9F06-27C590BBD7B4}"/>
+                <a16:creationId xmlns:a16="http://schemas.microsoft.com/office/drawing/2014/main" id="{55B73E67-BAD3-445D-9AF2-4ABEFB54DFB9}"/>
               </a:ext>
             </a:extLst>
           </p:cNvPr>
@@ -2190,7 +2190,7 @@
           <p:cNvPr id="10" name="cover-lead">
             <a:extLst xmlns:a="http://schemas.openxmlformats.org/drawingml/2006/main">
               <a:ext uri="{FF2B5EF4-FFF2-40B4-BE49-F238E27FC236}">
-                <a16:creationId xmlns:a16="http://schemas.microsoft.com/office/drawing/2014/main" id="{8FA46B7A-C61F-43E0-8DC5-E803B37B266D}"/>
+                <a16:creationId xmlns:a16="http://schemas.microsoft.com/office/drawing/2014/main" id="{501C04A3-E397-4A78-B827-D83FA09B1E1C}"/>
               </a:ext>
             </a:extLst>
           </p:cNvPr>
@@ -2248,7 +2248,7 @@
           <p:cNvPr id="11" name="cover-course">
             <a:extLst xmlns:a="http://schemas.openxmlformats.org/drawingml/2006/main">
               <a:ext uri="{FF2B5EF4-FFF2-40B4-BE49-F238E27FC236}">
-                <a16:creationId xmlns:a16="http://schemas.microsoft.com/office/drawing/2014/main" id="{93F1D905-2CA3-4F00-A543-5C3D3AC16F8A}"/>
+                <a16:creationId xmlns:a16="http://schemas.microsoft.com/office/drawing/2014/main" id="{EBE72B48-A140-44EE-9D05-005E87DA465F}"/>
               </a:ext>
             </a:extLst>
           </p:cNvPr>
@@ -2306,7 +2306,7 @@
           <p:cNvPr id="12" name="cover-id">
             <a:extLst xmlns:a="http://schemas.openxmlformats.org/drawingml/2006/main">
               <a:ext uri="{FF2B5EF4-FFF2-40B4-BE49-F238E27FC236}">
-                <a16:creationId xmlns:a16="http://schemas.microsoft.com/office/drawing/2014/main" id="{496A2B92-85D5-44F9-A084-EEA699A8E49E}"/>
+                <a16:creationId xmlns:a16="http://schemas.microsoft.com/office/drawing/2014/main" id="{B914B9F6-B47D-4243-80D0-E2D77A69C39E}"/>
               </a:ext>
             </a:extLst>
           </p:cNvPr>
@@ -2362,7 +2362,7 @@
     </p:spTree>
     <p:extLst>
       <p:ext uri="{BB962C8B-B14F-4D97-AF65-F5344CB8AC3E}">
-        <p14:creationId xmlns:p14="http://schemas.microsoft.com/office/powerpoint/2010/main" val="587671619"/>
+        <p14:creationId xmlns:p14="http://schemas.microsoft.com/office/powerpoint/2010/main" val="204014646"/>
       </p:ext>
     </p:extLst>
   </p:cSld>
@@ -2393,7 +2393,7 @@
           <p:cNvPr id="1" name="s10-rule">
             <a:extLst xmlns:a="http://schemas.openxmlformats.org/drawingml/2006/main">
               <a:ext uri="{FF2B5EF4-FFF2-40B4-BE49-F238E27FC236}">
-                <a16:creationId xmlns:a16="http://schemas.microsoft.com/office/drawing/2014/main" id="{04255118-A8AE-4008-9929-26455E013B2B}"/>
+                <a16:creationId xmlns:a16="http://schemas.microsoft.com/office/drawing/2014/main" id="{72593599-E7D1-4D53-A829-7DDABED6DD32}"/>
               </a:ext>
             </a:extLst>
           </p:cNvPr>
@@ -2426,7 +2426,7 @@
           <p:cNvPr id="2" name="s10-eyebrow">
             <a:extLst xmlns:a="http://schemas.openxmlformats.org/drawingml/2006/main">
               <a:ext uri="{FF2B5EF4-FFF2-40B4-BE49-F238E27FC236}">
-                <a16:creationId xmlns:a16="http://schemas.microsoft.com/office/drawing/2014/main" id="{E9628935-C1E2-48F0-9DE5-D0F73D36849F}"/>
+                <a16:creationId xmlns:a16="http://schemas.microsoft.com/office/drawing/2014/main" id="{F8236268-B3CC-4971-BEAC-CC851C7D7A37}"/>
               </a:ext>
             </a:extLst>
           </p:cNvPr>
@@ -2484,7 +2484,7 @@
           <p:cNvPr id="3" name="s10-title">
             <a:extLst xmlns:a="http://schemas.openxmlformats.org/drawingml/2006/main">
               <a:ext uri="{FF2B5EF4-FFF2-40B4-BE49-F238E27FC236}">
-                <a16:creationId xmlns:a16="http://schemas.microsoft.com/office/drawing/2014/main" id="{A32C0E23-F625-411A-9E49-7CACD9E76D31}"/>
+                <a16:creationId xmlns:a16="http://schemas.microsoft.com/office/drawing/2014/main" id="{2601A179-5628-4FAF-B71A-A0905B94E879}"/>
               </a:ext>
             </a:extLst>
           </p:cNvPr>
@@ -2542,7 +2542,7 @@
           <p:cNvPr id="4" name="s10-footer">
             <a:extLst xmlns:a="http://schemas.openxmlformats.org/drawingml/2006/main">
               <a:ext uri="{FF2B5EF4-FFF2-40B4-BE49-F238E27FC236}">
-                <a16:creationId xmlns:a16="http://schemas.microsoft.com/office/drawing/2014/main" id="{05D1DE17-FE86-42EF-A788-AFA213AF871A}"/>
+                <a16:creationId xmlns:a16="http://schemas.microsoft.com/office/drawing/2014/main" id="{723F21DA-ABDB-4EFC-8604-662F1480A02F}"/>
               </a:ext>
             </a:extLst>
           </p:cNvPr>
@@ -2573,7 +2573,7 @@
           <p:cNvPr id="5" name="s10-identity">
             <a:extLst xmlns:a="http://schemas.openxmlformats.org/drawingml/2006/main">
               <a:ext uri="{FF2B5EF4-FFF2-40B4-BE49-F238E27FC236}">
-                <a16:creationId xmlns:a16="http://schemas.microsoft.com/office/drawing/2014/main" id="{B657533C-9485-4DD4-BDA5-4D52AE8AA9AC}"/>
+                <a16:creationId xmlns:a16="http://schemas.microsoft.com/office/drawing/2014/main" id="{C0D69D9F-C304-4635-A58F-B8E8EFCD2C77}"/>
               </a:ext>
             </a:extLst>
           </p:cNvPr>
@@ -2631,7 +2631,7 @@
           <p:cNvPr id="6" name="recap-circle-0">
             <a:extLst xmlns:a="http://schemas.openxmlformats.org/drawingml/2006/main">
               <a:ext uri="{FF2B5EF4-FFF2-40B4-BE49-F238E27FC236}">
-                <a16:creationId xmlns:a16="http://schemas.microsoft.com/office/drawing/2014/main" id="{62E9CA11-4931-4600-B2DD-47610CCBC2DD}"/>
+                <a16:creationId xmlns:a16="http://schemas.microsoft.com/office/drawing/2014/main" id="{A9493FF3-5824-49D2-82F7-5BD648D9C0CD}"/>
               </a:ext>
             </a:extLst>
           </p:cNvPr>
@@ -2664,7 +2664,7 @@
           <p:cNvPr id="7" name="recap-number-0">
             <a:extLst xmlns:a="http://schemas.openxmlformats.org/drawingml/2006/main">
               <a:ext uri="{FF2B5EF4-FFF2-40B4-BE49-F238E27FC236}">
-                <a16:creationId xmlns:a16="http://schemas.microsoft.com/office/drawing/2014/main" id="{4609B029-8FCD-42C3-AACD-4645BBEF3F12}"/>
+                <a16:creationId xmlns:a16="http://schemas.microsoft.com/office/drawing/2014/main" id="{24127F87-86D6-43CB-89FD-DC36200AAFD0}"/>
               </a:ext>
             </a:extLst>
           </p:cNvPr>
@@ -2722,7 +2722,7 @@
           <p:cNvPr id="8" name="recap-item-0">
             <a:extLst xmlns:a="http://schemas.openxmlformats.org/drawingml/2006/main">
               <a:ext uri="{FF2B5EF4-FFF2-40B4-BE49-F238E27FC236}">
-                <a16:creationId xmlns:a16="http://schemas.microsoft.com/office/drawing/2014/main" id="{CAF69229-BEBE-43F4-B434-2033851817BE}"/>
+                <a16:creationId xmlns:a16="http://schemas.microsoft.com/office/drawing/2014/main" id="{F29EAC25-20B6-421D-9795-EDD09722E113}"/>
               </a:ext>
             </a:extLst>
           </p:cNvPr>
@@ -2786,7 +2786,7 @@
           <p:cNvPr id="9" name="recap-connector-0">
             <a:extLst xmlns:a="http://schemas.openxmlformats.org/drawingml/2006/main">
               <a:ext uri="{FF2B5EF4-FFF2-40B4-BE49-F238E27FC236}">
-                <a16:creationId xmlns:a16="http://schemas.microsoft.com/office/drawing/2014/main" id="{9979044A-A442-4710-893A-C37090D32CD2}"/>
+                <a16:creationId xmlns:a16="http://schemas.microsoft.com/office/drawing/2014/main" id="{5DBF99D5-80AE-4E63-AEA1-602A571E5F70}"/>
               </a:ext>
             </a:extLst>
           </p:cNvPr>
@@ -2817,7 +2817,7 @@
           <p:cNvPr id="10" name="recap-circle-1">
             <a:extLst xmlns:a="http://schemas.openxmlformats.org/drawingml/2006/main">
               <a:ext uri="{FF2B5EF4-FFF2-40B4-BE49-F238E27FC236}">
-                <a16:creationId xmlns:a16="http://schemas.microsoft.com/office/drawing/2014/main" id="{CF748DDC-CB14-4073-9570-7B48ACD9D217}"/>
+                <a16:creationId xmlns:a16="http://schemas.microsoft.com/office/drawing/2014/main" id="{BF318182-0BEE-4F62-8937-920A5F397FCC}"/>
               </a:ext>
             </a:extLst>
           </p:cNvPr>
@@ -2850,7 +2850,7 @@
           <p:cNvPr id="11" name="recap-number-1">
             <a:extLst xmlns:a="http://schemas.openxmlformats.org/drawingml/2006/main">
               <a:ext uri="{FF2B5EF4-FFF2-40B4-BE49-F238E27FC236}">
-                <a16:creationId xmlns:a16="http://schemas.microsoft.com/office/drawing/2014/main" id="{42CF9643-8048-4CE7-BC50-BC463D612E6C}"/>
+                <a16:creationId xmlns:a16="http://schemas.microsoft.com/office/drawing/2014/main" id="{E862BE77-3499-476D-806C-B3CF9CB9F5A9}"/>
               </a:ext>
             </a:extLst>
           </p:cNvPr>
@@ -2908,7 +2908,7 @@
           <p:cNvPr id="12" name="recap-item-1">
             <a:extLst xmlns:a="http://schemas.openxmlformats.org/drawingml/2006/main">
               <a:ext uri="{FF2B5EF4-FFF2-40B4-BE49-F238E27FC236}">
-                <a16:creationId xmlns:a16="http://schemas.microsoft.com/office/drawing/2014/main" id="{F8CB47E9-F8B4-40A3-9367-50F6FA7588DB}"/>
+                <a16:creationId xmlns:a16="http://schemas.microsoft.com/office/drawing/2014/main" id="{C6CC91D0-7907-4003-9B12-5863C3DC1FB1}"/>
               </a:ext>
             </a:extLst>
           </p:cNvPr>
@@ -2972,7 +2972,7 @@
           <p:cNvPr id="13" name="recap-connector-1">
             <a:extLst xmlns:a="http://schemas.openxmlformats.org/drawingml/2006/main">
               <a:ext uri="{FF2B5EF4-FFF2-40B4-BE49-F238E27FC236}">
-                <a16:creationId xmlns:a16="http://schemas.microsoft.com/office/drawing/2014/main" id="{5628C367-1B3F-4234-A68A-CAAA6152617F}"/>
+                <a16:creationId xmlns:a16="http://schemas.microsoft.com/office/drawing/2014/main" id="{834EBF89-5A9B-4537-B422-0F20917C8A95}"/>
               </a:ext>
             </a:extLst>
           </p:cNvPr>
@@ -3003,7 +3003,7 @@
           <p:cNvPr id="14" name="recap-circle-2">
             <a:extLst xmlns:a="http://schemas.openxmlformats.org/drawingml/2006/main">
               <a:ext uri="{FF2B5EF4-FFF2-40B4-BE49-F238E27FC236}">
-                <a16:creationId xmlns:a16="http://schemas.microsoft.com/office/drawing/2014/main" id="{B7F8F29E-1FB1-4DEB-BF18-B53B84ACA707}"/>
+                <a16:creationId xmlns:a16="http://schemas.microsoft.com/office/drawing/2014/main" id="{89E22761-13F7-4DEF-8865-8B064C00D60D}"/>
               </a:ext>
             </a:extLst>
           </p:cNvPr>
@@ -3036,7 +3036,7 @@
           <p:cNvPr id="15" name="recap-number-2">
             <a:extLst xmlns:a="http://schemas.openxmlformats.org/drawingml/2006/main">
               <a:ext uri="{FF2B5EF4-FFF2-40B4-BE49-F238E27FC236}">
-                <a16:creationId xmlns:a16="http://schemas.microsoft.com/office/drawing/2014/main" id="{0202AC4D-0C94-4BDE-9EC9-17EEF960652E}"/>
+                <a16:creationId xmlns:a16="http://schemas.microsoft.com/office/drawing/2014/main" id="{33F77E73-EB6C-4B5D-BAEA-6559DAE5F0EF}"/>
               </a:ext>
             </a:extLst>
           </p:cNvPr>
@@ -3094,7 +3094,7 @@
           <p:cNvPr id="16" name="recap-item-2">
             <a:extLst xmlns:a="http://schemas.openxmlformats.org/drawingml/2006/main">
               <a:ext uri="{FF2B5EF4-FFF2-40B4-BE49-F238E27FC236}">
-                <a16:creationId xmlns:a16="http://schemas.microsoft.com/office/drawing/2014/main" id="{DBB2794F-051D-4933-A5B8-210A3F962FE3}"/>
+                <a16:creationId xmlns:a16="http://schemas.microsoft.com/office/drawing/2014/main" id="{1BD9C419-A350-4744-9DB7-579634F55A7E}"/>
               </a:ext>
             </a:extLst>
           </p:cNvPr>
@@ -3156,7 +3156,7 @@
     </p:spTree>
     <p:extLst>
       <p:ext uri="{BB962C8B-B14F-4D97-AF65-F5344CB8AC3E}">
-        <p14:creationId xmlns:p14="http://schemas.microsoft.com/office/powerpoint/2010/main" val="291024767"/>
+        <p14:creationId xmlns:p14="http://schemas.microsoft.com/office/powerpoint/2010/main" val="301385542"/>
       </p:ext>
     </p:extLst>
   </p:cSld>
@@ -3187,7 +3187,7 @@
           <p:cNvPr id="1" name="s11-rule">
             <a:extLst xmlns:a="http://schemas.openxmlformats.org/drawingml/2006/main">
               <a:ext uri="{FF2B5EF4-FFF2-40B4-BE49-F238E27FC236}">
-                <a16:creationId xmlns:a16="http://schemas.microsoft.com/office/drawing/2014/main" id="{72946826-C9EC-468A-B6DF-50ACA8BC854F}"/>
+                <a16:creationId xmlns:a16="http://schemas.microsoft.com/office/drawing/2014/main" id="{622319EE-3CF7-4D5A-8913-801E35C5713B}"/>
               </a:ext>
             </a:extLst>
           </p:cNvPr>
@@ -3220,7 +3220,7 @@
           <p:cNvPr id="2" name="s11-eyebrow">
             <a:extLst xmlns:a="http://schemas.openxmlformats.org/drawingml/2006/main">
               <a:ext uri="{FF2B5EF4-FFF2-40B4-BE49-F238E27FC236}">
-                <a16:creationId xmlns:a16="http://schemas.microsoft.com/office/drawing/2014/main" id="{AFFE1E97-9998-4366-AA8A-2E1520741A7C}"/>
+                <a16:creationId xmlns:a16="http://schemas.microsoft.com/office/drawing/2014/main" id="{8791F14F-9C7A-4220-8FE3-3277A04830E7}"/>
               </a:ext>
             </a:extLst>
           </p:cNvPr>
@@ -3278,7 +3278,7 @@
           <p:cNvPr id="3" name="s11-title">
             <a:extLst xmlns:a="http://schemas.openxmlformats.org/drawingml/2006/main">
               <a:ext uri="{FF2B5EF4-FFF2-40B4-BE49-F238E27FC236}">
-                <a16:creationId xmlns:a16="http://schemas.microsoft.com/office/drawing/2014/main" id="{F40F393C-BEA8-4DA5-A252-DFA3A3211D02}"/>
+                <a16:creationId xmlns:a16="http://schemas.microsoft.com/office/drawing/2014/main" id="{77FE8C60-A23C-45B1-A239-96D95DA0C24E}"/>
               </a:ext>
             </a:extLst>
           </p:cNvPr>
@@ -3336,7 +3336,7 @@
           <p:cNvPr id="4" name="s11-footer">
             <a:extLst xmlns:a="http://schemas.openxmlformats.org/drawingml/2006/main">
               <a:ext uri="{FF2B5EF4-FFF2-40B4-BE49-F238E27FC236}">
-                <a16:creationId xmlns:a16="http://schemas.microsoft.com/office/drawing/2014/main" id="{8D841CF8-3A1F-4892-B260-9AB74C3BF567}"/>
+                <a16:creationId xmlns:a16="http://schemas.microsoft.com/office/drawing/2014/main" id="{E319E6CC-708C-448C-9ED8-BA9307F63550}"/>
               </a:ext>
             </a:extLst>
           </p:cNvPr>
@@ -3367,7 +3367,7 @@
           <p:cNvPr id="5" name="s11-identity">
             <a:extLst xmlns:a="http://schemas.openxmlformats.org/drawingml/2006/main">
               <a:ext uri="{FF2B5EF4-FFF2-40B4-BE49-F238E27FC236}">
-                <a16:creationId xmlns:a16="http://schemas.microsoft.com/office/drawing/2014/main" id="{5E187305-9917-43E6-9241-4CBCAF2DA33E}"/>
+                <a16:creationId xmlns:a16="http://schemas.microsoft.com/office/drawing/2014/main" id="{C103C0E3-0641-4FED-96A3-868FBEBC3695}"/>
               </a:ext>
             </a:extLst>
           </p:cNvPr>
@@ -3425,7 +3425,7 @@
           <p:cNvPr id="6" name="source-0">
             <a:extLst xmlns:a="http://schemas.openxmlformats.org/drawingml/2006/main">
               <a:ext uri="{FF2B5EF4-FFF2-40B4-BE49-F238E27FC236}">
-                <a16:creationId xmlns:a16="http://schemas.microsoft.com/office/drawing/2014/main" id="{E331FDE0-0C2C-4851-8DFE-32250BF41FFE}"/>
+                <a16:creationId xmlns:a16="http://schemas.microsoft.com/office/drawing/2014/main" id="{0FAE5C6B-42B9-49CD-AB93-5EE55E0DFD76}"/>
               </a:ext>
             </a:extLst>
           </p:cNvPr>
@@ -3489,7 +3489,7 @@
           <p:cNvPr id="7" name="source-1">
             <a:extLst xmlns:a="http://schemas.openxmlformats.org/drawingml/2006/main">
               <a:ext uri="{FF2B5EF4-FFF2-40B4-BE49-F238E27FC236}">
-                <a16:creationId xmlns:a16="http://schemas.microsoft.com/office/drawing/2014/main" id="{7B9E3829-F685-4C4A-9F6F-C529CDE3D8A3}"/>
+                <a16:creationId xmlns:a16="http://schemas.microsoft.com/office/drawing/2014/main" id="{A1D2C541-F4BD-43B4-AB98-A120AF6542C3}"/>
               </a:ext>
             </a:extLst>
           </p:cNvPr>
@@ -3553,7 +3553,7 @@
           <p:cNvPr id="8" name="source-2">
             <a:extLst xmlns:a="http://schemas.openxmlformats.org/drawingml/2006/main">
               <a:ext uri="{FF2B5EF4-FFF2-40B4-BE49-F238E27FC236}">
-                <a16:creationId xmlns:a16="http://schemas.microsoft.com/office/drawing/2014/main" id="{BC3591AD-45DD-4D4B-89F9-E9CCAB07C5DC}"/>
+                <a16:creationId xmlns:a16="http://schemas.microsoft.com/office/drawing/2014/main" id="{02997744-D850-4FC6-9B40-E03C06C974B1}"/>
               </a:ext>
             </a:extLst>
           </p:cNvPr>
@@ -3617,7 +3617,7 @@
           <p:cNvPr id="9" name="source-3">
             <a:extLst xmlns:a="http://schemas.openxmlformats.org/drawingml/2006/main">
               <a:ext uri="{FF2B5EF4-FFF2-40B4-BE49-F238E27FC236}">
-                <a16:creationId xmlns:a16="http://schemas.microsoft.com/office/drawing/2014/main" id="{79147ADD-B62E-4CF5-B8F7-AD39875CE2E2}"/>
+                <a16:creationId xmlns:a16="http://schemas.microsoft.com/office/drawing/2014/main" id="{3C199FBB-6D75-4CC9-8D70-B2C111133419}"/>
               </a:ext>
             </a:extLst>
           </p:cNvPr>
@@ -3681,7 +3681,7 @@
           <p:cNvPr id="10" name="source-4">
             <a:extLst xmlns:a="http://schemas.openxmlformats.org/drawingml/2006/main">
               <a:ext uri="{FF2B5EF4-FFF2-40B4-BE49-F238E27FC236}">
-                <a16:creationId xmlns:a16="http://schemas.microsoft.com/office/drawing/2014/main" id="{1E8394E9-1827-475E-81EA-E6208C139116}"/>
+                <a16:creationId xmlns:a16="http://schemas.microsoft.com/office/drawing/2014/main" id="{75B347EF-AA7F-41AC-87C7-C609447CF21E}"/>
               </a:ext>
             </a:extLst>
           </p:cNvPr>
@@ -3745,7 +3745,7 @@
           <p:cNvPr id="11" name="s11-takeaway-rule">
             <a:extLst xmlns:a="http://schemas.openxmlformats.org/drawingml/2006/main">
               <a:ext uri="{FF2B5EF4-FFF2-40B4-BE49-F238E27FC236}">
-                <a16:creationId xmlns:a16="http://schemas.microsoft.com/office/drawing/2014/main" id="{91DA0355-F575-4F3C-B4AA-2D818EA73459}"/>
+                <a16:creationId xmlns:a16="http://schemas.microsoft.com/office/drawing/2014/main" id="{DF2D4A50-FABA-45B0-BD8E-8BBCA3FE7DC5}"/>
               </a:ext>
             </a:extLst>
           </p:cNvPr>
@@ -3778,7 +3778,7 @@
           <p:cNvPr id="12" name="s11-takeaway">
             <a:extLst xmlns:a="http://schemas.openxmlformats.org/drawingml/2006/main">
               <a:ext uri="{FF2B5EF4-FFF2-40B4-BE49-F238E27FC236}">
-                <a16:creationId xmlns:a16="http://schemas.microsoft.com/office/drawing/2014/main" id="{1CAC8F0C-8043-4049-88C3-4FF0630D1BE7}"/>
+                <a16:creationId xmlns:a16="http://schemas.microsoft.com/office/drawing/2014/main" id="{E881C6A4-6B1E-491C-9EF0-CFDA7F7A35F9}"/>
               </a:ext>
             </a:extLst>
           </p:cNvPr>
@@ -3803,7 +3803,7 @@
         </p:spPr>
         <p:txBody>
           <a:bodyPr xmlns:a="http://schemas.openxmlformats.org/drawingml/2006/main" lIns="0" tIns="0" rIns="0" bIns="0" anchor="ctr">
-            <a:normAutofit fontScale="95911"/>
+            <a:normAutofit fontScale="100000"/>
           </a:bodyPr>
           <a:lstStyle xmlns:a="http://schemas.openxmlformats.org/drawingml/2006/main"/>
           <a:p xmlns:a="http://schemas.openxmlformats.org/drawingml/2006/main">
@@ -3826,7 +3826,7 @@
                 <a:ea typeface="PingFang SC"/>
                 <a:cs typeface="PingFang SC"/>
               </a:rPr>
-              <a:t>课程精编页用于讲授主线；播放器中的“原课件”模式保留团队 PowerPoint 精选页、真实图片和可播放视频。</a:t>
+              <a:t>课程正文与幻灯片共享同一知识主线，图片和视频用于帮助理解本节概念与案例。</a:t>
             </a:r>
           </a:p>
         </p:txBody>
@@ -3834,7 +3834,7 @@
     </p:spTree>
     <p:extLst>
       <p:ext uri="{BB962C8B-B14F-4D97-AF65-F5344CB8AC3E}">
-        <p14:creationId xmlns:p14="http://schemas.microsoft.com/office/powerpoint/2010/main" val="1042841013"/>
+        <p14:creationId xmlns:p14="http://schemas.microsoft.com/office/powerpoint/2010/main" val="946757592"/>
       </p:ext>
     </p:extLst>
   </p:cSld>
@@ -3865,7 +3865,7 @@
           <p:cNvPr id="1" name="s2-rule">
             <a:extLst xmlns:a="http://schemas.openxmlformats.org/drawingml/2006/main">
               <a:ext uri="{FF2B5EF4-FFF2-40B4-BE49-F238E27FC236}">
-                <a16:creationId xmlns:a16="http://schemas.microsoft.com/office/drawing/2014/main" id="{3DC37798-4BFE-46C1-A534-0FC6FC1BC97E}"/>
+                <a16:creationId xmlns:a16="http://schemas.microsoft.com/office/drawing/2014/main" id="{E17C6708-219B-4D08-B7CB-A5F2261A1EF6}"/>
               </a:ext>
             </a:extLst>
           </p:cNvPr>
@@ -3898,7 +3898,7 @@
           <p:cNvPr id="2" name="s2-eyebrow">
             <a:extLst xmlns:a="http://schemas.openxmlformats.org/drawingml/2006/main">
               <a:ext uri="{FF2B5EF4-FFF2-40B4-BE49-F238E27FC236}">
-                <a16:creationId xmlns:a16="http://schemas.microsoft.com/office/drawing/2014/main" id="{0F15031A-9130-4378-A584-131920F73A94}"/>
+                <a16:creationId xmlns:a16="http://schemas.microsoft.com/office/drawing/2014/main" id="{7FAFF045-3169-48D2-A3E4-0426E47DAB42}"/>
               </a:ext>
             </a:extLst>
           </p:cNvPr>
@@ -3956,7 +3956,7 @@
           <p:cNvPr id="3" name="s2-title">
             <a:extLst xmlns:a="http://schemas.openxmlformats.org/drawingml/2006/main">
               <a:ext uri="{FF2B5EF4-FFF2-40B4-BE49-F238E27FC236}">
-                <a16:creationId xmlns:a16="http://schemas.microsoft.com/office/drawing/2014/main" id="{31856D9B-EF36-4EDF-99B9-BE2F44299AE6}"/>
+                <a16:creationId xmlns:a16="http://schemas.microsoft.com/office/drawing/2014/main" id="{8DEBCC8C-34C4-44CD-B27E-454F8D7C461F}"/>
               </a:ext>
             </a:extLst>
           </p:cNvPr>
@@ -4014,7 +4014,7 @@
           <p:cNvPr id="4" name="s2-footer">
             <a:extLst xmlns:a="http://schemas.openxmlformats.org/drawingml/2006/main">
               <a:ext uri="{FF2B5EF4-FFF2-40B4-BE49-F238E27FC236}">
-                <a16:creationId xmlns:a16="http://schemas.microsoft.com/office/drawing/2014/main" id="{BE7F1330-D559-44F5-8382-59081C71EA51}"/>
+                <a16:creationId xmlns:a16="http://schemas.microsoft.com/office/drawing/2014/main" id="{5DF595CF-1447-404E-AAD2-F0E2F6E038AC}"/>
               </a:ext>
             </a:extLst>
           </p:cNvPr>
@@ -4045,7 +4045,7 @@
           <p:cNvPr id="5" name="s2-identity">
             <a:extLst xmlns:a="http://schemas.openxmlformats.org/drawingml/2006/main">
               <a:ext uri="{FF2B5EF4-FFF2-40B4-BE49-F238E27FC236}">
-                <a16:creationId xmlns:a16="http://schemas.microsoft.com/office/drawing/2014/main" id="{DA833169-729E-412D-8361-425C2DF1ABE2}"/>
+                <a16:creationId xmlns:a16="http://schemas.microsoft.com/office/drawing/2014/main" id="{8BCDE347-2CA2-4EED-A34B-F213878FBD03}"/>
               </a:ext>
             </a:extLst>
           </p:cNvPr>
@@ -4103,7 +4103,7 @@
           <p:cNvPr id="6" name="objective-1">
             <a:extLst xmlns:a="http://schemas.openxmlformats.org/drawingml/2006/main">
               <a:ext uri="{FF2B5EF4-FFF2-40B4-BE49-F238E27FC236}">
-                <a16:creationId xmlns:a16="http://schemas.microsoft.com/office/drawing/2014/main" id="{FEF47824-298E-4F20-8FC7-B37729C9D819}"/>
+                <a16:creationId xmlns:a16="http://schemas.microsoft.com/office/drawing/2014/main" id="{E5F94F3A-1940-486A-9DF7-4FB4B7FA8870}"/>
               </a:ext>
             </a:extLst>
           </p:cNvPr>
@@ -4190,7 +4190,7 @@
           <p:cNvPr id="7" name="objective-2">
             <a:extLst xmlns:a="http://schemas.openxmlformats.org/drawingml/2006/main">
               <a:ext uri="{FF2B5EF4-FFF2-40B4-BE49-F238E27FC236}">
-                <a16:creationId xmlns:a16="http://schemas.microsoft.com/office/drawing/2014/main" id="{EE252BB8-D3FB-49DE-AAA0-FDADFB46C506}"/>
+                <a16:creationId xmlns:a16="http://schemas.microsoft.com/office/drawing/2014/main" id="{EB70678B-DA0A-479E-B6F6-A7712E46D768}"/>
               </a:ext>
             </a:extLst>
           </p:cNvPr>
@@ -4275,7 +4275,7 @@
     </p:spTree>
     <p:extLst>
       <p:ext uri="{BB962C8B-B14F-4D97-AF65-F5344CB8AC3E}">
-        <p14:creationId xmlns:p14="http://schemas.microsoft.com/office/powerpoint/2010/main" val="2111565392"/>
+        <p14:creationId xmlns:p14="http://schemas.microsoft.com/office/powerpoint/2010/main" val="1165095047"/>
       </p:ext>
     </p:extLst>
   </p:cSld>
@@ -4306,7 +4306,7 @@
           <p:cNvPr id="1" name="s3-rule">
             <a:extLst xmlns:a="http://schemas.openxmlformats.org/drawingml/2006/main">
               <a:ext uri="{FF2B5EF4-FFF2-40B4-BE49-F238E27FC236}">
-                <a16:creationId xmlns:a16="http://schemas.microsoft.com/office/drawing/2014/main" id="{EFCBE9A1-37CE-48DA-B78E-D3F245B12A02}"/>
+                <a16:creationId xmlns:a16="http://schemas.microsoft.com/office/drawing/2014/main" id="{ADE70337-F8C6-4ECD-B001-E4E61A327CF1}"/>
               </a:ext>
             </a:extLst>
           </p:cNvPr>
@@ -4339,7 +4339,7 @@
           <p:cNvPr id="2" name="s3-eyebrow">
             <a:extLst xmlns:a="http://schemas.openxmlformats.org/drawingml/2006/main">
               <a:ext uri="{FF2B5EF4-FFF2-40B4-BE49-F238E27FC236}">
-                <a16:creationId xmlns:a16="http://schemas.microsoft.com/office/drawing/2014/main" id="{10073A4B-161B-4EFD-AE1A-818863761DD4}"/>
+                <a16:creationId xmlns:a16="http://schemas.microsoft.com/office/drawing/2014/main" id="{36528C69-80A2-42AF-981E-9D6D5EE7867A}"/>
               </a:ext>
             </a:extLst>
           </p:cNvPr>
@@ -4397,7 +4397,7 @@
           <p:cNvPr id="3" name="s3-title">
             <a:extLst xmlns:a="http://schemas.openxmlformats.org/drawingml/2006/main">
               <a:ext uri="{FF2B5EF4-FFF2-40B4-BE49-F238E27FC236}">
-                <a16:creationId xmlns:a16="http://schemas.microsoft.com/office/drawing/2014/main" id="{EBF9076B-3464-4B47-870D-EE7474CB5F2F}"/>
+                <a16:creationId xmlns:a16="http://schemas.microsoft.com/office/drawing/2014/main" id="{1C8E7BE7-F46F-418C-9C0E-AE84B59B13E5}"/>
               </a:ext>
             </a:extLst>
           </p:cNvPr>
@@ -4455,7 +4455,7 @@
           <p:cNvPr id="4" name="s3-footer">
             <a:extLst xmlns:a="http://schemas.openxmlformats.org/drawingml/2006/main">
               <a:ext uri="{FF2B5EF4-FFF2-40B4-BE49-F238E27FC236}">
-                <a16:creationId xmlns:a16="http://schemas.microsoft.com/office/drawing/2014/main" id="{F339884A-5FAD-4C80-A372-AF7240E369C6}"/>
+                <a16:creationId xmlns:a16="http://schemas.microsoft.com/office/drawing/2014/main" id="{7DBEE1BA-B31E-4A0D-9B8C-4306BEC1A4EB}"/>
               </a:ext>
             </a:extLst>
           </p:cNvPr>
@@ -4486,7 +4486,7 @@
           <p:cNvPr id="5" name="s3-identity">
             <a:extLst xmlns:a="http://schemas.openxmlformats.org/drawingml/2006/main">
               <a:ext uri="{FF2B5EF4-FFF2-40B4-BE49-F238E27FC236}">
-                <a16:creationId xmlns:a16="http://schemas.microsoft.com/office/drawing/2014/main" id="{EE6C62B2-0F9E-4495-9D08-B226EE21E280}"/>
+                <a16:creationId xmlns:a16="http://schemas.microsoft.com/office/drawing/2014/main" id="{E22F5A0C-5AE2-48D2-90F1-20F6DBE42373}"/>
               </a:ext>
             </a:extLst>
           </p:cNvPr>
@@ -4544,7 +4544,7 @@
           <p:cNvPr id="6" name="core-no-0">
             <a:extLst xmlns:a="http://schemas.openxmlformats.org/drawingml/2006/main">
               <a:ext uri="{FF2B5EF4-FFF2-40B4-BE49-F238E27FC236}">
-                <a16:creationId xmlns:a16="http://schemas.microsoft.com/office/drawing/2014/main" id="{6BF18FC5-AF67-4E3A-9F08-4C4B8DF4572B}"/>
+                <a16:creationId xmlns:a16="http://schemas.microsoft.com/office/drawing/2014/main" id="{EE39759F-6046-4030-9822-B049C4E3B553}"/>
               </a:ext>
             </a:extLst>
           </p:cNvPr>
@@ -4602,7 +4602,7 @@
           <p:cNvPr id="7" name="core-label-0">
             <a:extLst xmlns:a="http://schemas.openxmlformats.org/drawingml/2006/main">
               <a:ext uri="{FF2B5EF4-FFF2-40B4-BE49-F238E27FC236}">
-                <a16:creationId xmlns:a16="http://schemas.microsoft.com/office/drawing/2014/main" id="{89AD3106-1A01-427B-ABA7-0500C7540B24}"/>
+                <a16:creationId xmlns:a16="http://schemas.microsoft.com/office/drawing/2014/main" id="{4CA91089-BCEC-4696-BD0E-A2D1CB0141F1}"/>
               </a:ext>
             </a:extLst>
           </p:cNvPr>
@@ -4660,7 +4660,7 @@
           <p:cNvPr id="8" name="core-body-0">
             <a:extLst xmlns:a="http://schemas.openxmlformats.org/drawingml/2006/main">
               <a:ext uri="{FF2B5EF4-FFF2-40B4-BE49-F238E27FC236}">
-                <a16:creationId xmlns:a16="http://schemas.microsoft.com/office/drawing/2014/main" id="{981DF7E0-9307-47E3-A02A-1EFD7047DBB4}"/>
+                <a16:creationId xmlns:a16="http://schemas.microsoft.com/office/drawing/2014/main" id="{176D5D34-51FE-40C6-9A30-1FE918A7AEEC}"/>
               </a:ext>
             </a:extLst>
           </p:cNvPr>
@@ -4724,7 +4724,7 @@
           <p:cNvPr id="9" name="core-no-1">
             <a:extLst xmlns:a="http://schemas.openxmlformats.org/drawingml/2006/main">
               <a:ext uri="{FF2B5EF4-FFF2-40B4-BE49-F238E27FC236}">
-                <a16:creationId xmlns:a16="http://schemas.microsoft.com/office/drawing/2014/main" id="{4B976CB8-B619-4798-962D-BEA254D2C9CD}"/>
+                <a16:creationId xmlns:a16="http://schemas.microsoft.com/office/drawing/2014/main" id="{E81D5492-4866-47A0-BC13-6015C7A54DDE}"/>
               </a:ext>
             </a:extLst>
           </p:cNvPr>
@@ -4782,7 +4782,7 @@
           <p:cNvPr id="10" name="core-body-1">
             <a:extLst xmlns:a="http://schemas.openxmlformats.org/drawingml/2006/main">
               <a:ext uri="{FF2B5EF4-FFF2-40B4-BE49-F238E27FC236}">
-                <a16:creationId xmlns:a16="http://schemas.microsoft.com/office/drawing/2014/main" id="{175F6CBE-6B3A-46C2-8D05-1E0CFB1CB511}"/>
+                <a16:creationId xmlns:a16="http://schemas.microsoft.com/office/drawing/2014/main" id="{89F030B5-9092-4B2B-A8A8-4B3A54FA0391}"/>
               </a:ext>
             </a:extLst>
           </p:cNvPr>
@@ -4846,7 +4846,7 @@
           <p:cNvPr id="11" name="s3-takeaway-rule">
             <a:extLst xmlns:a="http://schemas.openxmlformats.org/drawingml/2006/main">
               <a:ext uri="{FF2B5EF4-FFF2-40B4-BE49-F238E27FC236}">
-                <a16:creationId xmlns:a16="http://schemas.microsoft.com/office/drawing/2014/main" id="{D99BC7A6-1299-48B9-9B99-465987ABAFD1}"/>
+                <a16:creationId xmlns:a16="http://schemas.microsoft.com/office/drawing/2014/main" id="{6E7C9F44-B2E9-4166-A0B1-E5F62E5EB825}"/>
               </a:ext>
             </a:extLst>
           </p:cNvPr>
@@ -4879,7 +4879,7 @@
           <p:cNvPr id="12" name="s3-takeaway">
             <a:extLst xmlns:a="http://schemas.openxmlformats.org/drawingml/2006/main">
               <a:ext uri="{FF2B5EF4-FFF2-40B4-BE49-F238E27FC236}">
-                <a16:creationId xmlns:a16="http://schemas.microsoft.com/office/drawing/2014/main" id="{C6680CBA-6EC4-44F2-8585-55A53253EC65}"/>
+                <a16:creationId xmlns:a16="http://schemas.microsoft.com/office/drawing/2014/main" id="{A25E1E0F-A036-4DE6-A97C-13579AB624CB}"/>
               </a:ext>
             </a:extLst>
           </p:cNvPr>
@@ -4935,7 +4935,7 @@
     </p:spTree>
     <p:extLst>
       <p:ext uri="{BB962C8B-B14F-4D97-AF65-F5344CB8AC3E}">
-        <p14:creationId xmlns:p14="http://schemas.microsoft.com/office/powerpoint/2010/main" val="487466116"/>
+        <p14:creationId xmlns:p14="http://schemas.microsoft.com/office/powerpoint/2010/main" val="815767528"/>
       </p:ext>
     </p:extLst>
   </p:cSld>
@@ -4966,7 +4966,7 @@
           <p:cNvPr id="1" name="s4-rule">
             <a:extLst xmlns:a="http://schemas.openxmlformats.org/drawingml/2006/main">
               <a:ext uri="{FF2B5EF4-FFF2-40B4-BE49-F238E27FC236}">
-                <a16:creationId xmlns:a16="http://schemas.microsoft.com/office/drawing/2014/main" id="{F2D6E3AE-F42C-4955-90C6-E7996FE68716}"/>
+                <a16:creationId xmlns:a16="http://schemas.microsoft.com/office/drawing/2014/main" id="{3DC8195D-2D6C-4100-BF44-DB29A8814012}"/>
               </a:ext>
             </a:extLst>
           </p:cNvPr>
@@ -4999,7 +4999,7 @@
           <p:cNvPr id="2" name="s4-eyebrow">
             <a:extLst xmlns:a="http://schemas.openxmlformats.org/drawingml/2006/main">
               <a:ext uri="{FF2B5EF4-FFF2-40B4-BE49-F238E27FC236}">
-                <a16:creationId xmlns:a16="http://schemas.microsoft.com/office/drawing/2014/main" id="{ED7B13B8-730F-4A97-813C-8185C90F777B}"/>
+                <a16:creationId xmlns:a16="http://schemas.microsoft.com/office/drawing/2014/main" id="{E9A513E2-81A1-4EDE-9B38-985840CBBB84}"/>
               </a:ext>
             </a:extLst>
           </p:cNvPr>
@@ -5057,7 +5057,7 @@
           <p:cNvPr id="3" name="s4-title">
             <a:extLst xmlns:a="http://schemas.openxmlformats.org/drawingml/2006/main">
               <a:ext uri="{FF2B5EF4-FFF2-40B4-BE49-F238E27FC236}">
-                <a16:creationId xmlns:a16="http://schemas.microsoft.com/office/drawing/2014/main" id="{9AB95167-9229-46B6-ADE5-DA5FAF88DB14}"/>
+                <a16:creationId xmlns:a16="http://schemas.microsoft.com/office/drawing/2014/main" id="{461CCB6B-CA22-4834-8F2E-EB0DD802D199}"/>
               </a:ext>
             </a:extLst>
           </p:cNvPr>
@@ -5115,7 +5115,7 @@
           <p:cNvPr id="4" name="s4-footer">
             <a:extLst xmlns:a="http://schemas.openxmlformats.org/drawingml/2006/main">
               <a:ext uri="{FF2B5EF4-FFF2-40B4-BE49-F238E27FC236}">
-                <a16:creationId xmlns:a16="http://schemas.microsoft.com/office/drawing/2014/main" id="{9E558475-C0C0-4407-8633-7FE2687ADDC8}"/>
+                <a16:creationId xmlns:a16="http://schemas.microsoft.com/office/drawing/2014/main" id="{84F1254B-3646-4FDA-8AF5-B496205DA1C9}"/>
               </a:ext>
             </a:extLst>
           </p:cNvPr>
@@ -5146,7 +5146,7 @@
           <p:cNvPr id="5" name="s4-identity">
             <a:extLst xmlns:a="http://schemas.openxmlformats.org/drawingml/2006/main">
               <a:ext uri="{FF2B5EF4-FFF2-40B4-BE49-F238E27FC236}">
-                <a16:creationId xmlns:a16="http://schemas.microsoft.com/office/drawing/2014/main" id="{103E34AB-46FB-4C2B-B22F-42759A8CE1CC}"/>
+                <a16:creationId xmlns:a16="http://schemas.microsoft.com/office/drawing/2014/main" id="{C69D62FB-7402-481C-8673-7AF5DE9D9FC5}"/>
               </a:ext>
             </a:extLst>
           </p:cNvPr>
@@ -5204,7 +5204,7 @@
           <p:cNvPr id="6" name="core-no-0">
             <a:extLst xmlns:a="http://schemas.openxmlformats.org/drawingml/2006/main">
               <a:ext uri="{FF2B5EF4-FFF2-40B4-BE49-F238E27FC236}">
-                <a16:creationId xmlns:a16="http://schemas.microsoft.com/office/drawing/2014/main" id="{0DDB909E-C4F0-45D4-AB84-DFCF93B8E42D}"/>
+                <a16:creationId xmlns:a16="http://schemas.microsoft.com/office/drawing/2014/main" id="{0802E668-CBDC-4902-9FB1-98482361CC35}"/>
               </a:ext>
             </a:extLst>
           </p:cNvPr>
@@ -5262,7 +5262,7 @@
           <p:cNvPr id="7" name="core-label-0">
             <a:extLst xmlns:a="http://schemas.openxmlformats.org/drawingml/2006/main">
               <a:ext uri="{FF2B5EF4-FFF2-40B4-BE49-F238E27FC236}">
-                <a16:creationId xmlns:a16="http://schemas.microsoft.com/office/drawing/2014/main" id="{2D07149B-B519-4F53-8100-C2AEF427FE80}"/>
+                <a16:creationId xmlns:a16="http://schemas.microsoft.com/office/drawing/2014/main" id="{3256C1B5-8493-422A-967B-856D34EFB3B9}"/>
               </a:ext>
             </a:extLst>
           </p:cNvPr>
@@ -5320,7 +5320,7 @@
           <p:cNvPr id="8" name="core-body-0">
             <a:extLst xmlns:a="http://schemas.openxmlformats.org/drawingml/2006/main">
               <a:ext uri="{FF2B5EF4-FFF2-40B4-BE49-F238E27FC236}">
-                <a16:creationId xmlns:a16="http://schemas.microsoft.com/office/drawing/2014/main" id="{138462D8-2536-4912-99E5-0C2E1376ACE2}"/>
+                <a16:creationId xmlns:a16="http://schemas.microsoft.com/office/drawing/2014/main" id="{72F8123D-E648-4042-8525-C3A8A2DFEB00}"/>
               </a:ext>
             </a:extLst>
           </p:cNvPr>
@@ -5384,7 +5384,7 @@
           <p:cNvPr id="9" name="core-no-1">
             <a:extLst xmlns:a="http://schemas.openxmlformats.org/drawingml/2006/main">
               <a:ext uri="{FF2B5EF4-FFF2-40B4-BE49-F238E27FC236}">
-                <a16:creationId xmlns:a16="http://schemas.microsoft.com/office/drawing/2014/main" id="{224D7427-7688-4034-83F2-AD55CD364789}"/>
+                <a16:creationId xmlns:a16="http://schemas.microsoft.com/office/drawing/2014/main" id="{48D02084-00A6-4293-8F64-A96F44C84F54}"/>
               </a:ext>
             </a:extLst>
           </p:cNvPr>
@@ -5442,7 +5442,7 @@
           <p:cNvPr id="10" name="core-body-1">
             <a:extLst xmlns:a="http://schemas.openxmlformats.org/drawingml/2006/main">
               <a:ext uri="{FF2B5EF4-FFF2-40B4-BE49-F238E27FC236}">
-                <a16:creationId xmlns:a16="http://schemas.microsoft.com/office/drawing/2014/main" id="{87687E35-C1A9-4FCC-AE20-983EBE99A3E5}"/>
+                <a16:creationId xmlns:a16="http://schemas.microsoft.com/office/drawing/2014/main" id="{27410A88-C94F-4336-9939-CE815F9EC521}"/>
               </a:ext>
             </a:extLst>
           </p:cNvPr>
@@ -5506,7 +5506,7 @@
           <p:cNvPr id="11" name="s4-takeaway-rule">
             <a:extLst xmlns:a="http://schemas.openxmlformats.org/drawingml/2006/main">
               <a:ext uri="{FF2B5EF4-FFF2-40B4-BE49-F238E27FC236}">
-                <a16:creationId xmlns:a16="http://schemas.microsoft.com/office/drawing/2014/main" id="{B2154C99-6244-40F3-84F9-FAE819FC8BCB}"/>
+                <a16:creationId xmlns:a16="http://schemas.microsoft.com/office/drawing/2014/main" id="{E1D7473D-70D2-4936-89B9-486D5A795F1F}"/>
               </a:ext>
             </a:extLst>
           </p:cNvPr>
@@ -5539,7 +5539,7 @@
           <p:cNvPr id="12" name="s4-takeaway">
             <a:extLst xmlns:a="http://schemas.openxmlformats.org/drawingml/2006/main">
               <a:ext uri="{FF2B5EF4-FFF2-40B4-BE49-F238E27FC236}">
-                <a16:creationId xmlns:a16="http://schemas.microsoft.com/office/drawing/2014/main" id="{AD18DD49-9A8D-4132-96C9-B0DAC6E4F8D9}"/>
+                <a16:creationId xmlns:a16="http://schemas.microsoft.com/office/drawing/2014/main" id="{9EF2E5F3-1E85-4652-8690-288B270B6128}"/>
               </a:ext>
             </a:extLst>
           </p:cNvPr>
@@ -5595,7 +5595,7 @@
     </p:spTree>
     <p:extLst>
       <p:ext uri="{BB962C8B-B14F-4D97-AF65-F5344CB8AC3E}">
-        <p14:creationId xmlns:p14="http://schemas.microsoft.com/office/powerpoint/2010/main" val="1653810824"/>
+        <p14:creationId xmlns:p14="http://schemas.microsoft.com/office/powerpoint/2010/main" val="1268247352"/>
       </p:ext>
     </p:extLst>
   </p:cSld>
@@ -5626,7 +5626,7 @@
           <p:cNvPr id="1" name="s5-rule">
             <a:extLst xmlns:a="http://schemas.openxmlformats.org/drawingml/2006/main">
               <a:ext uri="{FF2B5EF4-FFF2-40B4-BE49-F238E27FC236}">
-                <a16:creationId xmlns:a16="http://schemas.microsoft.com/office/drawing/2014/main" id="{854A38AA-A977-4421-AC33-CC668100CE45}"/>
+                <a16:creationId xmlns:a16="http://schemas.microsoft.com/office/drawing/2014/main" id="{AF8419D1-88F8-4920-91FF-745296E8506F}"/>
               </a:ext>
             </a:extLst>
           </p:cNvPr>
@@ -5659,7 +5659,7 @@
           <p:cNvPr id="2" name="s5-eyebrow">
             <a:extLst xmlns:a="http://schemas.openxmlformats.org/drawingml/2006/main">
               <a:ext uri="{FF2B5EF4-FFF2-40B4-BE49-F238E27FC236}">
-                <a16:creationId xmlns:a16="http://schemas.microsoft.com/office/drawing/2014/main" id="{BCE9C835-3B34-46D3-A577-D99C1839EA33}"/>
+                <a16:creationId xmlns:a16="http://schemas.microsoft.com/office/drawing/2014/main" id="{C53C6CD9-4C0F-4235-997C-E604D8E5BC6E}"/>
               </a:ext>
             </a:extLst>
           </p:cNvPr>
@@ -5717,7 +5717,7 @@
           <p:cNvPr id="3" name="s5-title">
             <a:extLst xmlns:a="http://schemas.openxmlformats.org/drawingml/2006/main">
               <a:ext uri="{FF2B5EF4-FFF2-40B4-BE49-F238E27FC236}">
-                <a16:creationId xmlns:a16="http://schemas.microsoft.com/office/drawing/2014/main" id="{EB53EEE4-08C1-49CD-9995-11D54030E62E}"/>
+                <a16:creationId xmlns:a16="http://schemas.microsoft.com/office/drawing/2014/main" id="{7F8F5FBF-33C4-4E0E-B5BA-63D18F1F3819}"/>
               </a:ext>
             </a:extLst>
           </p:cNvPr>
@@ -5775,7 +5775,7 @@
           <p:cNvPr id="4" name="s5-footer">
             <a:extLst xmlns:a="http://schemas.openxmlformats.org/drawingml/2006/main">
               <a:ext uri="{FF2B5EF4-FFF2-40B4-BE49-F238E27FC236}">
-                <a16:creationId xmlns:a16="http://schemas.microsoft.com/office/drawing/2014/main" id="{7BE558F9-545E-446A-8829-21B59D9C3185}"/>
+                <a16:creationId xmlns:a16="http://schemas.microsoft.com/office/drawing/2014/main" id="{DD24D0C6-3919-49A7-AE49-F1489BAE2002}"/>
               </a:ext>
             </a:extLst>
           </p:cNvPr>
@@ -5806,7 +5806,7 @@
           <p:cNvPr id="5" name="s5-identity">
             <a:extLst xmlns:a="http://schemas.openxmlformats.org/drawingml/2006/main">
               <a:ext uri="{FF2B5EF4-FFF2-40B4-BE49-F238E27FC236}">
-                <a16:creationId xmlns:a16="http://schemas.microsoft.com/office/drawing/2014/main" id="{85B1844D-73FF-4F51-A20F-96AE4E4A47CA}"/>
+                <a16:creationId xmlns:a16="http://schemas.microsoft.com/office/drawing/2014/main" id="{44DE130B-5100-4D7E-9B3B-38F4AB7664BE}"/>
               </a:ext>
             </a:extLst>
           </p:cNvPr>
@@ -5864,7 +5864,7 @@
           <p:cNvPr id="6" name="core-no-0">
             <a:extLst xmlns:a="http://schemas.openxmlformats.org/drawingml/2006/main">
               <a:ext uri="{FF2B5EF4-FFF2-40B4-BE49-F238E27FC236}">
-                <a16:creationId xmlns:a16="http://schemas.microsoft.com/office/drawing/2014/main" id="{CABFB9E8-E003-4AA2-9E5C-56FB634D286A}"/>
+                <a16:creationId xmlns:a16="http://schemas.microsoft.com/office/drawing/2014/main" id="{D6799230-6CC2-4F12-ADED-A798EE32906C}"/>
               </a:ext>
             </a:extLst>
           </p:cNvPr>
@@ -5922,7 +5922,7 @@
           <p:cNvPr id="7" name="core-label-0">
             <a:extLst xmlns:a="http://schemas.openxmlformats.org/drawingml/2006/main">
               <a:ext uri="{FF2B5EF4-FFF2-40B4-BE49-F238E27FC236}">
-                <a16:creationId xmlns:a16="http://schemas.microsoft.com/office/drawing/2014/main" id="{86685511-A3D0-43BC-BCCF-601B089BB18C}"/>
+                <a16:creationId xmlns:a16="http://schemas.microsoft.com/office/drawing/2014/main" id="{4932286A-8190-4D92-84D0-2660B8C1B850}"/>
               </a:ext>
             </a:extLst>
           </p:cNvPr>
@@ -5980,7 +5980,7 @@
           <p:cNvPr id="8" name="core-body-0">
             <a:extLst xmlns:a="http://schemas.openxmlformats.org/drawingml/2006/main">
               <a:ext uri="{FF2B5EF4-FFF2-40B4-BE49-F238E27FC236}">
-                <a16:creationId xmlns:a16="http://schemas.microsoft.com/office/drawing/2014/main" id="{EC4A2B5E-93A0-46FF-B095-60A13E7504D8}"/>
+                <a16:creationId xmlns:a16="http://schemas.microsoft.com/office/drawing/2014/main" id="{13643A5C-B26B-4708-BFAD-64D0A56AAE06}"/>
               </a:ext>
             </a:extLst>
           </p:cNvPr>
@@ -6044,7 +6044,7 @@
           <p:cNvPr id="9" name="core-no-1">
             <a:extLst xmlns:a="http://schemas.openxmlformats.org/drawingml/2006/main">
               <a:ext uri="{FF2B5EF4-FFF2-40B4-BE49-F238E27FC236}">
-                <a16:creationId xmlns:a16="http://schemas.microsoft.com/office/drawing/2014/main" id="{3B282483-F899-4666-897E-B4C2CFE222C9}"/>
+                <a16:creationId xmlns:a16="http://schemas.microsoft.com/office/drawing/2014/main" id="{E928FDE4-04DA-4D98-9D51-F0D0E42FFBD0}"/>
               </a:ext>
             </a:extLst>
           </p:cNvPr>
@@ -6102,7 +6102,7 @@
           <p:cNvPr id="10" name="core-body-1">
             <a:extLst xmlns:a="http://schemas.openxmlformats.org/drawingml/2006/main">
               <a:ext uri="{FF2B5EF4-FFF2-40B4-BE49-F238E27FC236}">
-                <a16:creationId xmlns:a16="http://schemas.microsoft.com/office/drawing/2014/main" id="{FE23497D-C9BA-48E6-96C9-B74912896774}"/>
+                <a16:creationId xmlns:a16="http://schemas.microsoft.com/office/drawing/2014/main" id="{6AC2C124-EE23-44E5-9C76-E75FF8C7AC51}"/>
               </a:ext>
             </a:extLst>
           </p:cNvPr>
@@ -6166,7 +6166,7 @@
           <p:cNvPr id="11" name="s5-takeaway-rule">
             <a:extLst xmlns:a="http://schemas.openxmlformats.org/drawingml/2006/main">
               <a:ext uri="{FF2B5EF4-FFF2-40B4-BE49-F238E27FC236}">
-                <a16:creationId xmlns:a16="http://schemas.microsoft.com/office/drawing/2014/main" id="{A797A75C-9AD8-4B97-B857-CDD6A93183B6}"/>
+                <a16:creationId xmlns:a16="http://schemas.microsoft.com/office/drawing/2014/main" id="{8738A683-98F8-45CB-A977-287BC1A8ECA4}"/>
               </a:ext>
             </a:extLst>
           </p:cNvPr>
@@ -6199,7 +6199,7 @@
           <p:cNvPr id="12" name="s5-takeaway">
             <a:extLst xmlns:a="http://schemas.openxmlformats.org/drawingml/2006/main">
               <a:ext uri="{FF2B5EF4-FFF2-40B4-BE49-F238E27FC236}">
-                <a16:creationId xmlns:a16="http://schemas.microsoft.com/office/drawing/2014/main" id="{F70EBE5B-7786-403C-9CD6-F84977854344}"/>
+                <a16:creationId xmlns:a16="http://schemas.microsoft.com/office/drawing/2014/main" id="{A44573B4-0108-4AF2-BC38-E4FF3C05387A}"/>
               </a:ext>
             </a:extLst>
           </p:cNvPr>
@@ -6255,7 +6255,7 @@
     </p:spTree>
     <p:extLst>
       <p:ext uri="{BB962C8B-B14F-4D97-AF65-F5344CB8AC3E}">
-        <p14:creationId xmlns:p14="http://schemas.microsoft.com/office/powerpoint/2010/main" val="1422429022"/>
+        <p14:creationId xmlns:p14="http://schemas.microsoft.com/office/powerpoint/2010/main" val="996100669"/>
       </p:ext>
     </p:extLst>
   </p:cSld>
@@ -6286,7 +6286,7 @@
           <p:cNvPr id="1" name="s6-rule">
             <a:extLst xmlns:a="http://schemas.openxmlformats.org/drawingml/2006/main">
               <a:ext uri="{FF2B5EF4-FFF2-40B4-BE49-F238E27FC236}">
-                <a16:creationId xmlns:a16="http://schemas.microsoft.com/office/drawing/2014/main" id="{88D6BA9F-F7E4-476C-9C9E-C9E63AFEF351}"/>
+                <a16:creationId xmlns:a16="http://schemas.microsoft.com/office/drawing/2014/main" id="{4A9522B0-4FAA-45F4-953C-9EB9C6A10CB4}"/>
               </a:ext>
             </a:extLst>
           </p:cNvPr>
@@ -6319,7 +6319,7 @@
           <p:cNvPr id="2" name="s6-eyebrow">
             <a:extLst xmlns:a="http://schemas.openxmlformats.org/drawingml/2006/main">
               <a:ext uri="{FF2B5EF4-FFF2-40B4-BE49-F238E27FC236}">
-                <a16:creationId xmlns:a16="http://schemas.microsoft.com/office/drawing/2014/main" id="{34156C62-C605-414C-9784-FD78DB2C1D80}"/>
+                <a16:creationId xmlns:a16="http://schemas.microsoft.com/office/drawing/2014/main" id="{90C5AB8C-BD5E-440C-8001-5D82B376D773}"/>
               </a:ext>
             </a:extLst>
           </p:cNvPr>
@@ -6377,7 +6377,7 @@
           <p:cNvPr id="3" name="s6-title">
             <a:extLst xmlns:a="http://schemas.openxmlformats.org/drawingml/2006/main">
               <a:ext uri="{FF2B5EF4-FFF2-40B4-BE49-F238E27FC236}">
-                <a16:creationId xmlns:a16="http://schemas.microsoft.com/office/drawing/2014/main" id="{587C35ED-3AA2-4D49-8344-4AE1E28777E5}"/>
+                <a16:creationId xmlns:a16="http://schemas.microsoft.com/office/drawing/2014/main" id="{AB5975CF-C774-4141-820E-19FD9D8855A0}"/>
               </a:ext>
             </a:extLst>
           </p:cNvPr>
@@ -6435,7 +6435,7 @@
           <p:cNvPr id="4" name="s6-footer">
             <a:extLst xmlns:a="http://schemas.openxmlformats.org/drawingml/2006/main">
               <a:ext uri="{FF2B5EF4-FFF2-40B4-BE49-F238E27FC236}">
-                <a16:creationId xmlns:a16="http://schemas.microsoft.com/office/drawing/2014/main" id="{CEF93088-6841-4BF8-B7CF-07128F53ECF0}"/>
+                <a16:creationId xmlns:a16="http://schemas.microsoft.com/office/drawing/2014/main" id="{41F33E9D-BC30-49B9-8867-C01893DAC468}"/>
               </a:ext>
             </a:extLst>
           </p:cNvPr>
@@ -6466,7 +6466,7 @@
           <p:cNvPr id="5" name="s6-identity">
             <a:extLst xmlns:a="http://schemas.openxmlformats.org/drawingml/2006/main">
               <a:ext uri="{FF2B5EF4-FFF2-40B4-BE49-F238E27FC236}">
-                <a16:creationId xmlns:a16="http://schemas.microsoft.com/office/drawing/2014/main" id="{924C8137-6BC9-4D4B-BDED-32610530F023}"/>
+                <a16:creationId xmlns:a16="http://schemas.microsoft.com/office/drawing/2014/main" id="{01E9DEA6-E42C-4DEF-B468-69FBA62035D9}"/>
               </a:ext>
             </a:extLst>
           </p:cNvPr>
@@ -6524,7 +6524,7 @@
           <p:cNvPr id="6" name="core-no-0">
             <a:extLst xmlns:a="http://schemas.openxmlformats.org/drawingml/2006/main">
               <a:ext uri="{FF2B5EF4-FFF2-40B4-BE49-F238E27FC236}">
-                <a16:creationId xmlns:a16="http://schemas.microsoft.com/office/drawing/2014/main" id="{0251AE69-2FFD-4217-9D37-22C0700CD4B5}"/>
+                <a16:creationId xmlns:a16="http://schemas.microsoft.com/office/drawing/2014/main" id="{45696336-D3D4-496D-A239-864D7C612A71}"/>
               </a:ext>
             </a:extLst>
           </p:cNvPr>
@@ -6582,7 +6582,7 @@
           <p:cNvPr id="7" name="core-label-0">
             <a:extLst xmlns:a="http://schemas.openxmlformats.org/drawingml/2006/main">
               <a:ext uri="{FF2B5EF4-FFF2-40B4-BE49-F238E27FC236}">
-                <a16:creationId xmlns:a16="http://schemas.microsoft.com/office/drawing/2014/main" id="{EBC4B380-5B32-4DED-943E-63C3807872AD}"/>
+                <a16:creationId xmlns:a16="http://schemas.microsoft.com/office/drawing/2014/main" id="{B3442A43-C26E-4806-90E9-D38C1DA6112C}"/>
               </a:ext>
             </a:extLst>
           </p:cNvPr>
@@ -6640,7 +6640,7 @@
           <p:cNvPr id="8" name="core-body-0">
             <a:extLst xmlns:a="http://schemas.openxmlformats.org/drawingml/2006/main">
               <a:ext uri="{FF2B5EF4-FFF2-40B4-BE49-F238E27FC236}">
-                <a16:creationId xmlns:a16="http://schemas.microsoft.com/office/drawing/2014/main" id="{B16F768B-4892-4460-AB99-EFE1304DDAFD}"/>
+                <a16:creationId xmlns:a16="http://schemas.microsoft.com/office/drawing/2014/main" id="{A71AE03D-B0C9-4E39-ADED-08163CA584DE}"/>
               </a:ext>
             </a:extLst>
           </p:cNvPr>
@@ -6704,7 +6704,7 @@
           <p:cNvPr id="9" name="core-no-1">
             <a:extLst xmlns:a="http://schemas.openxmlformats.org/drawingml/2006/main">
               <a:ext uri="{FF2B5EF4-FFF2-40B4-BE49-F238E27FC236}">
-                <a16:creationId xmlns:a16="http://schemas.microsoft.com/office/drawing/2014/main" id="{A32E1474-3849-4C05-879E-66D054B9D3A4}"/>
+                <a16:creationId xmlns:a16="http://schemas.microsoft.com/office/drawing/2014/main" id="{7F31282F-84DB-4524-8537-97CA664BBE11}"/>
               </a:ext>
             </a:extLst>
           </p:cNvPr>
@@ -6762,7 +6762,7 @@
           <p:cNvPr id="10" name="core-body-1">
             <a:extLst xmlns:a="http://schemas.openxmlformats.org/drawingml/2006/main">
               <a:ext uri="{FF2B5EF4-FFF2-40B4-BE49-F238E27FC236}">
-                <a16:creationId xmlns:a16="http://schemas.microsoft.com/office/drawing/2014/main" id="{3C12F230-7F67-46D9-801F-C1BD423A251F}"/>
+                <a16:creationId xmlns:a16="http://schemas.microsoft.com/office/drawing/2014/main" id="{DE361FAB-4796-4E2D-94BB-56714A5CC99E}"/>
               </a:ext>
             </a:extLst>
           </p:cNvPr>
@@ -6826,7 +6826,7 @@
           <p:cNvPr id="11" name="s6-takeaway-rule">
             <a:extLst xmlns:a="http://schemas.openxmlformats.org/drawingml/2006/main">
               <a:ext uri="{FF2B5EF4-FFF2-40B4-BE49-F238E27FC236}">
-                <a16:creationId xmlns:a16="http://schemas.microsoft.com/office/drawing/2014/main" id="{1CD1A028-97ED-47A0-ACD8-BB295B868527}"/>
+                <a16:creationId xmlns:a16="http://schemas.microsoft.com/office/drawing/2014/main" id="{82D47D96-771F-4285-974C-639EAB9BBD08}"/>
               </a:ext>
             </a:extLst>
           </p:cNvPr>
@@ -6859,7 +6859,7 @@
           <p:cNvPr id="12" name="s6-takeaway">
             <a:extLst xmlns:a="http://schemas.openxmlformats.org/drawingml/2006/main">
               <a:ext uri="{FF2B5EF4-FFF2-40B4-BE49-F238E27FC236}">
-                <a16:creationId xmlns:a16="http://schemas.microsoft.com/office/drawing/2014/main" id="{7ECD0DCA-7653-4B22-A5EE-3E037AE4E16D}"/>
+                <a16:creationId xmlns:a16="http://schemas.microsoft.com/office/drawing/2014/main" id="{F93663EA-5DD6-4D00-8F47-522506E8035F}"/>
               </a:ext>
             </a:extLst>
           </p:cNvPr>
@@ -6915,7 +6915,7 @@
     </p:spTree>
     <p:extLst>
       <p:ext uri="{BB962C8B-B14F-4D97-AF65-F5344CB8AC3E}">
-        <p14:creationId xmlns:p14="http://schemas.microsoft.com/office/powerpoint/2010/main" val="1732003113"/>
+        <p14:creationId xmlns:p14="http://schemas.microsoft.com/office/powerpoint/2010/main" val="2133898465"/>
       </p:ext>
     </p:extLst>
   </p:cSld>
@@ -6946,7 +6946,7 @@
           <p:cNvPr id="1" name="s7-rule">
             <a:extLst xmlns:a="http://schemas.openxmlformats.org/drawingml/2006/main">
               <a:ext uri="{FF2B5EF4-FFF2-40B4-BE49-F238E27FC236}">
-                <a16:creationId xmlns:a16="http://schemas.microsoft.com/office/drawing/2014/main" id="{64117DA6-DBDF-4AFD-ABD1-15E3D0737F84}"/>
+                <a16:creationId xmlns:a16="http://schemas.microsoft.com/office/drawing/2014/main" id="{28E6811C-220F-4388-A7AF-A9E515B94E08}"/>
               </a:ext>
             </a:extLst>
           </p:cNvPr>
@@ -6979,7 +6979,7 @@
           <p:cNvPr id="2" name="s7-eyebrow">
             <a:extLst xmlns:a="http://schemas.openxmlformats.org/drawingml/2006/main">
               <a:ext uri="{FF2B5EF4-FFF2-40B4-BE49-F238E27FC236}">
-                <a16:creationId xmlns:a16="http://schemas.microsoft.com/office/drawing/2014/main" id="{00AEAA38-7308-44B2-BDFA-CB80B2DCF0DB}"/>
+                <a16:creationId xmlns:a16="http://schemas.microsoft.com/office/drawing/2014/main" id="{B0645E78-0DAD-4FB0-876E-21122562F777}"/>
               </a:ext>
             </a:extLst>
           </p:cNvPr>
@@ -7037,7 +7037,7 @@
           <p:cNvPr id="3" name="s7-title">
             <a:extLst xmlns:a="http://schemas.openxmlformats.org/drawingml/2006/main">
               <a:ext uri="{FF2B5EF4-FFF2-40B4-BE49-F238E27FC236}">
-                <a16:creationId xmlns:a16="http://schemas.microsoft.com/office/drawing/2014/main" id="{8C6FCAF0-8D84-4B45-A520-ACDDF1B5D534}"/>
+                <a16:creationId xmlns:a16="http://schemas.microsoft.com/office/drawing/2014/main" id="{F35D1A5F-4888-4768-A1AB-61544CB989E3}"/>
               </a:ext>
             </a:extLst>
           </p:cNvPr>
@@ -7095,7 +7095,7 @@
           <p:cNvPr id="4" name="s7-footer">
             <a:extLst xmlns:a="http://schemas.openxmlformats.org/drawingml/2006/main">
               <a:ext uri="{FF2B5EF4-FFF2-40B4-BE49-F238E27FC236}">
-                <a16:creationId xmlns:a16="http://schemas.microsoft.com/office/drawing/2014/main" id="{E2C290B6-0943-49C9-8F1F-FDCF6DC2ABF7}"/>
+                <a16:creationId xmlns:a16="http://schemas.microsoft.com/office/drawing/2014/main" id="{8D0B5E1F-E620-44B0-9000-06D32BCE5F05}"/>
               </a:ext>
             </a:extLst>
           </p:cNvPr>
@@ -7126,7 +7126,7 @@
           <p:cNvPr id="5" name="s7-identity">
             <a:extLst xmlns:a="http://schemas.openxmlformats.org/drawingml/2006/main">
               <a:ext uri="{FF2B5EF4-FFF2-40B4-BE49-F238E27FC236}">
-                <a16:creationId xmlns:a16="http://schemas.microsoft.com/office/drawing/2014/main" id="{8FA0352C-AA8E-4D33-9186-E9A172A05EE7}"/>
+                <a16:creationId xmlns:a16="http://schemas.microsoft.com/office/drawing/2014/main" id="{948B6237-481B-40AD-BAFE-1D8CC4F634F4}"/>
               </a:ext>
             </a:extLst>
           </p:cNvPr>
@@ -7184,7 +7184,7 @@
           <p:cNvPr id="6" name="core-no-0">
             <a:extLst xmlns:a="http://schemas.openxmlformats.org/drawingml/2006/main">
               <a:ext uri="{FF2B5EF4-FFF2-40B4-BE49-F238E27FC236}">
-                <a16:creationId xmlns:a16="http://schemas.microsoft.com/office/drawing/2014/main" id="{4F240130-1FCB-4951-ACD6-33CA359A669B}"/>
+                <a16:creationId xmlns:a16="http://schemas.microsoft.com/office/drawing/2014/main" id="{034F137A-443A-4188-BE7E-231F0F3AFBD1}"/>
               </a:ext>
             </a:extLst>
           </p:cNvPr>
@@ -7242,7 +7242,7 @@
           <p:cNvPr id="7" name="core-label-0">
             <a:extLst xmlns:a="http://schemas.openxmlformats.org/drawingml/2006/main">
               <a:ext uri="{FF2B5EF4-FFF2-40B4-BE49-F238E27FC236}">
-                <a16:creationId xmlns:a16="http://schemas.microsoft.com/office/drawing/2014/main" id="{A788BA3B-CB96-46E4-B5B4-7C59D10D8321}"/>
+                <a16:creationId xmlns:a16="http://schemas.microsoft.com/office/drawing/2014/main" id="{9F83654D-48ED-49ED-ACFD-938712E115F8}"/>
               </a:ext>
             </a:extLst>
           </p:cNvPr>
@@ -7300,7 +7300,7 @@
           <p:cNvPr id="8" name="core-body-0">
             <a:extLst xmlns:a="http://schemas.openxmlformats.org/drawingml/2006/main">
               <a:ext uri="{FF2B5EF4-FFF2-40B4-BE49-F238E27FC236}">
-                <a16:creationId xmlns:a16="http://schemas.microsoft.com/office/drawing/2014/main" id="{8A9186C0-7FB3-4596-8AF5-E2C7A5F099C8}"/>
+                <a16:creationId xmlns:a16="http://schemas.microsoft.com/office/drawing/2014/main" id="{4188B2BF-B74F-4D29-B4ED-4EE7BB359D1D}"/>
               </a:ext>
             </a:extLst>
           </p:cNvPr>
@@ -7364,7 +7364,7 @@
           <p:cNvPr id="9" name="core-no-1">
             <a:extLst xmlns:a="http://schemas.openxmlformats.org/drawingml/2006/main">
               <a:ext uri="{FF2B5EF4-FFF2-40B4-BE49-F238E27FC236}">
-                <a16:creationId xmlns:a16="http://schemas.microsoft.com/office/drawing/2014/main" id="{D6C078C0-29D8-42D5-B068-1F5009597317}"/>
+                <a16:creationId xmlns:a16="http://schemas.microsoft.com/office/drawing/2014/main" id="{AE0F28CA-C24A-4394-BDD5-58303A31F6CF}"/>
               </a:ext>
             </a:extLst>
           </p:cNvPr>
@@ -7422,7 +7422,7 @@
           <p:cNvPr id="10" name="core-body-1">
             <a:extLst xmlns:a="http://schemas.openxmlformats.org/drawingml/2006/main">
               <a:ext uri="{FF2B5EF4-FFF2-40B4-BE49-F238E27FC236}">
-                <a16:creationId xmlns:a16="http://schemas.microsoft.com/office/drawing/2014/main" id="{5AB16437-33A5-4F7A-87B1-DB3BFBE1E68A}"/>
+                <a16:creationId xmlns:a16="http://schemas.microsoft.com/office/drawing/2014/main" id="{77C6E3B8-A01F-4635-B9E5-AFB865329F64}"/>
               </a:ext>
             </a:extLst>
           </p:cNvPr>
@@ -7486,7 +7486,7 @@
           <p:cNvPr id="11" name="s7-takeaway-rule">
             <a:extLst xmlns:a="http://schemas.openxmlformats.org/drawingml/2006/main">
               <a:ext uri="{FF2B5EF4-FFF2-40B4-BE49-F238E27FC236}">
-                <a16:creationId xmlns:a16="http://schemas.microsoft.com/office/drawing/2014/main" id="{1B970BC7-495E-4801-954F-1FC09708DD48}"/>
+                <a16:creationId xmlns:a16="http://schemas.microsoft.com/office/drawing/2014/main" id="{4471E708-925B-4418-AEDF-59C31AD7DB36}"/>
               </a:ext>
             </a:extLst>
           </p:cNvPr>
@@ -7519,7 +7519,7 @@
           <p:cNvPr id="12" name="s7-takeaway">
             <a:extLst xmlns:a="http://schemas.openxmlformats.org/drawingml/2006/main">
               <a:ext uri="{FF2B5EF4-FFF2-40B4-BE49-F238E27FC236}">
-                <a16:creationId xmlns:a16="http://schemas.microsoft.com/office/drawing/2014/main" id="{AEEC589C-8F0C-4A74-85DC-D68BEF8040FD}"/>
+                <a16:creationId xmlns:a16="http://schemas.microsoft.com/office/drawing/2014/main" id="{53FBF83D-0210-4984-A98C-4546F7505235}"/>
               </a:ext>
             </a:extLst>
           </p:cNvPr>
@@ -7575,7 +7575,7 @@
     </p:spTree>
     <p:extLst>
       <p:ext uri="{BB962C8B-B14F-4D97-AF65-F5344CB8AC3E}">
-        <p14:creationId xmlns:p14="http://schemas.microsoft.com/office/powerpoint/2010/main" val="740863155"/>
+        <p14:creationId xmlns:p14="http://schemas.microsoft.com/office/powerpoint/2010/main" val="2077057423"/>
       </p:ext>
     </p:extLst>
   </p:cSld>
@@ -7606,7 +7606,7 @@
           <p:cNvPr id="1" name="s8-rule">
             <a:extLst xmlns:a="http://schemas.openxmlformats.org/drawingml/2006/main">
               <a:ext uri="{FF2B5EF4-FFF2-40B4-BE49-F238E27FC236}">
-                <a16:creationId xmlns:a16="http://schemas.microsoft.com/office/drawing/2014/main" id="{9758E3DA-04FC-455C-8625-6CE53A19217D}"/>
+                <a16:creationId xmlns:a16="http://schemas.microsoft.com/office/drawing/2014/main" id="{536E9740-9437-43F1-8DA7-0F59308081D4}"/>
               </a:ext>
             </a:extLst>
           </p:cNvPr>
@@ -7639,7 +7639,7 @@
           <p:cNvPr id="2" name="s8-eyebrow">
             <a:extLst xmlns:a="http://schemas.openxmlformats.org/drawingml/2006/main">
               <a:ext uri="{FF2B5EF4-FFF2-40B4-BE49-F238E27FC236}">
-                <a16:creationId xmlns:a16="http://schemas.microsoft.com/office/drawing/2014/main" id="{259A7984-6E51-43B0-A327-FCED48199B63}"/>
+                <a16:creationId xmlns:a16="http://schemas.microsoft.com/office/drawing/2014/main" id="{1555DCBC-A774-49AA-BFFB-29630F0F4316}"/>
               </a:ext>
             </a:extLst>
           </p:cNvPr>
@@ -7697,7 +7697,7 @@
           <p:cNvPr id="3" name="s8-title">
             <a:extLst xmlns:a="http://schemas.openxmlformats.org/drawingml/2006/main">
               <a:ext uri="{FF2B5EF4-FFF2-40B4-BE49-F238E27FC236}">
-                <a16:creationId xmlns:a16="http://schemas.microsoft.com/office/drawing/2014/main" id="{CDA42913-6633-4763-9541-96542362F165}"/>
+                <a16:creationId xmlns:a16="http://schemas.microsoft.com/office/drawing/2014/main" id="{E6706946-C4C6-4C4F-8A28-A5EEB51E989A}"/>
               </a:ext>
             </a:extLst>
           </p:cNvPr>
@@ -7755,7 +7755,7 @@
           <p:cNvPr id="4" name="s8-footer">
             <a:extLst xmlns:a="http://schemas.openxmlformats.org/drawingml/2006/main">
               <a:ext uri="{FF2B5EF4-FFF2-40B4-BE49-F238E27FC236}">
-                <a16:creationId xmlns:a16="http://schemas.microsoft.com/office/drawing/2014/main" id="{C585078A-8A68-42D7-B3ED-5FF548CA9138}"/>
+                <a16:creationId xmlns:a16="http://schemas.microsoft.com/office/drawing/2014/main" id="{F0C9D7DC-415A-4ECF-8EA0-D306BB1368C2}"/>
               </a:ext>
             </a:extLst>
           </p:cNvPr>
@@ -7786,7 +7786,7 @@
           <p:cNvPr id="5" name="s8-identity">
             <a:extLst xmlns:a="http://schemas.openxmlformats.org/drawingml/2006/main">
               <a:ext uri="{FF2B5EF4-FFF2-40B4-BE49-F238E27FC236}">
-                <a16:creationId xmlns:a16="http://schemas.microsoft.com/office/drawing/2014/main" id="{F1F9B1F5-B7B7-433D-A1C6-1698A6F62C18}"/>
+                <a16:creationId xmlns:a16="http://schemas.microsoft.com/office/drawing/2014/main" id="{7C09F9C3-BA20-48FD-A769-24D172094D91}"/>
               </a:ext>
             </a:extLst>
           </p:cNvPr>
@@ -7844,7 +7844,7 @@
           <p:cNvPr id="6" name="case-title">
             <a:extLst xmlns:a="http://schemas.openxmlformats.org/drawingml/2006/main">
               <a:ext uri="{FF2B5EF4-FFF2-40B4-BE49-F238E27FC236}">
-                <a16:creationId xmlns:a16="http://schemas.microsoft.com/office/drawing/2014/main" id="{492B374F-2AC0-4357-A625-AE36446F4E8C}"/>
+                <a16:creationId xmlns:a16="http://schemas.microsoft.com/office/drawing/2014/main" id="{F9807FB7-65E8-4BE4-98C9-BF85EEB874B9}"/>
               </a:ext>
             </a:extLst>
           </p:cNvPr>
@@ -7908,7 +7908,7 @@
           <p:cNvPr id="7" name="case-row-0">
             <a:extLst xmlns:a="http://schemas.openxmlformats.org/drawingml/2006/main">
               <a:ext uri="{FF2B5EF4-FFF2-40B4-BE49-F238E27FC236}">
-                <a16:creationId xmlns:a16="http://schemas.microsoft.com/office/drawing/2014/main" id="{A096B1F8-CF9E-4AE5-95CE-B66E24B8E9DA}"/>
+                <a16:creationId xmlns:a16="http://schemas.microsoft.com/office/drawing/2014/main" id="{5F5F9B20-C985-429B-8BAE-51D704A86020}"/>
               </a:ext>
             </a:extLst>
           </p:cNvPr>
@@ -7972,7 +7972,7 @@
           <p:cNvPr id="8" name="case-row-1">
             <a:extLst xmlns:a="http://schemas.openxmlformats.org/drawingml/2006/main">
               <a:ext uri="{FF2B5EF4-FFF2-40B4-BE49-F238E27FC236}">
-                <a16:creationId xmlns:a16="http://schemas.microsoft.com/office/drawing/2014/main" id="{310FF9AB-0D13-4225-B2FB-54B723B0CF0F}"/>
+                <a16:creationId xmlns:a16="http://schemas.microsoft.com/office/drawing/2014/main" id="{E20630CC-D2C1-4A2F-AFC8-5ED579D3B108}"/>
               </a:ext>
             </a:extLst>
           </p:cNvPr>
@@ -8036,7 +8036,7 @@
           <p:cNvPr id="9" name="case-row-2">
             <a:extLst xmlns:a="http://schemas.openxmlformats.org/drawingml/2006/main">
               <a:ext uri="{FF2B5EF4-FFF2-40B4-BE49-F238E27FC236}">
-                <a16:creationId xmlns:a16="http://schemas.microsoft.com/office/drawing/2014/main" id="{49B1C095-7F54-4CAA-AA7A-96CDFFC3B8A8}"/>
+                <a16:creationId xmlns:a16="http://schemas.microsoft.com/office/drawing/2014/main" id="{2DB07329-D4DC-4F4F-B08A-E908B3022869}"/>
               </a:ext>
             </a:extLst>
           </p:cNvPr>
@@ -8100,7 +8100,7 @@
           <p:cNvPr id="10" name="case-row-3">
             <a:extLst xmlns:a="http://schemas.openxmlformats.org/drawingml/2006/main">
               <a:ext uri="{FF2B5EF4-FFF2-40B4-BE49-F238E27FC236}">
-                <a16:creationId xmlns:a16="http://schemas.microsoft.com/office/drawing/2014/main" id="{88D0B3EA-01FF-409E-A854-FB0A2A26533D}"/>
+                <a16:creationId xmlns:a16="http://schemas.microsoft.com/office/drawing/2014/main" id="{44CC4129-B9AB-4CA4-8268-06C6F749C2FA}"/>
               </a:ext>
             </a:extLst>
           </p:cNvPr>
@@ -8164,7 +8164,7 @@
           <p:cNvPr id="11" name="case-row-4">
             <a:extLst xmlns:a="http://schemas.openxmlformats.org/drawingml/2006/main">
               <a:ext uri="{FF2B5EF4-FFF2-40B4-BE49-F238E27FC236}">
-                <a16:creationId xmlns:a16="http://schemas.microsoft.com/office/drawing/2014/main" id="{8EED53F0-BB67-4BFC-9B3D-D8887E6AC299}"/>
+                <a16:creationId xmlns:a16="http://schemas.microsoft.com/office/drawing/2014/main" id="{F35118BD-881B-45F8-A1E0-411D366D0E6C}"/>
               </a:ext>
             </a:extLst>
           </p:cNvPr>
@@ -8228,7 +8228,7 @@
           <p:cNvPr id="12" name="s8-takeaway-rule">
             <a:extLst xmlns:a="http://schemas.openxmlformats.org/drawingml/2006/main">
               <a:ext uri="{FF2B5EF4-FFF2-40B4-BE49-F238E27FC236}">
-                <a16:creationId xmlns:a16="http://schemas.microsoft.com/office/drawing/2014/main" id="{4AA57F42-FE57-44F0-B5EE-49F5B5117BE5}"/>
+                <a16:creationId xmlns:a16="http://schemas.microsoft.com/office/drawing/2014/main" id="{61C1BC75-FC10-4C19-819C-4C23C662A4E6}"/>
               </a:ext>
             </a:extLst>
           </p:cNvPr>
@@ -8261,7 +8261,7 @@
           <p:cNvPr id="13" name="s8-takeaway">
             <a:extLst xmlns:a="http://schemas.openxmlformats.org/drawingml/2006/main">
               <a:ext uri="{FF2B5EF4-FFF2-40B4-BE49-F238E27FC236}">
-                <a16:creationId xmlns:a16="http://schemas.microsoft.com/office/drawing/2014/main" id="{1ECE97D3-453B-4FFC-8AFC-BC7C7C1916E1}"/>
+                <a16:creationId xmlns:a16="http://schemas.microsoft.com/office/drawing/2014/main" id="{280750E7-92D6-4AEE-B435-05D6681F5FAE}"/>
               </a:ext>
             </a:extLst>
           </p:cNvPr>
@@ -8317,7 +8317,7 @@
     </p:spTree>
     <p:extLst>
       <p:ext uri="{BB962C8B-B14F-4D97-AF65-F5344CB8AC3E}">
-        <p14:creationId xmlns:p14="http://schemas.microsoft.com/office/powerpoint/2010/main" val="450137139"/>
+        <p14:creationId xmlns:p14="http://schemas.microsoft.com/office/powerpoint/2010/main" val="1403979597"/>
       </p:ext>
     </p:extLst>
   </p:cSld>
@@ -8348,7 +8348,7 @@
           <p:cNvPr id="1" name="s9-rule">
             <a:extLst xmlns:a="http://schemas.openxmlformats.org/drawingml/2006/main">
               <a:ext uri="{FF2B5EF4-FFF2-40B4-BE49-F238E27FC236}">
-                <a16:creationId xmlns:a16="http://schemas.microsoft.com/office/drawing/2014/main" id="{BB84B106-82C9-4C92-B008-2803BF3B6B57}"/>
+                <a16:creationId xmlns:a16="http://schemas.microsoft.com/office/drawing/2014/main" id="{99CE19AE-CEBF-4D6B-B2F7-98C227B1D48E}"/>
               </a:ext>
             </a:extLst>
           </p:cNvPr>
@@ -8381,7 +8381,7 @@
           <p:cNvPr id="2" name="s9-eyebrow">
             <a:extLst xmlns:a="http://schemas.openxmlformats.org/drawingml/2006/main">
               <a:ext uri="{FF2B5EF4-FFF2-40B4-BE49-F238E27FC236}">
-                <a16:creationId xmlns:a16="http://schemas.microsoft.com/office/drawing/2014/main" id="{187ABF7B-A479-4574-A7AC-1EDEF790C2FD}"/>
+                <a16:creationId xmlns:a16="http://schemas.microsoft.com/office/drawing/2014/main" id="{77A373BA-6528-4FF2-929E-952D7EC786F5}"/>
               </a:ext>
             </a:extLst>
           </p:cNvPr>
@@ -8439,7 +8439,7 @@
           <p:cNvPr id="3" name="s9-title">
             <a:extLst xmlns:a="http://schemas.openxmlformats.org/drawingml/2006/main">
               <a:ext uri="{FF2B5EF4-FFF2-40B4-BE49-F238E27FC236}">
-                <a16:creationId xmlns:a16="http://schemas.microsoft.com/office/drawing/2014/main" id="{C6BBB53E-AA44-49ED-AB44-912410070ED1}"/>
+                <a16:creationId xmlns:a16="http://schemas.microsoft.com/office/drawing/2014/main" id="{C1931E4E-D515-4BC1-81C6-CA17F0D55510}"/>
               </a:ext>
             </a:extLst>
           </p:cNvPr>
@@ -8497,7 +8497,7 @@
           <p:cNvPr id="4" name="s9-footer">
             <a:extLst xmlns:a="http://schemas.openxmlformats.org/drawingml/2006/main">
               <a:ext uri="{FF2B5EF4-FFF2-40B4-BE49-F238E27FC236}">
-                <a16:creationId xmlns:a16="http://schemas.microsoft.com/office/drawing/2014/main" id="{921B45F0-1374-41F3-BBE3-F07A3CC8DD0B}"/>
+                <a16:creationId xmlns:a16="http://schemas.microsoft.com/office/drawing/2014/main" id="{7662F5D4-BDCE-4DA5-AE39-EB3249E1163D}"/>
               </a:ext>
             </a:extLst>
           </p:cNvPr>
@@ -8528,7 +8528,7 @@
           <p:cNvPr id="5" name="s9-identity">
             <a:extLst xmlns:a="http://schemas.openxmlformats.org/drawingml/2006/main">
               <a:ext uri="{FF2B5EF4-FFF2-40B4-BE49-F238E27FC236}">
-                <a16:creationId xmlns:a16="http://schemas.microsoft.com/office/drawing/2014/main" id="{4178252F-2E35-41D9-9575-5E33BB692371}"/>
+                <a16:creationId xmlns:a16="http://schemas.microsoft.com/office/drawing/2014/main" id="{3F8AF63F-FF2D-4294-9E61-F656A352991E}"/>
               </a:ext>
             </a:extLst>
           </p:cNvPr>
@@ -8586,7 +8586,7 @@
           <p:cNvPr id="6" name="practice-circle-0">
             <a:extLst xmlns:a="http://schemas.openxmlformats.org/drawingml/2006/main">
               <a:ext uri="{FF2B5EF4-FFF2-40B4-BE49-F238E27FC236}">
-                <a16:creationId xmlns:a16="http://schemas.microsoft.com/office/drawing/2014/main" id="{B82809CF-628E-4A29-BBE4-70A397001545}"/>
+                <a16:creationId xmlns:a16="http://schemas.microsoft.com/office/drawing/2014/main" id="{7CC897DF-F80C-4001-8FE8-F723D20BF04A}"/>
               </a:ext>
             </a:extLst>
           </p:cNvPr>
@@ -8619,7 +8619,7 @@
           <p:cNvPr id="7" name="practice-number-0">
             <a:extLst xmlns:a="http://schemas.openxmlformats.org/drawingml/2006/main">
               <a:ext uri="{FF2B5EF4-FFF2-40B4-BE49-F238E27FC236}">
-                <a16:creationId xmlns:a16="http://schemas.microsoft.com/office/drawing/2014/main" id="{1D61E3FC-CA52-48F5-9B60-57F43BC3F3D6}"/>
+                <a16:creationId xmlns:a16="http://schemas.microsoft.com/office/drawing/2014/main" id="{A85F6848-DEC6-4FBA-95A8-CA5B2187B2CC}"/>
               </a:ext>
             </a:extLst>
           </p:cNvPr>
@@ -8677,7 +8677,7 @@
           <p:cNvPr id="8" name="practice-item-0">
             <a:extLst xmlns:a="http://schemas.openxmlformats.org/drawingml/2006/main">
               <a:ext uri="{FF2B5EF4-FFF2-40B4-BE49-F238E27FC236}">
-                <a16:creationId xmlns:a16="http://schemas.microsoft.com/office/drawing/2014/main" id="{85400721-1C6C-44E2-80B5-9025AA41C45C}"/>
+                <a16:creationId xmlns:a16="http://schemas.microsoft.com/office/drawing/2014/main" id="{BF75EFF0-37F2-41C2-81B6-5C19AD7A9192}"/>
               </a:ext>
             </a:extLst>
           </p:cNvPr>
@@ -8741,7 +8741,7 @@
           <p:cNvPr id="9" name="practice-connector-0">
             <a:extLst xmlns:a="http://schemas.openxmlformats.org/drawingml/2006/main">
               <a:ext uri="{FF2B5EF4-FFF2-40B4-BE49-F238E27FC236}">
-                <a16:creationId xmlns:a16="http://schemas.microsoft.com/office/drawing/2014/main" id="{1C333AC0-6805-4441-BEC6-521C9A4A74C3}"/>
+                <a16:creationId xmlns:a16="http://schemas.microsoft.com/office/drawing/2014/main" id="{B7B19A9C-D766-4E43-8A32-914B86166A8C}"/>
               </a:ext>
             </a:extLst>
           </p:cNvPr>
@@ -8772,7 +8772,7 @@
           <p:cNvPr id="10" name="practice-circle-1">
             <a:extLst xmlns:a="http://schemas.openxmlformats.org/drawingml/2006/main">
               <a:ext uri="{FF2B5EF4-FFF2-40B4-BE49-F238E27FC236}">
-                <a16:creationId xmlns:a16="http://schemas.microsoft.com/office/drawing/2014/main" id="{DB988DA6-26D8-4EF6-9D18-DA291EF9BAB1}"/>
+                <a16:creationId xmlns:a16="http://schemas.microsoft.com/office/drawing/2014/main" id="{CA28FBC9-68E2-4A49-B8FF-07F5081CFEC8}"/>
               </a:ext>
             </a:extLst>
           </p:cNvPr>
@@ -8805,7 +8805,7 @@
           <p:cNvPr id="11" name="practice-number-1">
             <a:extLst xmlns:a="http://schemas.openxmlformats.org/drawingml/2006/main">
               <a:ext uri="{FF2B5EF4-FFF2-40B4-BE49-F238E27FC236}">
-                <a16:creationId xmlns:a16="http://schemas.microsoft.com/office/drawing/2014/main" id="{53840AA2-71DB-42D0-B8C3-B3AADFEBC678}"/>
+                <a16:creationId xmlns:a16="http://schemas.microsoft.com/office/drawing/2014/main" id="{B1DD76B6-8948-460F-A403-183FAEF9C41F}"/>
               </a:ext>
             </a:extLst>
           </p:cNvPr>
@@ -8863,7 +8863,7 @@
           <p:cNvPr id="12" name="practice-item-1">
             <a:extLst xmlns:a="http://schemas.openxmlformats.org/drawingml/2006/main">
               <a:ext uri="{FF2B5EF4-FFF2-40B4-BE49-F238E27FC236}">
-                <a16:creationId xmlns:a16="http://schemas.microsoft.com/office/drawing/2014/main" id="{C399CA5B-B31F-4463-BAD2-0885DC436A08}"/>
+                <a16:creationId xmlns:a16="http://schemas.microsoft.com/office/drawing/2014/main" id="{5EDFDC7A-5A00-4A3A-B594-F4B0584D6A22}"/>
               </a:ext>
             </a:extLst>
           </p:cNvPr>
@@ -8927,7 +8927,7 @@
           <p:cNvPr id="13" name="practice-connector-1">
             <a:extLst xmlns:a="http://schemas.openxmlformats.org/drawingml/2006/main">
               <a:ext uri="{FF2B5EF4-FFF2-40B4-BE49-F238E27FC236}">
-                <a16:creationId xmlns:a16="http://schemas.microsoft.com/office/drawing/2014/main" id="{F401957D-3303-4AA7-A926-6B9A61BB060B}"/>
+                <a16:creationId xmlns:a16="http://schemas.microsoft.com/office/drawing/2014/main" id="{B4BBE169-7EA3-440F-A1A6-2195D5EEACED}"/>
               </a:ext>
             </a:extLst>
           </p:cNvPr>
@@ -8958,7 +8958,7 @@
           <p:cNvPr id="14" name="practice-circle-2">
             <a:extLst xmlns:a="http://schemas.openxmlformats.org/drawingml/2006/main">
               <a:ext uri="{FF2B5EF4-FFF2-40B4-BE49-F238E27FC236}">
-                <a16:creationId xmlns:a16="http://schemas.microsoft.com/office/drawing/2014/main" id="{3A41A96C-104D-4159-BE0A-0EA5190AA748}"/>
+                <a16:creationId xmlns:a16="http://schemas.microsoft.com/office/drawing/2014/main" id="{F4E1DDD0-6614-4817-B002-1A678960D07F}"/>
               </a:ext>
             </a:extLst>
           </p:cNvPr>
@@ -8991,7 +8991,7 @@
           <p:cNvPr id="15" name="practice-number-2">
             <a:extLst xmlns:a="http://schemas.openxmlformats.org/drawingml/2006/main">
               <a:ext uri="{FF2B5EF4-FFF2-40B4-BE49-F238E27FC236}">
-                <a16:creationId xmlns:a16="http://schemas.microsoft.com/office/drawing/2014/main" id="{7AA08ED3-BF68-4269-ABB0-32A55A1970C8}"/>
+                <a16:creationId xmlns:a16="http://schemas.microsoft.com/office/drawing/2014/main" id="{9386E9BF-FE59-4ED7-8578-E072B46A9C64}"/>
               </a:ext>
             </a:extLst>
           </p:cNvPr>
@@ -9049,7 +9049,7 @@
           <p:cNvPr id="16" name="practice-item-2">
             <a:extLst xmlns:a="http://schemas.openxmlformats.org/drawingml/2006/main">
               <a:ext uri="{FF2B5EF4-FFF2-40B4-BE49-F238E27FC236}">
-                <a16:creationId xmlns:a16="http://schemas.microsoft.com/office/drawing/2014/main" id="{0236A86C-A2AE-4EC0-BF7F-5BFBAEC32079}"/>
+                <a16:creationId xmlns:a16="http://schemas.microsoft.com/office/drawing/2014/main" id="{8054F743-8422-4F42-8EA0-4D6D81E7437F}"/>
               </a:ext>
             </a:extLst>
           </p:cNvPr>
@@ -9111,7 +9111,7 @@
     </p:spTree>
     <p:extLst>
       <p:ext uri="{BB962C8B-B14F-4D97-AF65-F5344CB8AC3E}">
-        <p14:creationId xmlns:p14="http://schemas.microsoft.com/office/powerpoint/2010/main" val="1817740547"/>
+        <p14:creationId xmlns:p14="http://schemas.microsoft.com/office/powerpoint/2010/main" val="1224821281"/>
       </p:ext>
     </p:extLst>
   </p:cSld>
